--- a/curso/pptx/S04.pptx
+++ b/curso/pptx/S04.pptx
@@ -3892,8 +3892,8 @@
         </p:nvSpPr>
         <p:spPr>
           <a:xfrm>
-            <a:off x="640000" y="420000"/>
-            <a:ext cx="10912000" cy="420000"/>
+            <a:off x="10652000" y="380000"/>
+            <a:ext cx="900000" cy="800000"/>
           </a:xfrm>
           <a:prstGeom prst="rect">
             <a:avLst/>
@@ -3908,17 +3908,17 @@
           <a:p>
             <a:pPr>
               <a:spcAft>
-                <a:spcPts val="810"/>
-              </a:spcAft>
-            </a:pPr>
-            <a:r>
-              <a:rPr sz="1800" b="1">
+                <a:spcPts val="1980"/>
+              </a:spcAft>
+            </a:pPr>
+            <a:r>
+              <a:rPr sz="4400" b="0">
                 <a:solidFill>
                   <a:srgbClr val="1F2A44"/>
                 </a:solidFill>
                 <a:latin typeface="Nunito Sans"/>
               </a:rPr>
-              <a:t>🦉 Aula de Filosofía</a:t>
+              <a:t>🙃</a:t>
             </a:r>
           </a:p>
         </p:txBody>

--- a/curso/pptx/S04.pptx
+++ b/curso/pptx/S04.pptx
@@ -473,426 +473,6 @@
     </a:lvl9pPr>
   </p:notesStyle>
 </p:notesMaster>
-</file>
-
-<file path=ppt/notesSlides/notesSlide1.xml><?xml version="1.0" encoding="utf-8"?>
-<p:notes xmlns:a="http://schemas.openxmlformats.org/drawingml/2006/main" xmlns:p="http://schemas.openxmlformats.org/presentationml/2006/main" xmlns:r="http://schemas.openxmlformats.org/officeDocument/2006/relationships">
-  <p:cSld>
-    <p:spTree>
-      <p:nvGrpSpPr>
-        <p:cNvPr id="1" name=""/>
-        <p:cNvGrpSpPr/>
-        <p:nvPr/>
-      </p:nvGrpSpPr>
-      <p:grpSpPr>
-        <a:xfrm>
-          <a:off x="0" y="0"/>
-          <a:ext cx="0" cy="0"/>
-          <a:chOff x="0" y="0"/>
-          <a:chExt cx="0" cy="0"/>
-        </a:xfrm>
-      </p:grpSpPr>
-      <p:sp>
-        <p:nvSpPr>
-          <p:cNvPr id="2" name="Slide Image Placeholder 1"/>
-          <p:cNvSpPr>
-            <a:spLocks noGrp="1"/>
-          </p:cNvSpPr>
-          <p:nvPr>
-            <p:ph type="sldImg" idx="2"/>
-          </p:nvPr>
-        </p:nvSpPr>
-        <p:spPr/>
-      </p:sp>
-      <p:sp>
-        <p:nvSpPr>
-          <p:cNvPr id="3" name="Notes Placeholder 2"/>
-          <p:cNvSpPr>
-            <a:spLocks noGrp="1"/>
-          </p:cNvSpPr>
-          <p:nvPr>
-            <p:ph type="body" idx="3" sz="quarter"/>
-          </p:nvPr>
-        </p:nvSpPr>
-        <p:spPr/>
-        <p:txBody>
-          <a:bodyPr/>
-          <a:lstStyle/>
-          <a:p>
-            <a:r>
-              <a:t>3 minutos. Sin apuntes. Es para recordar, no cuenta para nota.</a:t>
-            </a:r>
-          </a:p>
-        </p:txBody>
-      </p:sp>
-      <p:sp>
-        <p:nvSpPr>
-          <p:cNvPr id="4" name="Slide Number Placeholder 3"/>
-          <p:cNvSpPr>
-            <a:spLocks noGrp="1"/>
-          </p:cNvSpPr>
-          <p:nvPr>
-            <p:ph type="sldNum" idx="5" sz="quarter"/>
-          </p:nvPr>
-        </p:nvSpPr>
-        <p:spPr/>
-      </p:sp>
-    </p:spTree>
-  </p:cSld>
-  <p:clrMapOvr>
-    <a:masterClrMapping/>
-  </p:clrMapOvr>
-</p:notes>
-</file>
-
-<file path=ppt/notesSlides/notesSlide2.xml><?xml version="1.0" encoding="utf-8"?>
-<p:notes xmlns:a="http://schemas.openxmlformats.org/drawingml/2006/main" xmlns:p="http://schemas.openxmlformats.org/presentationml/2006/main" xmlns:r="http://schemas.openxmlformats.org/officeDocument/2006/relationships">
-  <p:cSld>
-    <p:spTree>
-      <p:nvGrpSpPr>
-        <p:cNvPr id="1" name=""/>
-        <p:cNvGrpSpPr/>
-        <p:nvPr/>
-      </p:nvGrpSpPr>
-      <p:grpSpPr>
-        <a:xfrm>
-          <a:off x="0" y="0"/>
-          <a:ext cx="0" cy="0"/>
-          <a:chOff x="0" y="0"/>
-          <a:chExt cx="0" cy="0"/>
-        </a:xfrm>
-      </p:grpSpPr>
-      <p:sp>
-        <p:nvSpPr>
-          <p:cNvPr id="2" name="Slide Image Placeholder 1"/>
-          <p:cNvSpPr>
-            <a:spLocks noGrp="1"/>
-          </p:cNvSpPr>
-          <p:nvPr>
-            <p:ph type="sldImg" idx="2"/>
-          </p:nvPr>
-        </p:nvSpPr>
-        <p:spPr/>
-      </p:sp>
-      <p:sp>
-        <p:nvSpPr>
-          <p:cNvPr id="3" name="Notes Placeholder 2"/>
-          <p:cNvSpPr>
-            <a:spLocks noGrp="1"/>
-          </p:cNvSpPr>
-          <p:nvPr>
-            <p:ph type="body" idx="3" sz="quarter"/>
-          </p:nvPr>
-        </p:nvSpPr>
-        <p:spPr/>
-        <p:txBody>
-          <a:bodyPr/>
-          <a:lstStyle/>
-          <a:p>
-            <a:r>
-              <a:t>3 minutos. Sin apuntes. Es para recordar, no cuenta para nota.</a:t>
-            </a:r>
-          </a:p>
-        </p:txBody>
-      </p:sp>
-      <p:sp>
-        <p:nvSpPr>
-          <p:cNvPr id="4" name="Slide Number Placeholder 3"/>
-          <p:cNvSpPr>
-            <a:spLocks noGrp="1"/>
-          </p:cNvSpPr>
-          <p:nvPr>
-            <p:ph type="sldNum" idx="5" sz="quarter"/>
-          </p:nvPr>
-        </p:nvSpPr>
-        <p:spPr/>
-      </p:sp>
-    </p:spTree>
-  </p:cSld>
-  <p:clrMapOvr>
-    <a:masterClrMapping/>
-  </p:clrMapOvr>
-</p:notes>
-</file>
-
-<file path=ppt/notesSlides/notesSlide3.xml><?xml version="1.0" encoding="utf-8"?>
-<p:notes xmlns:a="http://schemas.openxmlformats.org/drawingml/2006/main" xmlns:p="http://schemas.openxmlformats.org/presentationml/2006/main" xmlns:r="http://schemas.openxmlformats.org/officeDocument/2006/relationships">
-  <p:cSld>
-    <p:spTree>
-      <p:nvGrpSpPr>
-        <p:cNvPr id="1" name=""/>
-        <p:cNvGrpSpPr/>
-        <p:nvPr/>
-      </p:nvGrpSpPr>
-      <p:grpSpPr>
-        <a:xfrm>
-          <a:off x="0" y="0"/>
-          <a:ext cx="0" cy="0"/>
-          <a:chOff x="0" y="0"/>
-          <a:chExt cx="0" cy="0"/>
-        </a:xfrm>
-      </p:grpSpPr>
-      <p:sp>
-        <p:nvSpPr>
-          <p:cNvPr id="2" name="Slide Image Placeholder 1"/>
-          <p:cNvSpPr>
-            <a:spLocks noGrp="1"/>
-          </p:cNvSpPr>
-          <p:nvPr>
-            <p:ph type="sldImg" idx="2"/>
-          </p:nvPr>
-        </p:nvSpPr>
-        <p:spPr/>
-      </p:sp>
-      <p:sp>
-        <p:nvSpPr>
-          <p:cNvPr id="3" name="Notes Placeholder 2"/>
-          <p:cNvSpPr>
-            <a:spLocks noGrp="1"/>
-          </p:cNvSpPr>
-          <p:nvPr>
-            <p:ph type="body" idx="3" sz="quarter"/>
-          </p:nvPr>
-        </p:nvSpPr>
-        <p:spPr/>
-        <p:txBody>
-          <a:bodyPr/>
-          <a:lstStyle/>
-          <a:p>
-            <a:r>
-              <a:t>Nadie tiene que contestar: solo pensarlo.</a:t>
-            </a:r>
-          </a:p>
-        </p:txBody>
-      </p:sp>
-      <p:sp>
-        <p:nvSpPr>
-          <p:cNvPr id="4" name="Slide Number Placeholder 3"/>
-          <p:cNvSpPr>
-            <a:spLocks noGrp="1"/>
-          </p:cNvSpPr>
-          <p:nvPr>
-            <p:ph type="sldNum" idx="5" sz="quarter"/>
-          </p:nvPr>
-        </p:nvSpPr>
-        <p:spPr/>
-      </p:sp>
-    </p:spTree>
-  </p:cSld>
-  <p:clrMapOvr>
-    <a:masterClrMapping/>
-  </p:clrMapOvr>
-</p:notes>
-</file>
-
-<file path=ppt/notesSlides/notesSlide4.xml><?xml version="1.0" encoding="utf-8"?>
-<p:notes xmlns:a="http://schemas.openxmlformats.org/drawingml/2006/main" xmlns:p="http://schemas.openxmlformats.org/presentationml/2006/main" xmlns:r="http://schemas.openxmlformats.org/officeDocument/2006/relationships">
-  <p:cSld>
-    <p:spTree>
-      <p:nvGrpSpPr>
-        <p:cNvPr id="1" name=""/>
-        <p:cNvGrpSpPr/>
-        <p:nvPr/>
-      </p:nvGrpSpPr>
-      <p:grpSpPr>
-        <a:xfrm>
-          <a:off x="0" y="0"/>
-          <a:ext cx="0" cy="0"/>
-          <a:chOff x="0" y="0"/>
-          <a:chExt cx="0" cy="0"/>
-        </a:xfrm>
-      </p:grpSpPr>
-      <p:sp>
-        <p:nvSpPr>
-          <p:cNvPr id="2" name="Slide Image Placeholder 1"/>
-          <p:cNvSpPr>
-            <a:spLocks noGrp="1"/>
-          </p:cNvSpPr>
-          <p:nvPr>
-            <p:ph type="sldImg" idx="2"/>
-          </p:nvPr>
-        </p:nvSpPr>
-        <p:spPr/>
-      </p:sp>
-      <p:sp>
-        <p:nvSpPr>
-          <p:cNvPr id="3" name="Notes Placeholder 2"/>
-          <p:cNvSpPr>
-            <a:spLocks noGrp="1"/>
-          </p:cNvSpPr>
-          <p:nvPr>
-            <p:ph type="body" idx="3" sz="quarter"/>
-          </p:nvPr>
-        </p:nvSpPr>
-        <p:spPr/>
-        <p:txBody>
-          <a:bodyPr/>
-          <a:lstStyle/>
-          <a:p>
-            <a:r>
-              <a:t>Dejar unos segundos para que piensen la respuesta fácil antes de enseñar los pasos.</a:t>
-            </a:r>
-          </a:p>
-        </p:txBody>
-      </p:sp>
-      <p:sp>
-        <p:nvSpPr>
-          <p:cNvPr id="4" name="Slide Number Placeholder 3"/>
-          <p:cNvSpPr>
-            <a:spLocks noGrp="1"/>
-          </p:cNvSpPr>
-          <p:nvPr>
-            <p:ph type="sldNum" idx="5" sz="quarter"/>
-          </p:nvPr>
-        </p:nvSpPr>
-        <p:spPr/>
-      </p:sp>
-    </p:spTree>
-  </p:cSld>
-  <p:clrMapOvr>
-    <a:masterClrMapping/>
-  </p:clrMapOvr>
-</p:notes>
-</file>
-
-<file path=ppt/notesSlides/notesSlide5.xml><?xml version="1.0" encoding="utf-8"?>
-<p:notes xmlns:a="http://schemas.openxmlformats.org/drawingml/2006/main" xmlns:p="http://schemas.openxmlformats.org/presentationml/2006/main" xmlns:r="http://schemas.openxmlformats.org/officeDocument/2006/relationships">
-  <p:cSld>
-    <p:spTree>
-      <p:nvGrpSpPr>
-        <p:cNvPr id="1" name=""/>
-        <p:cNvGrpSpPr/>
-        <p:nvPr/>
-      </p:nvGrpSpPr>
-      <p:grpSpPr>
-        <a:xfrm>
-          <a:off x="0" y="0"/>
-          <a:ext cx="0" cy="0"/>
-          <a:chOff x="0" y="0"/>
-          <a:chExt cx="0" cy="0"/>
-        </a:xfrm>
-      </p:grpSpPr>
-      <p:sp>
-        <p:nvSpPr>
-          <p:cNvPr id="2" name="Slide Image Placeholder 1"/>
-          <p:cNvSpPr>
-            <a:spLocks noGrp="1"/>
-          </p:cNvSpPr>
-          <p:nvPr>
-            <p:ph type="sldImg" idx="2"/>
-          </p:nvPr>
-        </p:nvSpPr>
-        <p:spPr/>
-      </p:sp>
-      <p:sp>
-        <p:nvSpPr>
-          <p:cNvPr id="3" name="Notes Placeholder 2"/>
-          <p:cNvSpPr>
-            <a:spLocks noGrp="1"/>
-          </p:cNvSpPr>
-          <p:nvPr>
-            <p:ph type="body" idx="3" sz="quarter"/>
-          </p:nvPr>
-        </p:nvSpPr>
-        <p:spPr/>
-        <p:txBody>
-          <a:bodyPr/>
-          <a:lstStyle/>
-          <a:p>
-            <a:r>
-              <a:t>Dejar 2 minutos para que lo escriban. La diapositiva siguiente muestra el resumen.</a:t>
-            </a:r>
-          </a:p>
-        </p:txBody>
-      </p:sp>
-      <p:sp>
-        <p:nvSpPr>
-          <p:cNvPr id="4" name="Slide Number Placeholder 3"/>
-          <p:cNvSpPr>
-            <a:spLocks noGrp="1"/>
-          </p:cNvSpPr>
-          <p:nvPr>
-            <p:ph type="sldNum" idx="5" sz="quarter"/>
-          </p:nvPr>
-        </p:nvSpPr>
-        <p:spPr/>
-      </p:sp>
-    </p:spTree>
-  </p:cSld>
-  <p:clrMapOvr>
-    <a:masterClrMapping/>
-  </p:clrMapOvr>
-</p:notes>
-</file>
-
-<file path=ppt/notesSlides/notesSlide6.xml><?xml version="1.0" encoding="utf-8"?>
-<p:notes xmlns:a="http://schemas.openxmlformats.org/drawingml/2006/main" xmlns:p="http://schemas.openxmlformats.org/presentationml/2006/main" xmlns:r="http://schemas.openxmlformats.org/officeDocument/2006/relationships">
-  <p:cSld>
-    <p:spTree>
-      <p:nvGrpSpPr>
-        <p:cNvPr id="1" name=""/>
-        <p:cNvGrpSpPr/>
-        <p:nvPr/>
-      </p:nvGrpSpPr>
-      <p:grpSpPr>
-        <a:xfrm>
-          <a:off x="0" y="0"/>
-          <a:ext cx="0" cy="0"/>
-          <a:chOff x="0" y="0"/>
-          <a:chExt cx="0" cy="0"/>
-        </a:xfrm>
-      </p:grpSpPr>
-      <p:sp>
-        <p:nvSpPr>
-          <p:cNvPr id="2" name="Slide Image Placeholder 1"/>
-          <p:cNvSpPr>
-            <a:spLocks noGrp="1"/>
-          </p:cNvSpPr>
-          <p:nvPr>
-            <p:ph type="sldImg" idx="2"/>
-          </p:nvPr>
-        </p:nvSpPr>
-        <p:spPr/>
-      </p:sp>
-      <p:sp>
-        <p:nvSpPr>
-          <p:cNvPr id="3" name="Notes Placeholder 2"/>
-          <p:cNvSpPr>
-            <a:spLocks noGrp="1"/>
-          </p:cNvSpPr>
-          <p:nvPr>
-            <p:ph type="body" idx="3" sz="quarter"/>
-          </p:nvPr>
-        </p:nvSpPr>
-        <p:spPr/>
-        <p:txBody>
-          <a:bodyPr/>
-          <a:lstStyle/>
-          <a:p>
-            <a:r>
-              <a:t>Buscar: «preguntas abiertas y cerradas ejemplos» · «cómo hacer buenas preguntas»</a:t>
-            </a:r>
-          </a:p>
-        </p:txBody>
-      </p:sp>
-      <p:sp>
-        <p:nvSpPr>
-          <p:cNvPr id="4" name="Slide Number Placeholder 3"/>
-          <p:cNvSpPr>
-            <a:spLocks noGrp="1"/>
-          </p:cNvSpPr>
-          <p:nvPr>
-            <p:ph type="sldNum" idx="5" sz="quarter"/>
-          </p:nvPr>
-        </p:nvSpPr>
-        <p:spPr/>
-      </p:sp>
-    </p:spTree>
-  </p:cSld>
-  <p:clrMapOvr>
-    <a:masterClrMapping/>
-  </p:clrMapOvr>
-</p:notes>
 </file>
 
 <file path=ppt/slideLayouts/slideLayout1.xml><?xml version="1.0" encoding="utf-8"?>

--- a/curso/pptx/S04.pptx
+++ b/curso/pptx/S04.pptx
@@ -3801,7 +3801,7 @@
                 </a:solidFill>
                 <a:latin typeface="Nunito Sans"/>
               </a:rPr>
-              <a:t>Dylan dice: «El profe de Música se va del instituto».</a:t>
+              <a:t>Un chico dice: «El entrenador se va del equipo».</a:t>
             </a:r>
           </a:p>
         </p:txBody>
@@ -3849,7 +3849,7 @@
                 </a:solidFill>
                 <a:latin typeface="Nunito Sans"/>
               </a:rPr>
-              <a:t>Pregunta cerrada: «¿Es verdad?». Dylan: «Sí». No aprendo nada nuevo.</a:t>
+              <a:t>Pregunta cerrada: «¿Es verdad?». El chico: «Sí». No aprendo nada nuevo.</a:t>
             </a:r>
           </a:p>
           <a:p>
@@ -3874,7 +3874,7 @@
                 </a:solidFill>
                 <a:latin typeface="Nunito Sans"/>
               </a:rPr>
-              <a:t>Pregunta abierta: «¿Cómo lo sabes?». Dylan: «Me lo dijo uno de 4.º».</a:t>
+              <a:t>Pregunta abierta: «¿Cómo lo sabes?». El chico: «Me lo dijo uno de 4.º».</a:t>
             </a:r>
           </a:p>
           <a:p>
@@ -3899,7 +3899,7 @@
                 </a:solidFill>
                 <a:latin typeface="Nunito Sans"/>
               </a:rPr>
-              <a:t>Otra más: «¿Y cómo lo sabe él?». Dylan: «Ni idea».</a:t>
+              <a:t>Otra más: «¿Y cómo lo sabe él?». El chico: «Ni idea».</a:t>
             </a:r>
           </a:p>
           <a:p>
@@ -4419,7 +4419,7 @@
                 </a:solidFill>
                 <a:latin typeface="Nunito Sans"/>
               </a:rPr>
-              <a:t>«¿Por qué los de 1.º son tan pesados?»</a:t>
+              <a:t>«¿Por qué los hermanos pequeños son tan pesados?»</a:t>
             </a:r>
           </a:p>
         </p:txBody>
@@ -4517,7 +4517,7 @@
                 </a:solidFill>
                 <a:latin typeface="Nunito Sans"/>
               </a:rPr>
-              <a:t>Pero ya da por hecho algo: que los de 1.º son pesados.</a:t>
+              <a:t>Pero ya da por hecho algo: que los hermanos pequeños son pesados.</a:t>
             </a:r>
           </a:p>
           <a:p>
@@ -7152,7 +7152,7 @@
                 </a:solidFill>
                 <a:latin typeface="Nunito Sans"/>
               </a:rPr>
-              <a:t>Leire vuelve de la excursión. Su madre le pregunta: «¿Bien?». Leire: «Sí». Su padre le pregunta: «¿Qué es lo que más te ha gustado?».</a:t>
+              <a:t>Una chica vuelve de la excursión. Su madre le pregunta: «¿Bien?». La chica: «Sí». Su padre le pregunta: «¿Qué es lo que más te ha gustado?».</a:t>
             </a:r>
           </a:p>
         </p:txBody>

--- a/curso/pptx/S04.pptx
+++ b/curso/pptx/S04.pptx
@@ -22,8 +22,6 @@
     <p:sldId id="270" r:id="rId22"/>
     <p:sldId id="271" r:id="rId23"/>
     <p:sldId id="272" r:id="rId24"/>
-    <p:sldId id="273" r:id="rId25"/>
-    <p:sldId id="274" r:id="rId26"/>
   </p:sldIdLst>
   <p:sldSz cx="12192000" cy="6858000" type="screen4x3"/>
   <p:notesSz cx="6858000" cy="9144000"/>
@@ -3537,7 +3535,7 @@
                 </a:solidFill>
                 <a:latin typeface="Nunito Sans"/>
               </a:rPr>
-              <a:t>PENSAMIENTO CRÍTICO · SESIÓN 4 · UNIDAD 1 · PENSAR, CREER Y SABER</a:t>
+              <a:t>PENSAMIENTO CRÍTICO · SESIÓN 4 · UNIDAD 1 · PENSAR CRÍTICAMENTE</a:t>
             </a:r>
           </a:p>
         </p:txBody>
@@ -3576,7 +3574,7 @@
                 </a:solidFill>
                 <a:latin typeface="Fredoka"/>
               </a:rPr>
-              <a:t>Hacer buenas preguntas</a:t>
+              <a:t>Convencer y manipular</a:t>
             </a:r>
           </a:p>
         </p:txBody>
@@ -3615,7 +3613,7 @@
                 </a:solidFill>
                 <a:latin typeface="Nunito Sans"/>
               </a:rPr>
-              <a:t>Las preguntas cerradas piden un dato; las abiertas piden explicar. «¿Cómo lo sabes?» pide la fuente y las razones.</a:t>
+              <a:t>Convencer es darte razones para que decidas tú; manipular es esquivar tu juicio o esconderte información para que no pienses.</a:t>
             </a:r>
           </a:p>
         </p:txBody>
@@ -3719,7 +3717,7 @@
                 </a:solidFill>
                 <a:latin typeface="Fredoka"/>
               </a:rPr>
-              <a:t>Caso 1 · Un rumor en el patio</a:t>
+              <a:t>Caso 1 · El móvil de un chico</a:t>
             </a:r>
           </a:p>
         </p:txBody>
@@ -3801,7 +3799,7 @@
                 </a:solidFill>
                 <a:latin typeface="Nunito Sans"/>
               </a:rPr>
-              <a:t>Un chico dice: «El entrenador se va del equipo».</a:t>
+              <a:t>Un chico quiere un móvil nuevo. Le dice a su padre: «El mío tiene 5 años, la batería dura 2 horas y arreglarla cuesta casi lo mismo».</a:t>
             </a:r>
           </a:p>
         </p:txBody>
@@ -3849,7 +3847,7 @@
                 </a:solidFill>
                 <a:latin typeface="Nunito Sans"/>
               </a:rPr>
-              <a:t>Pregunta cerrada: «¿Es verdad?». El chico: «Sí». No aprendo nada nuevo.</a:t>
+              <a:t>¿Qué quiere el chico? Que su padre le compre un móvil.</a:t>
             </a:r>
           </a:p>
           <a:p>
@@ -3874,7 +3872,7 @@
                 </a:solidFill>
                 <a:latin typeface="Nunito Sans"/>
               </a:rPr>
-              <a:t>Pregunta abierta: «¿Cómo lo sabes?». El chico: «Me lo dijo uno de 4.º».</a:t>
+              <a:t>¿Cómo lo intenta? Con datos: la edad del móvil, la batería, el precio del arreglo.</a:t>
             </a:r>
           </a:p>
           <a:p>
@@ -3899,7 +3897,7 @@
                 </a:solidFill>
                 <a:latin typeface="Nunito Sans"/>
               </a:rPr>
-              <a:t>Otra más: «¿Y cómo lo sabe él?». El chico: «Ni idea».</a:t>
+              <a:t>¿Puede su padre comprobarlo? Sí: puede mirar la batería y pedir presupuesto.</a:t>
             </a:r>
           </a:p>
           <a:p>
@@ -3924,7 +3922,7 @@
                 </a:solidFill>
                 <a:latin typeface="Nunito Sans"/>
               </a:rPr>
-              <a:t>Conclusión: la buena pregunta muestra que no hay una fuente clara. Todavía no me lo creo.</a:t>
+              <a:t>Conclusión: el chico intenta convencer. Da razones y deja pensar a su padre.</a:t>
             </a:r>
           </a:p>
         </p:txBody>
@@ -4028,7 +4026,7 @@
                 </a:solidFill>
                 <a:latin typeface="Fredoka"/>
               </a:rPr>
-              <a:t>Caso 2 · Un vídeo de TikTok</a:t>
+              <a:t>Caso 2 · Una oferta en una app</a:t>
             </a:r>
           </a:p>
         </p:txBody>
@@ -4110,7 +4108,7 @@
                 </a:solidFill>
                 <a:latin typeface="Nunito Sans"/>
               </a:rPr>
-              <a:t>Un vídeo dice: «Los científicos confirman que dormir con el móvil debajo de la almohada da dolor de cabeza».</a:t>
+              <a:t>«¡Última oportunidad! 9 personas están viendo esta oferta. Termina en 04:59.» No dice el precio normal ni qué pasa si esperas.</a:t>
             </a:r>
           </a:p>
         </p:txBody>
@@ -4158,7 +4156,7 @@
                 </a:solidFill>
                 <a:latin typeface="Nunito Sans"/>
               </a:rPr>
-              <a:t>«¿Qué científicos?» El vídeo no da nombres ni universidad.</a:t>
+              <a:t>¿Qué quieren? Que compre ya.</a:t>
             </a:r>
           </a:p>
           <a:p>
@@ -4183,7 +4181,7 @@
                 </a:solidFill>
                 <a:latin typeface="Nunito Sans"/>
               </a:rPr>
-              <a:t>«¿Dónde se publicó?» No enseña ningún estudio.</a:t>
+              <a:t>¿Cómo lo intentan? Con prisa (el reloj) y con presión (las 9 personas).</a:t>
             </a:r>
           </a:p>
           <a:p>
@@ -4208,7 +4206,7 @@
                 </a:solidFill>
                 <a:latin typeface="Nunito Sans"/>
               </a:rPr>
-              <a:t>«¿Cómo lo midieron?» No lo explica.</a:t>
+              <a:t>¿Me dan razones sobre el producto? No: no sé si es bueno ni si es barato.</a:t>
             </a:r>
           </a:p>
           <a:p>
@@ -4233,7 +4231,7 @@
                 </a:solidFill>
                 <a:latin typeface="Nunito Sans"/>
               </a:rPr>
-              <a:t>Conclusión: sin respuesta a estas preguntas, no tengo razones para creerlo. Tampoco para decir que es mentira.</a:t>
+              <a:t>Conclusión: es manipulación. Quieren que decida antes de pensar.</a:t>
             </a:r>
           </a:p>
         </p:txBody>
@@ -4247,6 +4245,110 @@
 </file>
 
 <file path=ppt/slides/slide12.xml><?xml version="1.0" encoding="utf-8"?>
+<p:sld xmlns:a="http://schemas.openxmlformats.org/drawingml/2006/main" xmlns:p="http://schemas.openxmlformats.org/presentationml/2006/main" xmlns:r="http://schemas.openxmlformats.org/officeDocument/2006/relationships">
+  <p:cSld>
+    <p:bg>
+      <p:bgPr>
+        <a:solidFill>
+          <a:srgbClr val="1F2A44"/>
+        </a:solidFill>
+        <a:effectLst/>
+      </p:bgPr>
+    </p:bg>
+    <p:spTree>
+      <p:nvGrpSpPr>
+        <p:cNvPr id="1" name=""/>
+        <p:cNvGrpSpPr/>
+        <p:nvPr/>
+      </p:nvGrpSpPr>
+      <p:grpSpPr/>
+      <p:sp>
+        <p:nvSpPr>
+          <p:cNvPr id="2" name="TextBox 1"/>
+          <p:cNvSpPr txBox="1"/>
+          <p:nvPr/>
+        </p:nvSpPr>
+        <p:spPr>
+          <a:xfrm>
+            <a:off x="640000" y="2300000"/>
+            <a:ext cx="10912000" cy="500000"/>
+          </a:xfrm>
+          <a:prstGeom prst="rect">
+            <a:avLst/>
+          </a:prstGeom>
+          <a:noFill/>
+        </p:spPr>
+        <p:txBody>
+          <a:bodyPr wrap="square">
+            <a:spAutoFit/>
+          </a:bodyPr>
+          <a:lstStyle/>
+          <a:p>
+            <a:pPr>
+              <a:spcAft>
+                <a:spcPts val="810"/>
+              </a:spcAft>
+            </a:pPr>
+            <a:r>
+              <a:rPr sz="1800" b="1">
+                <a:solidFill>
+                  <a:srgbClr val="F4B183"/>
+                </a:solidFill>
+                <a:latin typeface="Nunito Sans"/>
+              </a:rPr>
+              <a:t>BLOQUE 3</a:t>
+            </a:r>
+          </a:p>
+        </p:txBody>
+      </p:sp>
+      <p:sp>
+        <p:nvSpPr>
+          <p:cNvPr id="3" name="TextBox 2"/>
+          <p:cNvSpPr txBox="1"/>
+          <p:nvPr/>
+        </p:nvSpPr>
+        <p:spPr>
+          <a:xfrm>
+            <a:off x="640000" y="2800000"/>
+            <a:ext cx="10912000" cy="800000"/>
+          </a:xfrm>
+          <a:prstGeom prst="rect">
+            <a:avLst/>
+          </a:prstGeom>
+          <a:noFill/>
+        </p:spPr>
+        <p:txBody>
+          <a:bodyPr wrap="square">
+            <a:spAutoFit/>
+          </a:bodyPr>
+          <a:lstStyle/>
+          <a:p>
+            <a:pPr>
+              <a:spcAft>
+                <a:spcPts val="2160"/>
+              </a:spcAft>
+            </a:pPr>
+            <a:r>
+              <a:rPr sz="4800" b="1">
+                <a:solidFill>
+                  <a:srgbClr val="FBF7EF"/>
+                </a:solidFill>
+                <a:latin typeface="Fredoka"/>
+              </a:rPr>
+              <a:t>Caso trampa</a:t>
+            </a:r>
+          </a:p>
+        </p:txBody>
+      </p:sp>
+    </p:spTree>
+  </p:cSld>
+  <p:clrMapOvr>
+    <a:masterClrMapping/>
+  </p:clrMapOvr>
+</p:sld>
+</file>
+
+<file path=ppt/slides/slide13.xml><?xml version="1.0" encoding="utf-8"?>
 <p:sld xmlns:a="http://schemas.openxmlformats.org/drawingml/2006/main" xmlns:p="http://schemas.openxmlformats.org/presentationml/2006/main" xmlns:r="http://schemas.openxmlformats.org/officeDocument/2006/relationships">
   <p:cSld>
     <p:bg>
@@ -4298,7 +4400,7 @@
                 </a:solidFill>
                 <a:latin typeface="Nunito Sans"/>
               </a:rPr>
-              <a:t>CASO TRAMPA · BLOQUE 2 · CASOS RESUELTOS</a:t>
+              <a:t>CASO TRAMPA · BLOQUE 3 · CASO TRAMPA</a:t>
             </a:r>
           </a:p>
         </p:txBody>
@@ -4337,7 +4439,7 @@
                 </a:solidFill>
                 <a:latin typeface="Fredoka"/>
               </a:rPr>
-              <a:t>⚠ Una pregunta abierta con trampa</a:t>
+              <a:t>⚠ ¿Emocionar = manipular?</a:t>
             </a:r>
           </a:p>
         </p:txBody>
@@ -4419,7 +4521,7 @@
                 </a:solidFill>
                 <a:latin typeface="Nunito Sans"/>
               </a:rPr>
-              <a:t>«¿Por qué los hermanos pequeños son tan pesados?»</a:t>
+              <a:t>Una campaña contra el abandono de animales enseña a un perro atado en una gasolinera. Da datos reales y un teléfono de ayuda.</a:t>
             </a:r>
           </a:p>
         </p:txBody>
@@ -4467,7 +4569,7 @@
                 </a:solidFill>
                 <a:latin typeface="Nunito Sans"/>
               </a:rPr>
-              <a:t>Es una pregunta abierta… ¿es una buena pregunta?</a:t>
+              <a:t>Te emociona mucho… ¿entonces te está manipulando?</a:t>
             </a:r>
           </a:p>
           <a:p>
@@ -4492,7 +4594,7 @@
                 </a:solidFill>
                 <a:latin typeface="Nunito Sans"/>
               </a:rPr>
-              <a:t>Es abierta: no se contesta con sí o no.</a:t>
+              <a:t>Parece que sí: busca que sientas pena y rabia.</a:t>
             </a:r>
           </a:p>
           <a:p>
@@ -4517,7 +4619,7 @@
                 </a:solidFill>
                 <a:latin typeface="Nunito Sans"/>
               </a:rPr>
-              <a:t>Pero ya da por hecho algo: que los hermanos pequeños son pesados.</a:t>
+              <a:t>Pero quito la emoción y quedan razones: datos reales y una forma de pedir ayuda.</a:t>
             </a:r>
           </a:p>
           <a:p>
@@ -4542,7 +4644,7 @@
                 </a:solidFill>
                 <a:latin typeface="Nunito Sans"/>
               </a:rPr>
-              <a:t>Si contesto, acepto eso sin que nadie lo haya demostrado.</a:t>
+              <a:t>No me mete prisa ni me esconde nada. Un mensaje puede emocionar y ser honesto.</a:t>
             </a:r>
           </a:p>
           <a:p>
@@ -4567,111 +4669,7 @@
                 </a:solidFill>
                 <a:latin typeface="Nunito Sans"/>
               </a:rPr>
-              <a:t>Conclusión: antes de contestar, mira qué da por hecho la pregunta.</a:t>
-            </a:r>
-          </a:p>
-        </p:txBody>
-      </p:sp>
-    </p:spTree>
-  </p:cSld>
-  <p:clrMapOvr>
-    <a:masterClrMapping/>
-  </p:clrMapOvr>
-</p:sld>
-</file>
-
-<file path=ppt/slides/slide13.xml><?xml version="1.0" encoding="utf-8"?>
-<p:sld xmlns:a="http://schemas.openxmlformats.org/drawingml/2006/main" xmlns:p="http://schemas.openxmlformats.org/presentationml/2006/main" xmlns:r="http://schemas.openxmlformats.org/officeDocument/2006/relationships">
-  <p:cSld>
-    <p:bg>
-      <p:bgPr>
-        <a:solidFill>
-          <a:srgbClr val="1F2A44"/>
-        </a:solidFill>
-        <a:effectLst/>
-      </p:bgPr>
-    </p:bg>
-    <p:spTree>
-      <p:nvGrpSpPr>
-        <p:cNvPr id="1" name=""/>
-        <p:cNvGrpSpPr/>
-        <p:nvPr/>
-      </p:nvGrpSpPr>
-      <p:grpSpPr/>
-      <p:sp>
-        <p:nvSpPr>
-          <p:cNvPr id="2" name="TextBox 1"/>
-          <p:cNvSpPr txBox="1"/>
-          <p:nvPr/>
-        </p:nvSpPr>
-        <p:spPr>
-          <a:xfrm>
-            <a:off x="640000" y="2300000"/>
-            <a:ext cx="10912000" cy="500000"/>
-          </a:xfrm>
-          <a:prstGeom prst="rect">
-            <a:avLst/>
-          </a:prstGeom>
-          <a:noFill/>
-        </p:spPr>
-        <p:txBody>
-          <a:bodyPr wrap="square">
-            <a:spAutoFit/>
-          </a:bodyPr>
-          <a:lstStyle/>
-          <a:p>
-            <a:pPr>
-              <a:spcAft>
-                <a:spcPts val="810"/>
-              </a:spcAft>
-            </a:pPr>
-            <a:r>
-              <a:rPr sz="1800" b="1">
-                <a:solidFill>
-                  <a:srgbClr val="F4B183"/>
-                </a:solidFill>
-                <a:latin typeface="Nunito Sans"/>
-              </a:rPr>
-              <a:t>BLOQUE 3</a:t>
-            </a:r>
-          </a:p>
-        </p:txBody>
-      </p:sp>
-      <p:sp>
-        <p:nvSpPr>
-          <p:cNvPr id="3" name="TextBox 2"/>
-          <p:cNvSpPr txBox="1"/>
-          <p:nvPr/>
-        </p:nvSpPr>
-        <p:spPr>
-          <a:xfrm>
-            <a:off x="640000" y="2800000"/>
-            <a:ext cx="10912000" cy="800000"/>
-          </a:xfrm>
-          <a:prstGeom prst="rect">
-            <a:avLst/>
-          </a:prstGeom>
-          <a:noFill/>
-        </p:spPr>
-        <p:txBody>
-          <a:bodyPr wrap="square">
-            <a:spAutoFit/>
-          </a:bodyPr>
-          <a:lstStyle/>
-          <a:p>
-            <a:pPr>
-              <a:spcAft>
-                <a:spcPts val="2160"/>
-              </a:spcAft>
-            </a:pPr>
-            <a:r>
-              <a:rPr sz="4800" b="1">
-                <a:solidFill>
-                  <a:srgbClr val="FBF7EF"/>
-                </a:solidFill>
-                <a:latin typeface="Fredoka"/>
-              </a:rPr>
-              <a:t>Preguntar bien</a:t>
+              <a:t>Conclusión: el problema no es la emoción, sino usarla en lugar de razones.</a:t>
             </a:r>
           </a:p>
         </p:txBody>
@@ -4736,7 +4734,7 @@
                 </a:solidFill>
                 <a:latin typeface="Nunito Sans"/>
               </a:rPr>
-              <a:t>BLOQUE 3 · PREGUNTAR BIEN</a:t>
+              <a:t>LO DE HOY EN TRES LÍNEAS</a:t>
             </a:r>
           </a:p>
         </p:txBody>
@@ -4775,7 +4773,2551 @@
                 </a:solidFill>
                 <a:latin typeface="Fredoka"/>
               </a:rPr>
-              <a:t>¿Por qué? y ¿para qué?</a:t>
+              <a:t>Escríbelo tú primero, sin mirar</a:t>
+            </a:r>
+          </a:p>
+        </p:txBody>
+      </p:sp>
+      <p:sp>
+        <p:nvSpPr>
+          <p:cNvPr id="4" name="TextBox 3"/>
+          <p:cNvSpPr txBox="1"/>
+          <p:nvPr/>
+        </p:nvSpPr>
+        <p:spPr>
+          <a:xfrm>
+            <a:off x="640000" y="1800000"/>
+            <a:ext cx="10912000" cy="1500000"/>
+          </a:xfrm>
+          <a:prstGeom prst="rect">
+            <a:avLst/>
+          </a:prstGeom>
+          <a:noFill/>
+        </p:spPr>
+        <p:txBody>
+          <a:bodyPr wrap="square">
+            <a:spAutoFit/>
+          </a:bodyPr>
+          <a:lstStyle/>
+          <a:p>
+            <a:pPr>
+              <a:spcAft>
+                <a:spcPts val="1170"/>
+              </a:spcAft>
+            </a:pPr>
+            <a:r>
+              <a:rPr sz="2600" b="0">
+                <a:solidFill>
+                  <a:srgbClr val="4A5568"/>
+                </a:solidFill>
+                <a:latin typeface="Nunito Sans"/>
+              </a:rPr>
+              <a:t>Dos minutos. Después lo comparamos.</a:t>
+            </a:r>
+          </a:p>
+        </p:txBody>
+      </p:sp>
+    </p:spTree>
+  </p:cSld>
+  <p:clrMapOvr>
+    <a:masterClrMapping/>
+  </p:clrMapOvr>
+</p:sld>
+</file>
+
+<file path=ppt/slides/slide15.xml><?xml version="1.0" encoding="utf-8"?>
+<p:sld xmlns:a="http://schemas.openxmlformats.org/drawingml/2006/main" xmlns:p="http://schemas.openxmlformats.org/presentationml/2006/main" xmlns:r="http://schemas.openxmlformats.org/officeDocument/2006/relationships">
+  <p:cSld>
+    <p:bg>
+      <p:bgPr>
+        <a:solidFill>
+          <a:srgbClr val="FBF7EF"/>
+        </a:solidFill>
+        <a:effectLst/>
+      </p:bgPr>
+    </p:bg>
+    <p:spTree>
+      <p:nvGrpSpPr>
+        <p:cNvPr id="1" name=""/>
+        <p:cNvGrpSpPr/>
+        <p:nvPr/>
+      </p:nvGrpSpPr>
+      <p:grpSpPr/>
+      <p:sp>
+        <p:nvSpPr>
+          <p:cNvPr id="2" name="TextBox 1"/>
+          <p:cNvSpPr txBox="1"/>
+          <p:nvPr/>
+        </p:nvSpPr>
+        <p:spPr>
+          <a:xfrm>
+            <a:off x="640000" y="380000"/>
+            <a:ext cx="10912000" cy="420000"/>
+          </a:xfrm>
+          <a:prstGeom prst="rect">
+            <a:avLst/>
+          </a:prstGeom>
+          <a:noFill/>
+        </p:spPr>
+        <p:txBody>
+          <a:bodyPr wrap="square">
+            <a:spAutoFit/>
+          </a:bodyPr>
+          <a:lstStyle/>
+          <a:p>
+            <a:pPr>
+              <a:spcAft>
+                <a:spcPts val="630"/>
+              </a:spcAft>
+            </a:pPr>
+            <a:r>
+              <a:rPr sz="1400" b="1">
+                <a:solidFill>
+                  <a:srgbClr val="E8793A"/>
+                </a:solidFill>
+                <a:latin typeface="Nunito Sans"/>
+              </a:rPr>
+              <a:t>LO DE HOY EN TRES LÍNEAS</a:t>
+            </a:r>
+          </a:p>
+        </p:txBody>
+      </p:sp>
+      <p:sp>
+        <p:nvSpPr>
+          <p:cNvPr id="3" name="TextBox 2"/>
+          <p:cNvSpPr txBox="1"/>
+          <p:nvPr/>
+        </p:nvSpPr>
+        <p:spPr>
+          <a:xfrm>
+            <a:off x="640000" y="1300000"/>
+            <a:ext cx="10912000" cy="4800000"/>
+          </a:xfrm>
+          <a:prstGeom prst="rect">
+            <a:avLst/>
+          </a:prstGeom>
+          <a:noFill/>
+        </p:spPr>
+        <p:txBody>
+          <a:bodyPr wrap="square">
+            <a:spAutoFit/>
+          </a:bodyPr>
+          <a:lstStyle/>
+          <a:p>
+            <a:pPr>
+              <a:spcAft>
+                <a:spcPts val="1350"/>
+              </a:spcAft>
+            </a:pPr>
+            <a:r>
+              <a:rPr sz="3000" b="1">
+                <a:solidFill>
+                  <a:srgbClr val="E8793A"/>
+                </a:solidFill>
+                <a:latin typeface="Nunito Sans"/>
+              </a:rPr>
+              <a:t>1. </a:t>
+            </a:r>
+            <a:r>
+              <a:rPr sz="3000" b="0">
+                <a:solidFill>
+                  <a:srgbClr val="1F2A44"/>
+                </a:solidFill>
+                <a:latin typeface="Nunito Sans"/>
+              </a:rPr>
+              <a:t>Persuadir es intentar que alguien crea o haga algo.</a:t>
+            </a:r>
+          </a:p>
+          <a:p>
+            <a:pPr>
+              <a:spcAft>
+                <a:spcPts val="1350"/>
+              </a:spcAft>
+            </a:pPr>
+            <a:r>
+              <a:rPr sz="3000" b="1">
+                <a:solidFill>
+                  <a:srgbClr val="E8793A"/>
+                </a:solidFill>
+                <a:latin typeface="Nunito Sans"/>
+              </a:rPr>
+              <a:t>2. </a:t>
+            </a:r>
+            <a:r>
+              <a:rPr sz="3000" b="0">
+                <a:solidFill>
+                  <a:srgbClr val="1F2A44"/>
+                </a:solidFill>
+                <a:latin typeface="Nunito Sans"/>
+              </a:rPr>
+              <a:t>Convencer es dar razones; manipular es esquivar tu juicio o esconderte información.</a:t>
+            </a:r>
+          </a:p>
+          <a:p>
+            <a:pPr>
+              <a:spcAft>
+                <a:spcPts val="1350"/>
+              </a:spcAft>
+            </a:pPr>
+            <a:r>
+              <a:rPr sz="3000" b="1">
+                <a:solidFill>
+                  <a:srgbClr val="E8793A"/>
+                </a:solidFill>
+                <a:latin typeface="Nunito Sans"/>
+              </a:rPr>
+              <a:t>3. </a:t>
+            </a:r>
+            <a:r>
+              <a:rPr sz="3000" b="0">
+                <a:solidFill>
+                  <a:srgbClr val="1F2A44"/>
+                </a:solidFill>
+                <a:latin typeface="Nunito Sans"/>
+              </a:rPr>
+              <a:t>Emocionar no es manipular. Pregunta: ¿me meten prisa, me esconden algo, solo me emocionan?</a:t>
+            </a:r>
+          </a:p>
+        </p:txBody>
+      </p:sp>
+    </p:spTree>
+  </p:cSld>
+  <p:clrMapOvr>
+    <a:masterClrMapping/>
+  </p:clrMapOvr>
+</p:sld>
+</file>
+
+<file path=ppt/slides/slide16.xml><?xml version="1.0" encoding="utf-8"?>
+<p:sld xmlns:a="http://schemas.openxmlformats.org/drawingml/2006/main" xmlns:p="http://schemas.openxmlformats.org/presentationml/2006/main" xmlns:r="http://schemas.openxmlformats.org/officeDocument/2006/relationships">
+  <p:cSld>
+    <p:bg>
+      <p:bgPr>
+        <a:solidFill>
+          <a:srgbClr val="1F2A44"/>
+        </a:solidFill>
+        <a:effectLst/>
+      </p:bgPr>
+    </p:bg>
+    <p:spTree>
+      <p:nvGrpSpPr>
+        <p:cNvPr id="1" name=""/>
+        <p:cNvGrpSpPr/>
+        <p:nvPr/>
+      </p:nvGrpSpPr>
+      <p:grpSpPr/>
+      <p:sp>
+        <p:nvSpPr>
+          <p:cNvPr id="2" name="TextBox 1"/>
+          <p:cNvSpPr txBox="1"/>
+          <p:nvPr/>
+        </p:nvSpPr>
+        <p:spPr>
+          <a:xfrm>
+            <a:off x="640000" y="380000"/>
+            <a:ext cx="10912000" cy="420000"/>
+          </a:xfrm>
+          <a:prstGeom prst="rect">
+            <a:avLst/>
+          </a:prstGeom>
+          <a:noFill/>
+        </p:spPr>
+        <p:txBody>
+          <a:bodyPr wrap="square">
+            <a:spAutoFit/>
+          </a:bodyPr>
+          <a:lstStyle/>
+          <a:p>
+            <a:pPr>
+              <a:spcAft>
+                <a:spcPts val="630"/>
+              </a:spcAft>
+            </a:pPr>
+            <a:r>
+              <a:rPr sz="1400" b="1">
+                <a:solidFill>
+                  <a:srgbClr val="F4B183"/>
+                </a:solidFill>
+                <a:latin typeface="Nunito Sans"/>
+              </a:rPr>
+              <a:t>VÍDEO</a:t>
+            </a:r>
+          </a:p>
+        </p:txBody>
+      </p:sp>
+      <p:sp>
+        <p:nvSpPr>
+          <p:cNvPr id="3" name="TextBox 2"/>
+          <p:cNvSpPr txBox="1"/>
+          <p:nvPr/>
+        </p:nvSpPr>
+        <p:spPr>
+          <a:xfrm>
+            <a:off x="640000" y="760000"/>
+            <a:ext cx="10912000" cy="800000"/>
+          </a:xfrm>
+          <a:prstGeom prst="rect">
+            <a:avLst/>
+          </a:prstGeom>
+          <a:noFill/>
+        </p:spPr>
+        <p:txBody>
+          <a:bodyPr wrap="square">
+            <a:spAutoFit/>
+          </a:bodyPr>
+          <a:lstStyle/>
+          <a:p>
+            <a:pPr>
+              <a:spcAft>
+                <a:spcPts val="1620"/>
+              </a:spcAft>
+            </a:pPr>
+            <a:r>
+              <a:rPr sz="3600" b="1">
+                <a:solidFill>
+                  <a:srgbClr val="FBF7EF"/>
+                </a:solidFill>
+                <a:latin typeface="Fredoka"/>
+              </a:rPr>
+              <a:t>La diferencia entre persuadir y manipular</a:t>
+            </a:r>
+          </a:p>
+        </p:txBody>
+      </p:sp>
+      <p:sp>
+        <p:nvSpPr>
+          <p:cNvPr id="4" name="TextBox 3"/>
+          <p:cNvSpPr txBox="1"/>
+          <p:nvPr/>
+        </p:nvSpPr>
+        <p:spPr>
+          <a:xfrm>
+            <a:off x="640000" y="2200000"/>
+            <a:ext cx="10912000" cy="2000000"/>
+          </a:xfrm>
+          <a:prstGeom prst="rect">
+            <a:avLst/>
+          </a:prstGeom>
+          <a:noFill/>
+        </p:spPr>
+        <p:txBody>
+          <a:bodyPr wrap="square">
+            <a:spAutoFit/>
+          </a:bodyPr>
+          <a:lstStyle/>
+          <a:p>
+            <a:pPr>
+              <a:spcAft>
+                <a:spcPts val="1080"/>
+              </a:spcAft>
+            </a:pPr>
+            <a:r>
+              <a:rPr sz="2400" b="0">
+                <a:solidFill>
+                  <a:srgbClr val="C9D3E6"/>
+                </a:solidFill>
+                <a:latin typeface="Nunito Sans"/>
+              </a:rPr>
+              <a:t>Que oigan con otras palabras que convencer da razones y manipular las esquiva.</a:t>
+            </a:r>
+          </a:p>
+        </p:txBody>
+      </p:sp>
+    </p:spTree>
+  </p:cSld>
+  <p:clrMapOvr>
+    <a:masterClrMapping/>
+  </p:clrMapOvr>
+</p:sld>
+</file>
+
+<file path=ppt/slides/slide17.xml><?xml version="1.0" encoding="utf-8"?>
+<p:sld xmlns:a="http://schemas.openxmlformats.org/drawingml/2006/main" xmlns:p="http://schemas.openxmlformats.org/presentationml/2006/main" xmlns:r="http://schemas.openxmlformats.org/officeDocument/2006/relationships">
+  <p:cSld>
+    <p:bg>
+      <p:bgPr>
+        <a:solidFill>
+          <a:srgbClr val="1F2A44"/>
+        </a:solidFill>
+        <a:effectLst/>
+      </p:bgPr>
+    </p:bg>
+    <p:spTree>
+      <p:nvGrpSpPr>
+        <p:cNvPr id="1" name=""/>
+        <p:cNvGrpSpPr/>
+        <p:nvPr/>
+      </p:nvGrpSpPr>
+      <p:grpSpPr/>
+      <p:sp>
+        <p:nvSpPr>
+          <p:cNvPr id="2" name="TextBox 1"/>
+          <p:cNvSpPr txBox="1"/>
+          <p:nvPr/>
+        </p:nvSpPr>
+        <p:spPr>
+          <a:xfrm>
+            <a:off x="640000" y="380000"/>
+            <a:ext cx="10912000" cy="420000"/>
+          </a:xfrm>
+          <a:prstGeom prst="rect">
+            <a:avLst/>
+          </a:prstGeom>
+          <a:noFill/>
+        </p:spPr>
+        <p:txBody>
+          <a:bodyPr wrap="square">
+            <a:spAutoFit/>
+          </a:bodyPr>
+          <a:lstStyle/>
+          <a:p>
+            <a:pPr>
+              <a:spcAft>
+                <a:spcPts val="630"/>
+              </a:spcAft>
+            </a:pPr>
+            <a:r>
+              <a:rPr sz="1400" b="1">
+                <a:solidFill>
+                  <a:srgbClr val="F4B183"/>
+                </a:solidFill>
+                <a:latin typeface="Nunito Sans"/>
+              </a:rPr>
+              <a:t>AHORA, LA HOJA DEL DÍA</a:t>
+            </a:r>
+          </a:p>
+        </p:txBody>
+      </p:sp>
+      <p:sp>
+        <p:nvSpPr>
+          <p:cNvPr id="3" name="TextBox 2"/>
+          <p:cNvSpPr txBox="1"/>
+          <p:nvPr/>
+        </p:nvSpPr>
+        <p:spPr>
+          <a:xfrm>
+            <a:off x="640000" y="760000"/>
+            <a:ext cx="10912000" cy="800000"/>
+          </a:xfrm>
+          <a:prstGeom prst="rect">
+            <a:avLst/>
+          </a:prstGeom>
+          <a:noFill/>
+        </p:spPr>
+        <p:txBody>
+          <a:bodyPr wrap="square">
+            <a:spAutoFit/>
+          </a:bodyPr>
+          <a:lstStyle/>
+          <a:p>
+            <a:pPr>
+              <a:spcAft>
+                <a:spcPts val="1710"/>
+              </a:spcAft>
+            </a:pPr>
+            <a:r>
+              <a:rPr sz="3800" b="1">
+                <a:solidFill>
+                  <a:srgbClr val="FBF7EF"/>
+                </a:solidFill>
+                <a:latin typeface="Fredoka"/>
+              </a:rPr>
+              <a:t>20 minutos · individual · en silencio</a:t>
+            </a:r>
+          </a:p>
+        </p:txBody>
+      </p:sp>
+      <p:sp>
+        <p:nvSpPr>
+          <p:cNvPr id="4" name="Rectangle 3"/>
+          <p:cNvSpPr/>
+          <p:nvPr/>
+        </p:nvSpPr>
+        <p:spPr>
+          <a:xfrm>
+            <a:off x="640000" y="2000000"/>
+            <a:ext cx="3504000" cy="1800000"/>
+          </a:xfrm>
+          <a:prstGeom prst="rect">
+            <a:avLst/>
+          </a:prstGeom>
+          <a:solidFill>
+            <a:srgbClr val="FBF7EF"/>
+          </a:solidFill>
+          <a:ln>
+            <a:noFill/>
+          </a:ln>
+        </p:spPr>
+        <p:style>
+          <a:lnRef idx="1">
+            <a:schemeClr val="accent1"/>
+          </a:lnRef>
+          <a:fillRef idx="3">
+            <a:schemeClr val="accent1"/>
+          </a:fillRef>
+          <a:effectRef idx="2">
+            <a:schemeClr val="accent1"/>
+          </a:effectRef>
+          <a:fontRef idx="minor">
+            <a:schemeClr val="lt1"/>
+          </a:fontRef>
+        </p:style>
+        <p:txBody>
+          <a:bodyPr rtlCol="0" anchor="ctr"/>
+          <a:lstStyle/>
+          <a:p>
+            <a:pPr algn="ctr"/>
+          </a:p>
+        </p:txBody>
+      </p:sp>
+      <p:sp>
+        <p:nvSpPr>
+          <p:cNvPr id="5" name="TextBox 4"/>
+          <p:cNvSpPr txBox="1"/>
+          <p:nvPr/>
+        </p:nvSpPr>
+        <p:spPr>
+          <a:xfrm>
+            <a:off x="790000" y="2100000"/>
+            <a:ext cx="3204000" cy="700000"/>
+          </a:xfrm>
+          <a:prstGeom prst="rect">
+            <a:avLst/>
+          </a:prstGeom>
+          <a:noFill/>
+        </p:spPr>
+        <p:txBody>
+          <a:bodyPr wrap="square">
+            <a:spAutoFit/>
+          </a:bodyPr>
+          <a:lstStyle/>
+          <a:p>
+            <a:pPr>
+              <a:spcAft>
+                <a:spcPts val="990"/>
+              </a:spcAft>
+            </a:pPr>
+            <a:r>
+              <a:rPr sz="2200" b="1">
+                <a:solidFill>
+                  <a:srgbClr val="E8793A"/>
+                </a:solidFill>
+                <a:latin typeface="Nunito Sans"/>
+              </a:rPr>
+              <a:t>Peldaño 1 · Todos</a:t>
+            </a:r>
+          </a:p>
+        </p:txBody>
+      </p:sp>
+      <p:sp>
+        <p:nvSpPr>
+          <p:cNvPr id="6" name="TextBox 5"/>
+          <p:cNvSpPr txBox="1"/>
+          <p:nvPr/>
+        </p:nvSpPr>
+        <p:spPr>
+          <a:xfrm>
+            <a:off x="790000" y="2900000"/>
+            <a:ext cx="3204000" cy="700000"/>
+          </a:xfrm>
+          <a:prstGeom prst="rect">
+            <a:avLst/>
+          </a:prstGeom>
+          <a:noFill/>
+        </p:spPr>
+        <p:txBody>
+          <a:bodyPr wrap="square">
+            <a:spAutoFit/>
+          </a:bodyPr>
+          <a:lstStyle/>
+          <a:p>
+            <a:pPr>
+              <a:spcAft>
+                <a:spcPts val="900"/>
+              </a:spcAft>
+            </a:pPr>
+            <a:r>
+              <a:rPr sz="2000" b="0">
+                <a:solidFill>
+                  <a:srgbClr val="4A5568"/>
+                </a:solidFill>
+                <a:latin typeface="Nunito Sans"/>
+              </a:rPr>
+              <a:t>6 puntos</a:t>
+            </a:r>
+          </a:p>
+        </p:txBody>
+      </p:sp>
+      <p:sp>
+        <p:nvSpPr>
+          <p:cNvPr id="7" name="Rectangle 6"/>
+          <p:cNvSpPr/>
+          <p:nvPr/>
+        </p:nvSpPr>
+        <p:spPr>
+          <a:xfrm>
+            <a:off x="4344000" y="2000000"/>
+            <a:ext cx="3504000" cy="1800000"/>
+          </a:xfrm>
+          <a:prstGeom prst="rect">
+            <a:avLst/>
+          </a:prstGeom>
+          <a:solidFill>
+            <a:srgbClr val="FBF7EF"/>
+          </a:solidFill>
+          <a:ln>
+            <a:noFill/>
+          </a:ln>
+        </p:spPr>
+        <p:style>
+          <a:lnRef idx="1">
+            <a:schemeClr val="accent1"/>
+          </a:lnRef>
+          <a:fillRef idx="3">
+            <a:schemeClr val="accent1"/>
+          </a:fillRef>
+          <a:effectRef idx="2">
+            <a:schemeClr val="accent1"/>
+          </a:effectRef>
+          <a:fontRef idx="minor">
+            <a:schemeClr val="lt1"/>
+          </a:fontRef>
+        </p:style>
+        <p:txBody>
+          <a:bodyPr rtlCol="0" anchor="ctr"/>
+          <a:lstStyle/>
+          <a:p>
+            <a:pPr algn="ctr"/>
+          </a:p>
+        </p:txBody>
+      </p:sp>
+      <p:sp>
+        <p:nvSpPr>
+          <p:cNvPr id="8" name="TextBox 7"/>
+          <p:cNvSpPr txBox="1"/>
+          <p:nvPr/>
+        </p:nvSpPr>
+        <p:spPr>
+          <a:xfrm>
+            <a:off x="4494000" y="2100000"/>
+            <a:ext cx="3204000" cy="700000"/>
+          </a:xfrm>
+          <a:prstGeom prst="rect">
+            <a:avLst/>
+          </a:prstGeom>
+          <a:noFill/>
+        </p:spPr>
+        <p:txBody>
+          <a:bodyPr wrap="square">
+            <a:spAutoFit/>
+          </a:bodyPr>
+          <a:lstStyle/>
+          <a:p>
+            <a:pPr>
+              <a:spcAft>
+                <a:spcPts val="990"/>
+              </a:spcAft>
+            </a:pPr>
+            <a:r>
+              <a:rPr sz="2200" b="1">
+                <a:solidFill>
+                  <a:srgbClr val="E8793A"/>
+                </a:solidFill>
+                <a:latin typeface="Nunito Sans"/>
+              </a:rPr>
+              <a:t>Peldaño 2 · Repaso</a:t>
+            </a:r>
+          </a:p>
+        </p:txBody>
+      </p:sp>
+      <p:sp>
+        <p:nvSpPr>
+          <p:cNvPr id="9" name="TextBox 8"/>
+          <p:cNvSpPr txBox="1"/>
+          <p:nvPr/>
+        </p:nvSpPr>
+        <p:spPr>
+          <a:xfrm>
+            <a:off x="4494000" y="2900000"/>
+            <a:ext cx="3204000" cy="700000"/>
+          </a:xfrm>
+          <a:prstGeom prst="rect">
+            <a:avLst/>
+          </a:prstGeom>
+          <a:noFill/>
+        </p:spPr>
+        <p:txBody>
+          <a:bodyPr wrap="square">
+            <a:spAutoFit/>
+          </a:bodyPr>
+          <a:lstStyle/>
+          <a:p>
+            <a:pPr>
+              <a:spcAft>
+                <a:spcPts val="900"/>
+              </a:spcAft>
+            </a:pPr>
+            <a:r>
+              <a:rPr sz="2000" b="0">
+                <a:solidFill>
+                  <a:srgbClr val="4A5568"/>
+                </a:solidFill>
+                <a:latin typeface="Nunito Sans"/>
+              </a:rPr>
+              <a:t>2 puntos</a:t>
+            </a:r>
+          </a:p>
+        </p:txBody>
+      </p:sp>
+      <p:sp>
+        <p:nvSpPr>
+          <p:cNvPr id="10" name="Rectangle 9"/>
+          <p:cNvSpPr/>
+          <p:nvPr/>
+        </p:nvSpPr>
+        <p:spPr>
+          <a:xfrm>
+            <a:off x="8048000" y="2000000"/>
+            <a:ext cx="3504000" cy="1800000"/>
+          </a:xfrm>
+          <a:prstGeom prst="rect">
+            <a:avLst/>
+          </a:prstGeom>
+          <a:solidFill>
+            <a:srgbClr val="FBF7EF"/>
+          </a:solidFill>
+          <a:ln>
+            <a:noFill/>
+          </a:ln>
+        </p:spPr>
+        <p:style>
+          <a:lnRef idx="1">
+            <a:schemeClr val="accent1"/>
+          </a:lnRef>
+          <a:fillRef idx="3">
+            <a:schemeClr val="accent1"/>
+          </a:fillRef>
+          <a:effectRef idx="2">
+            <a:schemeClr val="accent1"/>
+          </a:effectRef>
+          <a:fontRef idx="minor">
+            <a:schemeClr val="lt1"/>
+          </a:fontRef>
+        </p:style>
+        <p:txBody>
+          <a:bodyPr rtlCol="0" anchor="ctr"/>
+          <a:lstStyle/>
+          <a:p>
+            <a:pPr algn="ctr"/>
+          </a:p>
+        </p:txBody>
+      </p:sp>
+      <p:sp>
+        <p:nvSpPr>
+          <p:cNvPr id="11" name="TextBox 10"/>
+          <p:cNvSpPr txBox="1"/>
+          <p:nvPr/>
+        </p:nvSpPr>
+        <p:spPr>
+          <a:xfrm>
+            <a:off x="8198000" y="2100000"/>
+            <a:ext cx="3204000" cy="700000"/>
+          </a:xfrm>
+          <a:prstGeom prst="rect">
+            <a:avLst/>
+          </a:prstGeom>
+          <a:noFill/>
+        </p:spPr>
+        <p:txBody>
+          <a:bodyPr wrap="square">
+            <a:spAutoFit/>
+          </a:bodyPr>
+          <a:lstStyle/>
+          <a:p>
+            <a:pPr>
+              <a:spcAft>
+                <a:spcPts val="990"/>
+              </a:spcAft>
+            </a:pPr>
+            <a:r>
+              <a:rPr sz="2200" b="1">
+                <a:solidFill>
+                  <a:srgbClr val="E8793A"/>
+                </a:solidFill>
+                <a:latin typeface="Nunito Sans"/>
+              </a:rPr>
+              <a:t>Peldaño 3 · Reto</a:t>
+            </a:r>
+          </a:p>
+        </p:txBody>
+      </p:sp>
+      <p:sp>
+        <p:nvSpPr>
+          <p:cNvPr id="12" name="TextBox 11"/>
+          <p:cNvSpPr txBox="1"/>
+          <p:nvPr/>
+        </p:nvSpPr>
+        <p:spPr>
+          <a:xfrm>
+            <a:off x="8198000" y="2900000"/>
+            <a:ext cx="3204000" cy="700000"/>
+          </a:xfrm>
+          <a:prstGeom prst="rect">
+            <a:avLst/>
+          </a:prstGeom>
+          <a:noFill/>
+        </p:spPr>
+        <p:txBody>
+          <a:bodyPr wrap="square">
+            <a:spAutoFit/>
+          </a:bodyPr>
+          <a:lstStyle/>
+          <a:p>
+            <a:pPr>
+              <a:spcAft>
+                <a:spcPts val="900"/>
+              </a:spcAft>
+            </a:pPr>
+            <a:r>
+              <a:rPr sz="2000" b="0">
+                <a:solidFill>
+                  <a:srgbClr val="4A5568"/>
+                </a:solidFill>
+                <a:latin typeface="Nunito Sans"/>
+              </a:rPr>
+              <a:t>2 puntos</a:t>
+            </a:r>
+          </a:p>
+        </p:txBody>
+      </p:sp>
+      <p:sp>
+        <p:nvSpPr>
+          <p:cNvPr id="13" name="TextBox 12"/>
+          <p:cNvSpPr txBox="1"/>
+          <p:nvPr/>
+        </p:nvSpPr>
+        <p:spPr>
+          <a:xfrm>
+            <a:off x="640000" y="4200000"/>
+            <a:ext cx="10912000" cy="1500000"/>
+          </a:xfrm>
+          <a:prstGeom prst="rect">
+            <a:avLst/>
+          </a:prstGeom>
+          <a:noFill/>
+        </p:spPr>
+        <p:txBody>
+          <a:bodyPr wrap="square">
+            <a:spAutoFit/>
+          </a:bodyPr>
+          <a:lstStyle/>
+          <a:p>
+            <a:pPr>
+              <a:spcAft>
+                <a:spcPts val="990"/>
+              </a:spcAft>
+            </a:pPr>
+            <a:r>
+              <a:rPr sz="2200" b="0">
+                <a:solidFill>
+                  <a:srgbClr val="C9D3E6"/>
+                </a:solidFill>
+                <a:latin typeface="Nunito Sans"/>
+              </a:rPr>
+              <a:t>1.ª pasada: sin apuntes, con bolígrafo. 2.ª pasada: con los apuntes, en otro color. Marca «seguro» o «dudo» en cada respuesta.</a:t>
+            </a:r>
+          </a:p>
+        </p:txBody>
+      </p:sp>
+    </p:spTree>
+  </p:cSld>
+  <p:clrMapOvr>
+    <a:masterClrMapping/>
+  </p:clrMapOvr>
+</p:sld>
+</file>
+
+<file path=ppt/slides/slide2.xml><?xml version="1.0" encoding="utf-8"?>
+<p:sld xmlns:a="http://schemas.openxmlformats.org/drawingml/2006/main" xmlns:p="http://schemas.openxmlformats.org/presentationml/2006/main" xmlns:r="http://schemas.openxmlformats.org/officeDocument/2006/relationships">
+  <p:cSld>
+    <p:bg>
+      <p:bgPr>
+        <a:solidFill>
+          <a:srgbClr val="FBF7EF"/>
+        </a:solidFill>
+        <a:effectLst/>
+      </p:bgPr>
+    </p:bg>
+    <p:spTree>
+      <p:nvGrpSpPr>
+        <p:cNvPr id="1" name=""/>
+        <p:cNvGrpSpPr/>
+        <p:nvPr/>
+      </p:nvGrpSpPr>
+      <p:grpSpPr/>
+      <p:sp>
+        <p:nvSpPr>
+          <p:cNvPr id="2" name="TextBox 1"/>
+          <p:cNvSpPr txBox="1"/>
+          <p:nvPr/>
+        </p:nvSpPr>
+        <p:spPr>
+          <a:xfrm>
+            <a:off x="640000" y="380000"/>
+            <a:ext cx="10912000" cy="420000"/>
+          </a:xfrm>
+          <a:prstGeom prst="rect">
+            <a:avLst/>
+          </a:prstGeom>
+          <a:noFill/>
+        </p:spPr>
+        <p:txBody>
+          <a:bodyPr wrap="square">
+            <a:spAutoFit/>
+          </a:bodyPr>
+          <a:lstStyle/>
+          <a:p>
+            <a:pPr>
+              <a:spcAft>
+                <a:spcPts val="630"/>
+              </a:spcAft>
+            </a:pPr>
+            <a:r>
+              <a:rPr sz="1400" b="1">
+                <a:solidFill>
+                  <a:srgbClr val="E8793A"/>
+                </a:solidFill>
+                <a:latin typeface="Nunito Sans"/>
+              </a:rPr>
+              <a:t>ANTES DE EMPEZAR · SIN MIRAR</a:t>
+            </a:r>
+          </a:p>
+        </p:txBody>
+      </p:sp>
+      <p:sp>
+        <p:nvSpPr>
+          <p:cNvPr id="3" name="TextBox 2"/>
+          <p:cNvSpPr txBox="1"/>
+          <p:nvPr/>
+        </p:nvSpPr>
+        <p:spPr>
+          <a:xfrm>
+            <a:off x="640000" y="760000"/>
+            <a:ext cx="10912000" cy="800000"/>
+          </a:xfrm>
+          <a:prstGeom prst="rect">
+            <a:avLst/>
+          </a:prstGeom>
+          <a:noFill/>
+        </p:spPr>
+        <p:txBody>
+          <a:bodyPr wrap="square">
+            <a:spAutoFit/>
+          </a:bodyPr>
+          <a:lstStyle/>
+          <a:p>
+            <a:pPr>
+              <a:spcAft>
+                <a:spcPts val="1440"/>
+              </a:spcAft>
+            </a:pPr>
+            <a:r>
+              <a:rPr sz="3200" b="1">
+                <a:solidFill>
+                  <a:srgbClr val="1F2A44"/>
+                </a:solidFill>
+                <a:latin typeface="Fredoka"/>
+              </a:rPr>
+              <a:t>Escribe en tu hoja las palabras que faltan</a:t>
+            </a:r>
+          </a:p>
+        </p:txBody>
+      </p:sp>
+      <p:sp>
+        <p:nvSpPr>
+          <p:cNvPr id="4" name="TextBox 3"/>
+          <p:cNvSpPr txBox="1"/>
+          <p:nvPr/>
+        </p:nvSpPr>
+        <p:spPr>
+          <a:xfrm>
+            <a:off x="640000" y="1800000"/>
+            <a:ext cx="10912000" cy="4300000"/>
+          </a:xfrm>
+          <a:prstGeom prst="rect">
+            <a:avLst/>
+          </a:prstGeom>
+          <a:noFill/>
+        </p:spPr>
+        <p:txBody>
+          <a:bodyPr wrap="square">
+            <a:spAutoFit/>
+          </a:bodyPr>
+          <a:lstStyle/>
+          <a:p>
+            <a:pPr>
+              <a:spcAft>
+                <a:spcPts val="1170"/>
+              </a:spcAft>
+            </a:pPr>
+            <a:r>
+              <a:rPr sz="2600" b="1">
+                <a:solidFill>
+                  <a:srgbClr val="E8793A"/>
+                </a:solidFill>
+                <a:latin typeface="Nunito Sans"/>
+              </a:rPr>
+              <a:t>1. </a:t>
+            </a:r>
+            <a:r>
+              <a:rPr sz="2600" b="0">
+                <a:solidFill>
+                  <a:srgbClr val="1F2A44"/>
+                </a:solidFill>
+                <a:latin typeface="Nunito Sans"/>
+              </a:rPr>
+              <a:t>El problema no es tener estas creencias, sino no ______ nunca.  (sesión 3)</a:t>
+            </a:r>
+          </a:p>
+          <a:p>
+            <a:pPr>
+              <a:spcAft>
+                <a:spcPts val="1170"/>
+              </a:spcAft>
+            </a:pPr>
+            <a:r>
+              <a:rPr sz="2600" b="1">
+                <a:solidFill>
+                  <a:srgbClr val="E8793A"/>
+                </a:solidFill>
+                <a:latin typeface="Nunito Sans"/>
+              </a:rPr>
+              <a:t>2. </a:t>
+            </a:r>
+            <a:r>
+              <a:rPr sz="2600" b="0">
+                <a:solidFill>
+                  <a:srgbClr val="1F2A44"/>
+                </a:solidFill>
+                <a:latin typeface="Nunito Sans"/>
+              </a:rPr>
+              <a:t>Creer algo porque lo cree toda la cuadrilla es el camino del ______.  (sesión 3)</a:t>
+            </a:r>
+          </a:p>
+          <a:p>
+            <a:pPr>
+              <a:spcAft>
+                <a:spcPts val="1170"/>
+              </a:spcAft>
+            </a:pPr>
+            <a:r>
+              <a:rPr sz="2600" b="1">
+                <a:solidFill>
+                  <a:srgbClr val="E8793A"/>
+                </a:solidFill>
+                <a:latin typeface="Nunito Sans"/>
+              </a:rPr>
+              <a:t>3. </a:t>
+            </a:r>
+            <a:r>
+              <a:rPr sz="2600" b="0">
+                <a:solidFill>
+                  <a:srgbClr val="1F2A44"/>
+                </a:solidFill>
+                <a:latin typeface="Nunito Sans"/>
+              </a:rPr>
+              <a:t>Una opinión se defiende con ______.  (sesión 2)</a:t>
+            </a:r>
+          </a:p>
+        </p:txBody>
+      </p:sp>
+    </p:spTree>
+  </p:cSld>
+  <p:clrMapOvr>
+    <a:masterClrMapping/>
+  </p:clrMapOvr>
+</p:sld>
+</file>
+
+<file path=ppt/slides/slide3.xml><?xml version="1.0" encoding="utf-8"?>
+<p:sld xmlns:a="http://schemas.openxmlformats.org/drawingml/2006/main" xmlns:p="http://schemas.openxmlformats.org/presentationml/2006/main" xmlns:r="http://schemas.openxmlformats.org/officeDocument/2006/relationships">
+  <p:cSld>
+    <p:bg>
+      <p:bgPr>
+        <a:solidFill>
+          <a:srgbClr val="FBF7EF"/>
+        </a:solidFill>
+        <a:effectLst/>
+      </p:bgPr>
+    </p:bg>
+    <p:spTree>
+      <p:nvGrpSpPr>
+        <p:cNvPr id="1" name=""/>
+        <p:cNvGrpSpPr/>
+        <p:nvPr/>
+      </p:nvGrpSpPr>
+      <p:grpSpPr/>
+      <p:sp>
+        <p:nvSpPr>
+          <p:cNvPr id="2" name="TextBox 1"/>
+          <p:cNvSpPr txBox="1"/>
+          <p:nvPr/>
+        </p:nvSpPr>
+        <p:spPr>
+          <a:xfrm>
+            <a:off x="640000" y="380000"/>
+            <a:ext cx="10912000" cy="420000"/>
+          </a:xfrm>
+          <a:prstGeom prst="rect">
+            <a:avLst/>
+          </a:prstGeom>
+          <a:noFill/>
+        </p:spPr>
+        <p:txBody>
+          <a:bodyPr wrap="square">
+            <a:spAutoFit/>
+          </a:bodyPr>
+          <a:lstStyle/>
+          <a:p>
+            <a:pPr>
+              <a:spcAft>
+                <a:spcPts val="630"/>
+              </a:spcAft>
+            </a:pPr>
+            <a:r>
+              <a:rPr sz="1400" b="1">
+                <a:solidFill>
+                  <a:srgbClr val="E8793A"/>
+                </a:solidFill>
+                <a:latin typeface="Nunito Sans"/>
+              </a:rPr>
+              <a:t>ANTES DE EMPEZAR · SIN MIRAR</a:t>
+            </a:r>
+          </a:p>
+        </p:txBody>
+      </p:sp>
+      <p:sp>
+        <p:nvSpPr>
+          <p:cNvPr id="3" name="TextBox 2"/>
+          <p:cNvSpPr txBox="1"/>
+          <p:nvPr/>
+        </p:nvSpPr>
+        <p:spPr>
+          <a:xfrm>
+            <a:off x="640000" y="760000"/>
+            <a:ext cx="10912000" cy="800000"/>
+          </a:xfrm>
+          <a:prstGeom prst="rect">
+            <a:avLst/>
+          </a:prstGeom>
+          <a:noFill/>
+        </p:spPr>
+        <p:txBody>
+          <a:bodyPr wrap="square">
+            <a:spAutoFit/>
+          </a:bodyPr>
+          <a:lstStyle/>
+          <a:p>
+            <a:pPr>
+              <a:spcAft>
+                <a:spcPts val="1440"/>
+              </a:spcAft>
+            </a:pPr>
+            <a:r>
+              <a:rPr sz="3200" b="1">
+                <a:solidFill>
+                  <a:srgbClr val="1F2A44"/>
+                </a:solidFill>
+                <a:latin typeface="Fredoka"/>
+              </a:rPr>
+              <a:t>Corrige con otro color</a:t>
+            </a:r>
+          </a:p>
+        </p:txBody>
+      </p:sp>
+      <p:sp>
+        <p:nvSpPr>
+          <p:cNvPr id="4" name="TextBox 3"/>
+          <p:cNvSpPr txBox="1"/>
+          <p:nvPr/>
+        </p:nvSpPr>
+        <p:spPr>
+          <a:xfrm>
+            <a:off x="640000" y="1800000"/>
+            <a:ext cx="10912000" cy="4300000"/>
+          </a:xfrm>
+          <a:prstGeom prst="rect">
+            <a:avLst/>
+          </a:prstGeom>
+          <a:noFill/>
+        </p:spPr>
+        <p:txBody>
+          <a:bodyPr wrap="square">
+            <a:spAutoFit/>
+          </a:bodyPr>
+          <a:lstStyle/>
+          <a:p>
+            <a:pPr>
+              <a:spcAft>
+                <a:spcPts val="1170"/>
+              </a:spcAft>
+            </a:pPr>
+            <a:r>
+              <a:rPr sz="2600" b="1">
+                <a:solidFill>
+                  <a:srgbClr val="E8793A"/>
+                </a:solidFill>
+                <a:latin typeface="Nunito Sans"/>
+              </a:rPr>
+              <a:t>1. </a:t>
+            </a:r>
+            <a:r>
+              <a:rPr sz="2600" b="0">
+                <a:solidFill>
+                  <a:srgbClr val="1F2A44"/>
+                </a:solidFill>
+                <a:latin typeface="Nunito Sans"/>
+              </a:rPr>
+              <a:t>El problema no es tener estas creencias, sino no </a:t>
+            </a:r>
+            <a:r>
+              <a:rPr sz="2600" b="1">
+                <a:solidFill>
+                  <a:srgbClr val="1F2A44"/>
+                </a:solidFill>
+                <a:latin typeface="Nunito Sans"/>
+              </a:rPr>
+              <a:t>revisarlas</a:t>
+            </a:r>
+            <a:r>
+              <a:rPr sz="2600" b="0">
+                <a:solidFill>
+                  <a:srgbClr val="1F2A44"/>
+                </a:solidFill>
+                <a:latin typeface="Nunito Sans"/>
+              </a:rPr>
+              <a:t> nunca.  (sesión 3)</a:t>
+            </a:r>
+          </a:p>
+          <a:p>
+            <a:pPr>
+              <a:spcAft>
+                <a:spcPts val="1170"/>
+              </a:spcAft>
+            </a:pPr>
+            <a:r>
+              <a:rPr sz="2600" b="1">
+                <a:solidFill>
+                  <a:srgbClr val="E8793A"/>
+                </a:solidFill>
+                <a:latin typeface="Nunito Sans"/>
+              </a:rPr>
+              <a:t>2. </a:t>
+            </a:r>
+            <a:r>
+              <a:rPr sz="2600" b="0">
+                <a:solidFill>
+                  <a:srgbClr val="1F2A44"/>
+                </a:solidFill>
+                <a:latin typeface="Nunito Sans"/>
+              </a:rPr>
+              <a:t>Creer algo porque lo cree toda la cuadrilla es el camino del </a:t>
+            </a:r>
+            <a:r>
+              <a:rPr sz="2600" b="1">
+                <a:solidFill>
+                  <a:srgbClr val="1F2A44"/>
+                </a:solidFill>
+                <a:latin typeface="Nunito Sans"/>
+              </a:rPr>
+              <a:t>grupo</a:t>
+            </a:r>
+            <a:r>
+              <a:rPr sz="2600" b="0">
+                <a:solidFill>
+                  <a:srgbClr val="1F2A44"/>
+                </a:solidFill>
+                <a:latin typeface="Nunito Sans"/>
+              </a:rPr>
+              <a:t>.  (sesión 3)</a:t>
+            </a:r>
+          </a:p>
+          <a:p>
+            <a:pPr>
+              <a:spcAft>
+                <a:spcPts val="1170"/>
+              </a:spcAft>
+            </a:pPr>
+            <a:r>
+              <a:rPr sz="2600" b="1">
+                <a:solidFill>
+                  <a:srgbClr val="E8793A"/>
+                </a:solidFill>
+                <a:latin typeface="Nunito Sans"/>
+              </a:rPr>
+              <a:t>3. </a:t>
+            </a:r>
+            <a:r>
+              <a:rPr sz="2600" b="0">
+                <a:solidFill>
+                  <a:srgbClr val="1F2A44"/>
+                </a:solidFill>
+                <a:latin typeface="Nunito Sans"/>
+              </a:rPr>
+              <a:t>Una opinión se defiende con </a:t>
+            </a:r>
+            <a:r>
+              <a:rPr sz="2600" b="1">
+                <a:solidFill>
+                  <a:srgbClr val="1F2A44"/>
+                </a:solidFill>
+                <a:latin typeface="Nunito Sans"/>
+              </a:rPr>
+              <a:t>razones</a:t>
+            </a:r>
+            <a:r>
+              <a:rPr sz="2600" b="0">
+                <a:solidFill>
+                  <a:srgbClr val="1F2A44"/>
+                </a:solidFill>
+                <a:latin typeface="Nunito Sans"/>
+              </a:rPr>
+              <a:t>.  (sesión 2)</a:t>
+            </a:r>
+          </a:p>
+        </p:txBody>
+      </p:sp>
+    </p:spTree>
+  </p:cSld>
+  <p:clrMapOvr>
+    <a:masterClrMapping/>
+  </p:clrMapOvr>
+</p:sld>
+</file>
+
+<file path=ppt/slides/slide4.xml><?xml version="1.0" encoding="utf-8"?>
+<p:sld xmlns:a="http://schemas.openxmlformats.org/drawingml/2006/main" xmlns:p="http://schemas.openxmlformats.org/presentationml/2006/main" xmlns:r="http://schemas.openxmlformats.org/officeDocument/2006/relationships">
+  <p:cSld>
+    <p:bg>
+      <p:bgPr>
+        <a:solidFill>
+          <a:srgbClr val="FBF7EF"/>
+        </a:solidFill>
+        <a:effectLst/>
+      </p:bgPr>
+    </p:bg>
+    <p:spTree>
+      <p:nvGrpSpPr>
+        <p:cNvPr id="1" name=""/>
+        <p:cNvGrpSpPr/>
+        <p:nvPr/>
+      </p:nvGrpSpPr>
+      <p:grpSpPr/>
+      <p:sp>
+        <p:nvSpPr>
+          <p:cNvPr id="2" name="TextBox 1"/>
+          <p:cNvSpPr txBox="1"/>
+          <p:nvPr/>
+        </p:nvSpPr>
+        <p:spPr>
+          <a:xfrm>
+            <a:off x="640000" y="380000"/>
+            <a:ext cx="10912000" cy="420000"/>
+          </a:xfrm>
+          <a:prstGeom prst="rect">
+            <a:avLst/>
+          </a:prstGeom>
+          <a:noFill/>
+        </p:spPr>
+        <p:txBody>
+          <a:bodyPr wrap="square">
+            <a:spAutoFit/>
+          </a:bodyPr>
+          <a:lstStyle/>
+          <a:p>
+            <a:pPr>
+              <a:spcAft>
+                <a:spcPts val="630"/>
+              </a:spcAft>
+            </a:pPr>
+            <a:r>
+              <a:rPr sz="1400" b="1">
+                <a:solidFill>
+                  <a:srgbClr val="E8793A"/>
+                </a:solidFill>
+                <a:latin typeface="Nunito Sans"/>
+              </a:rPr>
+              <a:t>PARA EMPEZAR</a:t>
+            </a:r>
+          </a:p>
+        </p:txBody>
+      </p:sp>
+      <p:sp>
+        <p:nvSpPr>
+          <p:cNvPr id="3" name="Rectangle 2"/>
+          <p:cNvSpPr/>
+          <p:nvPr/>
+        </p:nvSpPr>
+        <p:spPr>
+          <a:xfrm>
+            <a:off x="640000" y="1300000"/>
+            <a:ext cx="90000" cy="2400000"/>
+          </a:xfrm>
+          <a:prstGeom prst="rect">
+            <a:avLst/>
+          </a:prstGeom>
+          <a:solidFill>
+            <a:srgbClr val="E8793A"/>
+          </a:solidFill>
+          <a:ln>
+            <a:noFill/>
+          </a:ln>
+        </p:spPr>
+        <p:style>
+          <a:lnRef idx="1">
+            <a:schemeClr val="accent1"/>
+          </a:lnRef>
+          <a:fillRef idx="3">
+            <a:schemeClr val="accent1"/>
+          </a:fillRef>
+          <a:effectRef idx="2">
+            <a:schemeClr val="accent1"/>
+          </a:effectRef>
+          <a:fontRef idx="minor">
+            <a:schemeClr val="lt1"/>
+          </a:fontRef>
+        </p:style>
+        <p:txBody>
+          <a:bodyPr rtlCol="0" anchor="ctr"/>
+          <a:lstStyle/>
+          <a:p>
+            <a:pPr algn="ctr"/>
+          </a:p>
+        </p:txBody>
+      </p:sp>
+      <p:sp>
+        <p:nvSpPr>
+          <p:cNvPr id="4" name="TextBox 3"/>
+          <p:cNvSpPr txBox="1"/>
+          <p:nvPr/>
+        </p:nvSpPr>
+        <p:spPr>
+          <a:xfrm>
+            <a:off x="940000" y="1300000"/>
+            <a:ext cx="10612000" cy="2600000"/>
+          </a:xfrm>
+          <a:prstGeom prst="rect">
+            <a:avLst/>
+          </a:prstGeom>
+          <a:noFill/>
+        </p:spPr>
+        <p:txBody>
+          <a:bodyPr wrap="square" anchor="ctr">
+            <a:spAutoFit/>
+          </a:bodyPr>
+          <a:lstStyle/>
+          <a:p>
+            <a:pPr>
+              <a:spcAft>
+                <a:spcPts val="1530"/>
+              </a:spcAft>
+            </a:pPr>
+            <a:r>
+              <a:rPr sz="3400" b="1">
+                <a:solidFill>
+                  <a:srgbClr val="1F2A44"/>
+                </a:solidFill>
+                <a:latin typeface="Nunito Sans"/>
+              </a:rPr>
+              <a:t>Dos mensajes para vender la misma zapatilla. A: «Pesa 200 gramos y dura dos años». B: «Todos tus amigos ya la tienen. ¿Y tú?»</a:t>
+            </a:r>
+          </a:p>
+        </p:txBody>
+      </p:sp>
+      <p:sp>
+        <p:nvSpPr>
+          <p:cNvPr id="5" name="TextBox 4"/>
+          <p:cNvSpPr txBox="1"/>
+          <p:nvPr/>
+        </p:nvSpPr>
+        <p:spPr>
+          <a:xfrm>
+            <a:off x="640000" y="4300000"/>
+            <a:ext cx="10912000" cy="1200000"/>
+          </a:xfrm>
+          <a:prstGeom prst="rect">
+            <a:avLst/>
+          </a:prstGeom>
+          <a:noFill/>
+        </p:spPr>
+        <p:txBody>
+          <a:bodyPr wrap="square">
+            <a:spAutoFit/>
+          </a:bodyPr>
+          <a:lstStyle/>
+          <a:p>
+            <a:pPr>
+              <a:spcAft>
+                <a:spcPts val="1170"/>
+              </a:spcAft>
+            </a:pPr>
+            <a:r>
+              <a:rPr sz="2600" b="0">
+                <a:solidFill>
+                  <a:srgbClr val="4A5568"/>
+                </a:solidFill>
+                <a:latin typeface="Nunito Sans"/>
+              </a:rPr>
+              <a:t>¿Cuál te da razones? ¿Cuál intenta que no pienses?</a:t>
+            </a:r>
+          </a:p>
+        </p:txBody>
+      </p:sp>
+    </p:spTree>
+  </p:cSld>
+  <p:clrMapOvr>
+    <a:masterClrMapping/>
+  </p:clrMapOvr>
+</p:sld>
+</file>
+
+<file path=ppt/slides/slide5.xml><?xml version="1.0" encoding="utf-8"?>
+<p:sld xmlns:a="http://schemas.openxmlformats.org/drawingml/2006/main" xmlns:p="http://schemas.openxmlformats.org/presentationml/2006/main" xmlns:r="http://schemas.openxmlformats.org/officeDocument/2006/relationships">
+  <p:cSld>
+    <p:bg>
+      <p:bgPr>
+        <a:solidFill>
+          <a:srgbClr val="1F2A44"/>
+        </a:solidFill>
+        <a:effectLst/>
+      </p:bgPr>
+    </p:bg>
+    <p:spTree>
+      <p:nvGrpSpPr>
+        <p:cNvPr id="1" name=""/>
+        <p:cNvGrpSpPr/>
+        <p:nvPr/>
+      </p:nvGrpSpPr>
+      <p:grpSpPr/>
+      <p:sp>
+        <p:nvSpPr>
+          <p:cNvPr id="2" name="TextBox 1"/>
+          <p:cNvSpPr txBox="1"/>
+          <p:nvPr/>
+        </p:nvSpPr>
+        <p:spPr>
+          <a:xfrm>
+            <a:off x="640000" y="2300000"/>
+            <a:ext cx="10912000" cy="500000"/>
+          </a:xfrm>
+          <a:prstGeom prst="rect">
+            <a:avLst/>
+          </a:prstGeom>
+          <a:noFill/>
+        </p:spPr>
+        <p:txBody>
+          <a:bodyPr wrap="square">
+            <a:spAutoFit/>
+          </a:bodyPr>
+          <a:lstStyle/>
+          <a:p>
+            <a:pPr>
+              <a:spcAft>
+                <a:spcPts val="810"/>
+              </a:spcAft>
+            </a:pPr>
+            <a:r>
+              <a:rPr sz="1800" b="1">
+                <a:solidFill>
+                  <a:srgbClr val="F4B183"/>
+                </a:solidFill>
+                <a:latin typeface="Nunito Sans"/>
+              </a:rPr>
+              <a:t>BLOQUE 1</a:t>
+            </a:r>
+          </a:p>
+        </p:txBody>
+      </p:sp>
+      <p:sp>
+        <p:nvSpPr>
+          <p:cNvPr id="3" name="TextBox 2"/>
+          <p:cNvSpPr txBox="1"/>
+          <p:nvPr/>
+        </p:nvSpPr>
+        <p:spPr>
+          <a:xfrm>
+            <a:off x="640000" y="2800000"/>
+            <a:ext cx="10912000" cy="800000"/>
+          </a:xfrm>
+          <a:prstGeom prst="rect">
+            <a:avLst/>
+          </a:prstGeom>
+          <a:noFill/>
+        </p:spPr>
+        <p:txBody>
+          <a:bodyPr wrap="square">
+            <a:spAutoFit/>
+          </a:bodyPr>
+          <a:lstStyle/>
+          <a:p>
+            <a:pPr>
+              <a:spcAft>
+                <a:spcPts val="2160"/>
+              </a:spcAft>
+            </a:pPr>
+            <a:r>
+              <a:rPr sz="4800" b="1">
+                <a:solidFill>
+                  <a:srgbClr val="FBF7EF"/>
+                </a:solidFill>
+                <a:latin typeface="Fredoka"/>
+              </a:rPr>
+              <a:t>Convencer y manipular</a:t>
+            </a:r>
+          </a:p>
+        </p:txBody>
+      </p:sp>
+    </p:spTree>
+  </p:cSld>
+  <p:clrMapOvr>
+    <a:masterClrMapping/>
+  </p:clrMapOvr>
+</p:sld>
+</file>
+
+<file path=ppt/slides/slide6.xml><?xml version="1.0" encoding="utf-8"?>
+<p:sld xmlns:a="http://schemas.openxmlformats.org/drawingml/2006/main" xmlns:p="http://schemas.openxmlformats.org/presentationml/2006/main" xmlns:r="http://schemas.openxmlformats.org/officeDocument/2006/relationships">
+  <p:cSld>
+    <p:bg>
+      <p:bgPr>
+        <a:solidFill>
+          <a:srgbClr val="FBF7EF"/>
+        </a:solidFill>
+        <a:effectLst/>
+      </p:bgPr>
+    </p:bg>
+    <p:spTree>
+      <p:nvGrpSpPr>
+        <p:cNvPr id="1" name=""/>
+        <p:cNvGrpSpPr/>
+        <p:nvPr/>
+      </p:nvGrpSpPr>
+      <p:grpSpPr/>
+      <p:sp>
+        <p:nvSpPr>
+          <p:cNvPr id="2" name="TextBox 1"/>
+          <p:cNvSpPr txBox="1"/>
+          <p:nvPr/>
+        </p:nvSpPr>
+        <p:spPr>
+          <a:xfrm>
+            <a:off x="640000" y="380000"/>
+            <a:ext cx="10912000" cy="420000"/>
+          </a:xfrm>
+          <a:prstGeom prst="rect">
+            <a:avLst/>
+          </a:prstGeom>
+          <a:noFill/>
+        </p:spPr>
+        <p:txBody>
+          <a:bodyPr wrap="square">
+            <a:spAutoFit/>
+          </a:bodyPr>
+          <a:lstStyle/>
+          <a:p>
+            <a:pPr>
+              <a:spcAft>
+                <a:spcPts val="630"/>
+              </a:spcAft>
+            </a:pPr>
+            <a:r>
+              <a:rPr sz="1400" b="1">
+                <a:solidFill>
+                  <a:srgbClr val="E8793A"/>
+                </a:solidFill>
+                <a:latin typeface="Nunito Sans"/>
+              </a:rPr>
+              <a:t>BLOQUE 1 · CONVENCER Y MANIPULAR</a:t>
+            </a:r>
+          </a:p>
+        </p:txBody>
+      </p:sp>
+      <p:sp>
+        <p:nvSpPr>
+          <p:cNvPr id="3" name="TextBox 2"/>
+          <p:cNvSpPr txBox="1"/>
+          <p:nvPr/>
+        </p:nvSpPr>
+        <p:spPr>
+          <a:xfrm>
+            <a:off x="640000" y="760000"/>
+            <a:ext cx="10912000" cy="800000"/>
+          </a:xfrm>
+          <a:prstGeom prst="rect">
+            <a:avLst/>
+          </a:prstGeom>
+          <a:noFill/>
+        </p:spPr>
+        <p:txBody>
+          <a:bodyPr wrap="square">
+            <a:spAutoFit/>
+          </a:bodyPr>
+          <a:lstStyle/>
+          <a:p>
+            <a:pPr>
+              <a:spcAft>
+                <a:spcPts val="1710"/>
+              </a:spcAft>
+            </a:pPr>
+            <a:r>
+              <a:rPr sz="3800" b="1">
+                <a:solidFill>
+                  <a:srgbClr val="1F2A44"/>
+                </a:solidFill>
+                <a:latin typeface="Fredoka"/>
+              </a:rPr>
+              <a:t>Persuadir</a:t>
+            </a:r>
+          </a:p>
+        </p:txBody>
+      </p:sp>
+      <p:sp>
+        <p:nvSpPr>
+          <p:cNvPr id="4" name="Rectangle 3"/>
+          <p:cNvSpPr/>
+          <p:nvPr/>
+        </p:nvSpPr>
+        <p:spPr>
+          <a:xfrm>
+            <a:off x="640000" y="1650000"/>
+            <a:ext cx="10912000" cy="1150000"/>
+          </a:xfrm>
+          <a:prstGeom prst="rect">
+            <a:avLst/>
+          </a:prstGeom>
+          <a:solidFill>
+            <a:srgbClr val="EAF0F7"/>
+          </a:solidFill>
+          <a:ln>
+            <a:noFill/>
+          </a:ln>
+        </p:spPr>
+        <p:style>
+          <a:lnRef idx="1">
+            <a:schemeClr val="accent1"/>
+          </a:lnRef>
+          <a:fillRef idx="3">
+            <a:schemeClr val="accent1"/>
+          </a:fillRef>
+          <a:effectRef idx="2">
+            <a:schemeClr val="accent1"/>
+          </a:effectRef>
+          <a:fontRef idx="minor">
+            <a:schemeClr val="lt1"/>
+          </a:fontRef>
+        </p:style>
+        <p:txBody>
+          <a:bodyPr rtlCol="0" anchor="ctr"/>
+          <a:lstStyle/>
+          <a:p>
+            <a:pPr algn="ctr"/>
+          </a:p>
+        </p:txBody>
+      </p:sp>
+      <p:sp>
+        <p:nvSpPr>
+          <p:cNvPr id="5" name="TextBox 4"/>
+          <p:cNvSpPr txBox="1"/>
+          <p:nvPr/>
+        </p:nvSpPr>
+        <p:spPr>
+          <a:xfrm>
+            <a:off x="840000" y="1730000"/>
+            <a:ext cx="10512000" cy="1000000"/>
+          </a:xfrm>
+          <a:prstGeom prst="rect">
+            <a:avLst/>
+          </a:prstGeom>
+          <a:noFill/>
+        </p:spPr>
+        <p:txBody>
+          <a:bodyPr wrap="square" anchor="ctr">
+            <a:spAutoFit/>
+          </a:bodyPr>
+          <a:lstStyle/>
+          <a:p>
+            <a:pPr>
+              <a:spcAft>
+                <a:spcPts val="1260"/>
+              </a:spcAft>
+            </a:pPr>
+            <a:r>
+              <a:rPr sz="2800" b="1">
+                <a:solidFill>
+                  <a:srgbClr val="1F2A44"/>
+                </a:solidFill>
+                <a:latin typeface="Nunito Sans"/>
+              </a:rPr>
+              <a:t>Persuadir es intentar que alguien crea o haga algo. Se puede hacer bien o mal.</a:t>
+            </a:r>
+          </a:p>
+        </p:txBody>
+      </p:sp>
+      <p:sp>
+        <p:nvSpPr>
+          <p:cNvPr id="6" name="TextBox 5"/>
+          <p:cNvSpPr txBox="1"/>
+          <p:nvPr/>
+        </p:nvSpPr>
+        <p:spPr>
+          <a:xfrm>
+            <a:off x="640000" y="3000000"/>
+            <a:ext cx="10912000" cy="3458000"/>
+          </a:xfrm>
+          <a:prstGeom prst="rect">
+            <a:avLst/>
+          </a:prstGeom>
+          <a:noFill/>
+        </p:spPr>
+        <p:txBody>
+          <a:bodyPr wrap="square">
+            <a:spAutoFit/>
+          </a:bodyPr>
+          <a:lstStyle/>
+          <a:p>
+            <a:pPr>
+              <a:spcAft>
+                <a:spcPts val="1260"/>
+              </a:spcAft>
+            </a:pPr>
+            <a:r>
+              <a:rPr sz="2800" b="1">
+                <a:solidFill>
+                  <a:srgbClr val="E8793A"/>
+                </a:solidFill>
+                <a:latin typeface="Nunito Sans"/>
+              </a:rPr>
+              <a:t>• </a:t>
+            </a:r>
+            <a:r>
+              <a:rPr sz="2800" b="1">
+                <a:solidFill>
+                  <a:srgbClr val="1F2A44"/>
+                </a:solidFill>
+                <a:latin typeface="Nunito Sans"/>
+              </a:rPr>
+              <a:t>Convencer:</a:t>
+            </a:r>
+            <a:r>
+              <a:rPr sz="2800" b="0">
+                <a:solidFill>
+                  <a:srgbClr val="1F2A44"/>
+                </a:solidFill>
+                <a:latin typeface="Nunito Sans"/>
+              </a:rPr>
+              <a:t> dar razones que el otro puede examinar</a:t>
+            </a:r>
+          </a:p>
+          <a:p>
+            <a:pPr>
+              <a:spcAft>
+                <a:spcPts val="1260"/>
+              </a:spcAft>
+            </a:pPr>
+            <a:r>
+              <a:rPr sz="2800" b="1">
+                <a:solidFill>
+                  <a:srgbClr val="E8793A"/>
+                </a:solidFill>
+                <a:latin typeface="Nunito Sans"/>
+              </a:rPr>
+              <a:t>• </a:t>
+            </a:r>
+            <a:r>
+              <a:rPr sz="2800" b="1">
+                <a:solidFill>
+                  <a:srgbClr val="1F2A44"/>
+                </a:solidFill>
+                <a:latin typeface="Nunito Sans"/>
+              </a:rPr>
+              <a:t>Manipular:</a:t>
+            </a:r>
+            <a:r>
+              <a:rPr sz="2800" b="0">
+                <a:solidFill>
+                  <a:srgbClr val="1F2A44"/>
+                </a:solidFill>
+                <a:latin typeface="Nunito Sans"/>
+              </a:rPr>
+              <a:t> esquivar su juicio o esconderle información</a:t>
+            </a:r>
+          </a:p>
+          <a:p>
+            <a:pPr>
+              <a:spcAft>
+                <a:spcPts val="1260"/>
+              </a:spcAft>
+            </a:pPr>
+            <a:r>
+              <a:rPr sz="2800" b="1">
+                <a:solidFill>
+                  <a:srgbClr val="E8793A"/>
+                </a:solidFill>
+                <a:latin typeface="Nunito Sans"/>
+              </a:rPr>
+              <a:t>• </a:t>
+            </a:r>
+            <a:r>
+              <a:rPr sz="2800" b="0">
+                <a:solidFill>
+                  <a:srgbClr val="1F2A44"/>
+                </a:solidFill>
+                <a:latin typeface="Nunito Sans"/>
+              </a:rPr>
+              <a:t>La pregunta: ¿te dejan pensar y ver los datos?</a:t>
+            </a:r>
+          </a:p>
+          <a:p>
+            <a:pPr>
+              <a:spcAft>
+                <a:spcPts val="1260"/>
+              </a:spcAft>
+            </a:pPr>
+            <a:r>
+              <a:rPr sz="2800" b="1">
+                <a:solidFill>
+                  <a:srgbClr val="E8793A"/>
+                </a:solidFill>
+                <a:latin typeface="Nunito Sans"/>
+              </a:rPr>
+              <a:t>• </a:t>
+            </a:r>
+            <a:r>
+              <a:rPr sz="2800" b="0">
+                <a:solidFill>
+                  <a:srgbClr val="1F2A44"/>
+                </a:solidFill>
+                <a:latin typeface="Nunito Sans"/>
+              </a:rPr>
+              <a:t>Muchos mensajes mezclan las dos cosas: hay grises</a:t>
+            </a:r>
+          </a:p>
+        </p:txBody>
+      </p:sp>
+    </p:spTree>
+  </p:cSld>
+  <p:clrMapOvr>
+    <a:masterClrMapping/>
+  </p:clrMapOvr>
+</p:sld>
+</file>
+
+<file path=ppt/slides/slide7.xml><?xml version="1.0" encoding="utf-8"?>
+<p:sld xmlns:a="http://schemas.openxmlformats.org/drawingml/2006/main" xmlns:p="http://schemas.openxmlformats.org/presentationml/2006/main" xmlns:r="http://schemas.openxmlformats.org/officeDocument/2006/relationships">
+  <p:cSld>
+    <p:bg>
+      <p:bgPr>
+        <a:solidFill>
+          <a:srgbClr val="FBF7EF"/>
+        </a:solidFill>
+        <a:effectLst/>
+      </p:bgPr>
+    </p:bg>
+    <p:spTree>
+      <p:nvGrpSpPr>
+        <p:cNvPr id="1" name=""/>
+        <p:cNvGrpSpPr/>
+        <p:nvPr/>
+      </p:nvGrpSpPr>
+      <p:grpSpPr/>
+      <p:sp>
+        <p:nvSpPr>
+          <p:cNvPr id="2" name="TextBox 1"/>
+          <p:cNvSpPr txBox="1"/>
+          <p:nvPr/>
+        </p:nvSpPr>
+        <p:spPr>
+          <a:xfrm>
+            <a:off x="640000" y="380000"/>
+            <a:ext cx="10912000" cy="420000"/>
+          </a:xfrm>
+          <a:prstGeom prst="rect">
+            <a:avLst/>
+          </a:prstGeom>
+          <a:noFill/>
+        </p:spPr>
+        <p:txBody>
+          <a:bodyPr wrap="square">
+            <a:spAutoFit/>
+          </a:bodyPr>
+          <a:lstStyle/>
+          <a:p>
+            <a:pPr>
+              <a:spcAft>
+                <a:spcPts val="630"/>
+              </a:spcAft>
+            </a:pPr>
+            <a:r>
+              <a:rPr sz="1400" b="1">
+                <a:solidFill>
+                  <a:srgbClr val="E8793A"/>
+                </a:solidFill>
+                <a:latin typeface="Nunito Sans"/>
+              </a:rPr>
+              <a:t>BLOQUE 1 · CONVENCER Y MANIPULAR</a:t>
+            </a:r>
+          </a:p>
+        </p:txBody>
+      </p:sp>
+      <p:sp>
+        <p:nvSpPr>
+          <p:cNvPr id="3" name="TextBox 2"/>
+          <p:cNvSpPr txBox="1"/>
+          <p:nvPr/>
+        </p:nvSpPr>
+        <p:spPr>
+          <a:xfrm>
+            <a:off x="640000" y="760000"/>
+            <a:ext cx="10912000" cy="800000"/>
+          </a:xfrm>
+          <a:prstGeom prst="rect">
+            <a:avLst/>
+          </a:prstGeom>
+          <a:noFill/>
+        </p:spPr>
+        <p:txBody>
+          <a:bodyPr wrap="square">
+            <a:spAutoFit/>
+          </a:bodyPr>
+          <a:lstStyle/>
+          <a:p>
+            <a:pPr>
+              <a:spcAft>
+                <a:spcPts val="1710"/>
+              </a:spcAft>
+            </a:pPr>
+            <a:r>
+              <a:rPr sz="3800" b="1">
+                <a:solidFill>
+                  <a:srgbClr val="1F2A44"/>
+                </a:solidFill>
+                <a:latin typeface="Fredoka"/>
+              </a:rPr>
+              <a:t>Manipular y convencer</a:t>
+            </a:r>
+          </a:p>
+        </p:txBody>
+      </p:sp>
+      <p:sp>
+        <p:nvSpPr>
+          <p:cNvPr id="4" name="Rectangle 3"/>
+          <p:cNvSpPr/>
+          <p:nvPr/>
+        </p:nvSpPr>
+        <p:spPr>
+          <a:xfrm>
+            <a:off x="640000" y="1650000"/>
+            <a:ext cx="5306000" cy="4400000"/>
+          </a:xfrm>
+          <a:prstGeom prst="rect">
+            <a:avLst/>
+          </a:prstGeom>
+          <a:solidFill>
+            <a:srgbClr val="FBE3D2"/>
+          </a:solidFill>
+          <a:ln>
+            <a:noFill/>
+          </a:ln>
+        </p:spPr>
+        <p:style>
+          <a:lnRef idx="1">
+            <a:schemeClr val="accent1"/>
+          </a:lnRef>
+          <a:fillRef idx="3">
+            <a:schemeClr val="accent1"/>
+          </a:fillRef>
+          <a:effectRef idx="2">
+            <a:schemeClr val="accent1"/>
+          </a:effectRef>
+          <a:fontRef idx="minor">
+            <a:schemeClr val="lt1"/>
+          </a:fontRef>
+        </p:style>
+        <p:txBody>
+          <a:bodyPr rtlCol="0" anchor="ctr"/>
+          <a:lstStyle/>
+          <a:p>
+            <a:pPr algn="ctr"/>
+          </a:p>
+        </p:txBody>
+      </p:sp>
+      <p:sp>
+        <p:nvSpPr>
+          <p:cNvPr id="5" name="TextBox 4"/>
+          <p:cNvSpPr txBox="1"/>
+          <p:nvPr/>
+        </p:nvSpPr>
+        <p:spPr>
+          <a:xfrm>
+            <a:off x="840000" y="1750000"/>
+            <a:ext cx="4906000" cy="600000"/>
+          </a:xfrm>
+          <a:prstGeom prst="rect">
+            <a:avLst/>
+          </a:prstGeom>
+          <a:noFill/>
+        </p:spPr>
+        <p:txBody>
+          <a:bodyPr wrap="square">
+            <a:spAutoFit/>
+          </a:bodyPr>
+          <a:lstStyle/>
+          <a:p>
+            <a:pPr>
+              <a:spcAft>
+                <a:spcPts val="1260"/>
+              </a:spcAft>
+            </a:pPr>
+            <a:r>
+              <a:rPr sz="2800" b="1">
+                <a:solidFill>
+                  <a:srgbClr val="C2531C"/>
+                </a:solidFill>
+                <a:latin typeface="Nunito Sans"/>
+              </a:rPr>
+              <a:t>Manipular</a:t>
+            </a:r>
+          </a:p>
+        </p:txBody>
+      </p:sp>
+      <p:sp>
+        <p:nvSpPr>
+          <p:cNvPr id="6" name="TextBox 5"/>
+          <p:cNvSpPr txBox="1"/>
+          <p:nvPr/>
+        </p:nvSpPr>
+        <p:spPr>
+          <a:xfrm>
+            <a:off x="840000" y="2400000"/>
+            <a:ext cx="4906000" cy="3500000"/>
+          </a:xfrm>
+          <a:prstGeom prst="rect">
+            <a:avLst/>
+          </a:prstGeom>
+          <a:noFill/>
+        </p:spPr>
+        <p:txBody>
+          <a:bodyPr wrap="square">
+            <a:spAutoFit/>
+          </a:bodyPr>
+          <a:lstStyle/>
+          <a:p>
+            <a:pPr>
+              <a:spcAft>
+                <a:spcPts val="1170"/>
+              </a:spcAft>
+            </a:pPr>
+            <a:r>
+              <a:rPr sz="2600" b="1">
+                <a:solidFill>
+                  <a:srgbClr val="E8793A"/>
+                </a:solidFill>
+                <a:latin typeface="Nunito Sans"/>
+              </a:rPr>
+              <a:t>• </a:t>
+            </a:r>
+            <a:r>
+              <a:rPr sz="2600" b="0">
+                <a:solidFill>
+                  <a:srgbClr val="1F2A44"/>
+                </a:solidFill>
+                <a:latin typeface="Nunito Sans"/>
+              </a:rPr>
+              <a:t>Esconde información</a:t>
+            </a:r>
+          </a:p>
+          <a:p>
+            <a:pPr>
+              <a:spcAft>
+                <a:spcPts val="1170"/>
+              </a:spcAft>
+            </a:pPr>
+            <a:r>
+              <a:rPr sz="2600" b="1">
+                <a:solidFill>
+                  <a:srgbClr val="E8793A"/>
+                </a:solidFill>
+                <a:latin typeface="Nunito Sans"/>
+              </a:rPr>
+              <a:t>• </a:t>
+            </a:r>
+            <a:r>
+              <a:rPr sz="2600" b="0">
+                <a:solidFill>
+                  <a:srgbClr val="1F2A44"/>
+                </a:solidFill>
+                <a:latin typeface="Nunito Sans"/>
+              </a:rPr>
+              <a:t>Mete prisa para que no pienses</a:t>
+            </a:r>
+          </a:p>
+          <a:p>
+            <a:pPr>
+              <a:spcAft>
+                <a:spcPts val="1170"/>
+              </a:spcAft>
+            </a:pPr>
+            <a:r>
+              <a:rPr sz="2600" b="1">
+                <a:solidFill>
+                  <a:srgbClr val="E8793A"/>
+                </a:solidFill>
+                <a:latin typeface="Nunito Sans"/>
+              </a:rPr>
+              <a:t>• </a:t>
+            </a:r>
+            <a:r>
+              <a:rPr sz="2600" b="0">
+                <a:solidFill>
+                  <a:srgbClr val="1F2A44"/>
+                </a:solidFill>
+                <a:latin typeface="Nunito Sans"/>
+              </a:rPr>
+              <a:t>Usa el miedo para que no pienses</a:t>
+            </a:r>
+          </a:p>
+          <a:p>
+            <a:pPr>
+              <a:spcAft>
+                <a:spcPts val="1170"/>
+              </a:spcAft>
+            </a:pPr>
+            <a:r>
+              <a:rPr sz="2600" b="1">
+                <a:solidFill>
+                  <a:srgbClr val="E8793A"/>
+                </a:solidFill>
+                <a:latin typeface="Nunito Sans"/>
+              </a:rPr>
+              <a:t>• </a:t>
+            </a:r>
+            <a:r>
+              <a:rPr sz="2600" b="0">
+                <a:solidFill>
+                  <a:srgbClr val="1F2A44"/>
+                </a:solidFill>
+                <a:latin typeface="Nunito Sans"/>
+              </a:rPr>
+              <a:t>Quiere que no preguntes</a:t>
+            </a:r>
+          </a:p>
+        </p:txBody>
+      </p:sp>
+      <p:sp>
+        <p:nvSpPr>
+          <p:cNvPr id="7" name="Rectangle 6"/>
+          <p:cNvSpPr/>
+          <p:nvPr/>
+        </p:nvSpPr>
+        <p:spPr>
+          <a:xfrm>
+            <a:off x="6246000" y="1650000"/>
+            <a:ext cx="5306000" cy="4400000"/>
+          </a:xfrm>
+          <a:prstGeom prst="rect">
+            <a:avLst/>
+          </a:prstGeom>
+          <a:solidFill>
+            <a:srgbClr val="EAF0F7"/>
+          </a:solidFill>
+          <a:ln>
+            <a:noFill/>
+          </a:ln>
+        </p:spPr>
+        <p:style>
+          <a:lnRef idx="1">
+            <a:schemeClr val="accent1"/>
+          </a:lnRef>
+          <a:fillRef idx="3">
+            <a:schemeClr val="accent1"/>
+          </a:fillRef>
+          <a:effectRef idx="2">
+            <a:schemeClr val="accent1"/>
+          </a:effectRef>
+          <a:fontRef idx="minor">
+            <a:schemeClr val="lt1"/>
+          </a:fontRef>
+        </p:style>
+        <p:txBody>
+          <a:bodyPr rtlCol="0" anchor="ctr"/>
+          <a:lstStyle/>
+          <a:p>
+            <a:pPr algn="ctr"/>
+          </a:p>
+        </p:txBody>
+      </p:sp>
+      <p:sp>
+        <p:nvSpPr>
+          <p:cNvPr id="8" name="TextBox 7"/>
+          <p:cNvSpPr txBox="1"/>
+          <p:nvPr/>
+        </p:nvSpPr>
+        <p:spPr>
+          <a:xfrm>
+            <a:off x="6446000" y="1750000"/>
+            <a:ext cx="4906000" cy="600000"/>
+          </a:xfrm>
+          <a:prstGeom prst="rect">
+            <a:avLst/>
+          </a:prstGeom>
+          <a:noFill/>
+        </p:spPr>
+        <p:txBody>
+          <a:bodyPr wrap="square">
+            <a:spAutoFit/>
+          </a:bodyPr>
+          <a:lstStyle/>
+          <a:p>
+            <a:pPr>
+              <a:spcAft>
+                <a:spcPts val="1260"/>
+              </a:spcAft>
+            </a:pPr>
+            <a:r>
+              <a:rPr sz="2800" b="1">
+                <a:solidFill>
+                  <a:srgbClr val="2F6FB5"/>
+                </a:solidFill>
+                <a:latin typeface="Nunito Sans"/>
+              </a:rPr>
+              <a:t>Convencer</a:t>
+            </a:r>
+          </a:p>
+        </p:txBody>
+      </p:sp>
+      <p:sp>
+        <p:nvSpPr>
+          <p:cNvPr id="9" name="TextBox 8"/>
+          <p:cNvSpPr txBox="1"/>
+          <p:nvPr/>
+        </p:nvSpPr>
+        <p:spPr>
+          <a:xfrm>
+            <a:off x="6446000" y="2400000"/>
+            <a:ext cx="4906000" cy="3500000"/>
+          </a:xfrm>
+          <a:prstGeom prst="rect">
+            <a:avLst/>
+          </a:prstGeom>
+          <a:noFill/>
+        </p:spPr>
+        <p:txBody>
+          <a:bodyPr wrap="square">
+            <a:spAutoFit/>
+          </a:bodyPr>
+          <a:lstStyle/>
+          <a:p>
+            <a:pPr>
+              <a:spcAft>
+                <a:spcPts val="1170"/>
+              </a:spcAft>
+            </a:pPr>
+            <a:r>
+              <a:rPr sz="2600" b="1">
+                <a:solidFill>
+                  <a:srgbClr val="E8793A"/>
+                </a:solidFill>
+                <a:latin typeface="Nunito Sans"/>
+              </a:rPr>
+              <a:t>• </a:t>
+            </a:r>
+            <a:r>
+              <a:rPr sz="2600" b="0">
+                <a:solidFill>
+                  <a:srgbClr val="1F2A44"/>
+                </a:solidFill>
+                <a:latin typeface="Nunito Sans"/>
+              </a:rPr>
+              <a:t>Enseña los datos</a:t>
+            </a:r>
+          </a:p>
+          <a:p>
+            <a:pPr>
+              <a:spcAft>
+                <a:spcPts val="1170"/>
+              </a:spcAft>
+            </a:pPr>
+            <a:r>
+              <a:rPr sz="2600" b="1">
+                <a:solidFill>
+                  <a:srgbClr val="E8793A"/>
+                </a:solidFill>
+                <a:latin typeface="Nunito Sans"/>
+              </a:rPr>
+              <a:t>• </a:t>
+            </a:r>
+            <a:r>
+              <a:rPr sz="2600" b="0">
+                <a:solidFill>
+                  <a:srgbClr val="1F2A44"/>
+                </a:solidFill>
+                <a:latin typeface="Nunito Sans"/>
+              </a:rPr>
+              <a:t>Te deja tiempo para decidir</a:t>
+            </a:r>
+          </a:p>
+          <a:p>
+            <a:pPr>
+              <a:spcAft>
+                <a:spcPts val="1170"/>
+              </a:spcAft>
+            </a:pPr>
+            <a:r>
+              <a:rPr sz="2600" b="1">
+                <a:solidFill>
+                  <a:srgbClr val="E8793A"/>
+                </a:solidFill>
+                <a:latin typeface="Nunito Sans"/>
+              </a:rPr>
+              <a:t>• </a:t>
+            </a:r>
+            <a:r>
+              <a:rPr sz="2600" b="0">
+                <a:solidFill>
+                  <a:srgbClr val="1F2A44"/>
+                </a:solidFill>
+                <a:latin typeface="Nunito Sans"/>
+              </a:rPr>
+              <a:t>Da razones que puedes comprobar</a:t>
+            </a:r>
+          </a:p>
+          <a:p>
+            <a:pPr>
+              <a:spcAft>
+                <a:spcPts val="1170"/>
+              </a:spcAft>
+            </a:pPr>
+            <a:r>
+              <a:rPr sz="2600" b="1">
+                <a:solidFill>
+                  <a:srgbClr val="E8793A"/>
+                </a:solidFill>
+                <a:latin typeface="Nunito Sans"/>
+              </a:rPr>
+              <a:t>• </a:t>
+            </a:r>
+            <a:r>
+              <a:rPr sz="2600" b="0">
+                <a:solidFill>
+                  <a:srgbClr val="1F2A44"/>
+                </a:solidFill>
+                <a:latin typeface="Nunito Sans"/>
+              </a:rPr>
+              <a:t>Acepta tus preguntas</a:t>
+            </a:r>
+          </a:p>
+        </p:txBody>
+      </p:sp>
+    </p:spTree>
+  </p:cSld>
+  <p:clrMapOvr>
+    <a:masterClrMapping/>
+  </p:clrMapOvr>
+</p:sld>
+</file>
+
+<file path=ppt/slides/slide8.xml><?xml version="1.0" encoding="utf-8"?>
+<p:sld xmlns:a="http://schemas.openxmlformats.org/drawingml/2006/main" xmlns:p="http://schemas.openxmlformats.org/presentationml/2006/main" xmlns:r="http://schemas.openxmlformats.org/officeDocument/2006/relationships">
+  <p:cSld>
+    <p:bg>
+      <p:bgPr>
+        <a:solidFill>
+          <a:srgbClr val="FBF7EF"/>
+        </a:solidFill>
+        <a:effectLst/>
+      </p:bgPr>
+    </p:bg>
+    <p:spTree>
+      <p:nvGrpSpPr>
+        <p:cNvPr id="1" name=""/>
+        <p:cNvGrpSpPr/>
+        <p:nvPr/>
+      </p:nvGrpSpPr>
+      <p:grpSpPr/>
+      <p:sp>
+        <p:nvSpPr>
+          <p:cNvPr id="2" name="TextBox 1"/>
+          <p:cNvSpPr txBox="1"/>
+          <p:nvPr/>
+        </p:nvSpPr>
+        <p:spPr>
+          <a:xfrm>
+            <a:off x="640000" y="380000"/>
+            <a:ext cx="10912000" cy="420000"/>
+          </a:xfrm>
+          <a:prstGeom prst="rect">
+            <a:avLst/>
+          </a:prstGeom>
+          <a:noFill/>
+        </p:spPr>
+        <p:txBody>
+          <a:bodyPr wrap="square">
+            <a:spAutoFit/>
+          </a:bodyPr>
+          <a:lstStyle/>
+          <a:p>
+            <a:pPr>
+              <a:spcAft>
+                <a:spcPts val="630"/>
+              </a:spcAft>
+            </a:pPr>
+            <a:r>
+              <a:rPr sz="1400" b="1">
+                <a:solidFill>
+                  <a:srgbClr val="E8793A"/>
+                </a:solidFill>
+                <a:latin typeface="Nunito Sans"/>
+              </a:rPr>
+              <a:t>BLOQUE 1 · CONVENCER Y MANIPULAR</a:t>
+            </a:r>
+          </a:p>
+        </p:txBody>
+      </p:sp>
+      <p:sp>
+        <p:nvSpPr>
+          <p:cNvPr id="3" name="TextBox 2"/>
+          <p:cNvSpPr txBox="1"/>
+          <p:nvPr/>
+        </p:nvSpPr>
+        <p:spPr>
+          <a:xfrm>
+            <a:off x="640000" y="760000"/>
+            <a:ext cx="10912000" cy="800000"/>
+          </a:xfrm>
+          <a:prstGeom prst="rect">
+            <a:avLst/>
+          </a:prstGeom>
+          <a:noFill/>
+        </p:spPr>
+        <p:txBody>
+          <a:bodyPr wrap="square">
+            <a:spAutoFit/>
+          </a:bodyPr>
+          <a:lstStyle/>
+          <a:p>
+            <a:pPr>
+              <a:spcAft>
+                <a:spcPts val="1710"/>
+              </a:spcAft>
+            </a:pPr>
+            <a:r>
+              <a:rPr sz="3800" b="1">
+                <a:solidFill>
+                  <a:srgbClr val="1F2A44"/>
+                </a:solidFill>
+                <a:latin typeface="Fredoka"/>
+              </a:rPr>
+              <a:t>Cuatro preguntas para detectar la manipulación</a:t>
             </a:r>
           </a:p>
         </p:txBody>
@@ -4790,7 +7332,7 @@
         </p:nvGraphicFramePr>
         <p:xfrm>
           <a:off x="640000" y="1700000"/>
-          <a:ext cx="10912000" cy="2400000"/>
+          <a:ext cx="10912000" cy="3000000"/>
         </p:xfrm>
         <a:graphic>
           <a:graphicData uri="http://schemas.openxmlformats.org/drawingml/2006/table">
@@ -4799,9 +7341,8 @@
                 <a:tableStyleId>{5C22544A-7EE6-4342-B048-85BDC9FD1C3A}</a:tableStyleId>
               </a:tblPr>
               <a:tblGrid>
-                <a:gridCol w="3637333"/>
-                <a:gridCol w="3637333"/>
-                <a:gridCol w="3637334"/>
+                <a:gridCol w="5456000"/>
+                <a:gridCol w="5456000"/>
               </a:tblGrid>
               <a:tr h="600000">
                 <a:tc>
@@ -4838,29 +7379,7 @@
                           </a:solidFill>
                           <a:latin typeface="Fredoka"/>
                         </a:rPr>
-                        <a:t>Qué pide</a:t>
-                      </a:r>
-                    </a:p>
-                  </a:txBody>
-                  <a:tcPr>
-                    <a:solidFill>
-                      <a:srgbClr val="1F2A44"/>
-                    </a:solidFill>
-                  </a:tcPr>
-                </a:tc>
-                <a:tc>
-                  <a:txBody>
-                    <a:bodyPr/>
-                    <a:lstStyle/>
-                    <a:p>
-                      <a:r>
-                        <a:rPr sz="2000" b="1">
-                          <a:solidFill>
-                            <a:srgbClr val="FBF7EF"/>
-                          </a:solidFill>
-                          <a:latin typeface="Fredoka"/>
-                        </a:rPr>
-                        <a:t>Ejemplo</a:t>
+                        <a:t>Si la respuesta es «sí»…</a:t>
                       </a:r>
                     </a:p>
                   </a:txBody>
@@ -4878,13 +7397,31 @@
                     <a:lstStyle/>
                     <a:p>
                       <a:r>
+                        <a:rPr sz="2000" b="0">
+                          <a:solidFill>
+                            <a:srgbClr val="1F2A44"/>
+                          </a:solidFill>
+                          <a:latin typeface="Nunito Sans"/>
+                        </a:rPr>
+                        <a:t>¿Me meten </a:t>
+                      </a:r>
+                      <a:r>
                         <a:rPr sz="2000" b="1">
                           <a:solidFill>
                             <a:srgbClr val="1F2A44"/>
                           </a:solidFill>
                           <a:latin typeface="Nunito Sans"/>
                         </a:rPr>
-                        <a:t>¿Por qué?</a:t>
+                        <a:t>prisa</a:t>
+                      </a:r>
+                      <a:r>
+                        <a:rPr sz="2000" b="0">
+                          <a:solidFill>
+                            <a:srgbClr val="1F2A44"/>
+                          </a:solidFill>
+                          <a:latin typeface="Nunito Sans"/>
+                        </a:rPr>
+                        <a:t>?</a:t>
                       </a:r>
                     </a:p>
                   </a:txBody>
@@ -4906,7 +7443,31 @@
                           </a:solidFill>
                           <a:latin typeface="Nunito Sans"/>
                         </a:rPr>
-                        <a:t>La </a:t>
+                        <a:t>Quieren que decida antes de pensar</a:t>
+                      </a:r>
+                    </a:p>
+                  </a:txBody>
+                  <a:tcPr>
+                    <a:solidFill>
+                      <a:srgbClr val="FFFFFF"/>
+                    </a:solidFill>
+                  </a:tcPr>
+                </a:tc>
+              </a:tr>
+              <a:tr h="600000">
+                <a:tc>
+                  <a:txBody>
+                    <a:bodyPr/>
+                    <a:lstStyle/>
+                    <a:p>
+                      <a:r>
+                        <a:rPr sz="2000" b="0">
+                          <a:solidFill>
+                            <a:srgbClr val="1F2A44"/>
+                          </a:solidFill>
+                          <a:latin typeface="Nunito Sans"/>
+                        </a:rPr>
+                        <a:t>¿Me </a:t>
                       </a:r>
                       <a:r>
                         <a:rPr sz="2000" b="1">
@@ -4915,7 +7476,7 @@
                           </a:solidFill>
                           <a:latin typeface="Nunito Sans"/>
                         </a:rPr>
-                        <a:t>causa</a:t>
+                        <a:t>esconden</a:t>
                       </a:r>
                       <a:r>
                         <a:rPr sz="2000" b="0">
@@ -4924,7 +7485,71 @@
                           </a:solidFill>
                           <a:latin typeface="Nunito Sans"/>
                         </a:rPr>
-                        <a:t>: lo que ha pasado antes</a:t>
+                        <a:t> algo?</a:t>
+                      </a:r>
+                    </a:p>
+                  </a:txBody>
+                  <a:tcPr>
+                    <a:solidFill>
+                      <a:srgbClr val="EAF0F7"/>
+                    </a:solidFill>
+                  </a:tcPr>
+                </a:tc>
+                <a:tc>
+                  <a:txBody>
+                    <a:bodyPr/>
+                    <a:lstStyle/>
+                    <a:p>
+                      <a:r>
+                        <a:rPr sz="2000" b="0">
+                          <a:solidFill>
+                            <a:srgbClr val="1F2A44"/>
+                          </a:solidFill>
+                          <a:latin typeface="Nunito Sans"/>
+                        </a:rPr>
+                        <a:t>Quieren que no compare</a:t>
+                      </a:r>
+                    </a:p>
+                  </a:txBody>
+                  <a:tcPr>
+                    <a:solidFill>
+                      <a:srgbClr val="EAF0F7"/>
+                    </a:solidFill>
+                  </a:tcPr>
+                </a:tc>
+              </a:tr>
+              <a:tr h="600000">
+                <a:tc>
+                  <a:txBody>
+                    <a:bodyPr/>
+                    <a:lstStyle/>
+                    <a:p>
+                      <a:r>
+                        <a:rPr sz="2000" b="0">
+                          <a:solidFill>
+                            <a:srgbClr val="1F2A44"/>
+                          </a:solidFill>
+                          <a:latin typeface="Nunito Sans"/>
+                        </a:rPr>
+                        <a:t>¿Solo me </a:t>
+                      </a:r>
+                      <a:r>
+                        <a:rPr sz="2000" b="1">
+                          <a:solidFill>
+                            <a:srgbClr val="1F2A44"/>
+                          </a:solidFill>
+                          <a:latin typeface="Nunito Sans"/>
+                        </a:rPr>
+                        <a:t>emocionan</a:t>
+                      </a:r>
+                      <a:r>
+                        <a:rPr sz="2000" b="0">
+                          <a:solidFill>
+                            <a:srgbClr val="1F2A44"/>
+                          </a:solidFill>
+                          <a:latin typeface="Nunito Sans"/>
+                        </a:rPr>
+                        <a:t>?</a:t>
                       </a:r>
                     </a:p>
                   </a:txBody>
@@ -4946,7 +7571,7 @@
                           </a:solidFill>
                           <a:latin typeface="Nunito Sans"/>
                         </a:rPr>
-                        <a:t>«¿Por qué estás cansada?» «Porque he dormido mal»</a:t>
+                        <a:t>Quieren que la emoción ocupe el lugar de las razones</a:t>
                       </a:r>
                     </a:p>
                   </a:txBody>
@@ -4964,13 +7589,31 @@
                     <a:lstStyle/>
                     <a:p>
                       <a:r>
+                        <a:rPr sz="2000" b="0">
+                          <a:solidFill>
+                            <a:srgbClr val="1F2A44"/>
+                          </a:solidFill>
+                          <a:latin typeface="Nunito Sans"/>
+                        </a:rPr>
+                        <a:t>¿Qué </a:t>
+                      </a:r>
+                      <a:r>
                         <a:rPr sz="2000" b="1">
                           <a:solidFill>
                             <a:srgbClr val="1F2A44"/>
                           </a:solidFill>
                           <a:latin typeface="Nunito Sans"/>
                         </a:rPr>
-                        <a:t>¿Por qué?</a:t>
+                        <a:t>gana</a:t>
+                      </a:r>
+                      <a:r>
+                        <a:rPr sz="2000" b="0">
+                          <a:solidFill>
+                            <a:srgbClr val="1F2A44"/>
+                          </a:solidFill>
+                          <a:latin typeface="Nunito Sans"/>
+                        </a:rPr>
+                        <a:t> quien me lo dice?</a:t>
                       </a:r>
                     </a:p>
                   </a:txBody>
@@ -4992,47 +7635,7 @@
                           </a:solidFill>
                           <a:latin typeface="Nunito Sans"/>
                         </a:rPr>
-                        <a:t>Las </a:t>
-                      </a:r>
-                      <a:r>
-                        <a:rPr sz="2000" b="1">
-                          <a:solidFill>
-                            <a:srgbClr val="1F2A44"/>
-                          </a:solidFill>
-                          <a:latin typeface="Nunito Sans"/>
-                        </a:rPr>
-                        <a:t>razones</a:t>
-                      </a:r>
-                      <a:r>
-                        <a:rPr sz="2000" b="0">
-                          <a:solidFill>
-                            <a:srgbClr val="1F2A44"/>
-                          </a:solidFill>
-                          <a:latin typeface="Nunito Sans"/>
-                        </a:rPr>
-                        <a:t>: lo que apoya una idea</a:t>
-                      </a:r>
-                    </a:p>
-                  </a:txBody>
-                  <a:tcPr>
-                    <a:solidFill>
-                      <a:srgbClr val="EAF0F7"/>
-                    </a:solidFill>
-                  </a:tcPr>
-                </a:tc>
-                <a:tc>
-                  <a:txBody>
-                    <a:bodyPr/>
-                    <a:lstStyle/>
-                    <a:p>
-                      <a:r>
-                        <a:rPr sz="2000" b="0">
-                          <a:solidFill>
-                            <a:srgbClr val="1F2A44"/>
-                          </a:solidFill>
-                          <a:latin typeface="Nunito Sans"/>
-                        </a:rPr>
-                        <a:t>«¿Por qué piensas eso?» «Porque lo he leído en…»</a:t>
+                        <a:t>No supongo mala fe, pero lo tengo en cuenta</a:t>
                       </a:r>
                     </a:p>
                   </a:txBody>
@@ -5043,3178 +7646,10 @@
                   </a:tcPr>
                 </a:tc>
               </a:tr>
-              <a:tr h="600000">
-                <a:tc>
-                  <a:txBody>
-                    <a:bodyPr/>
-                    <a:lstStyle/>
-                    <a:p>
-                      <a:r>
-                        <a:rPr sz="2000" b="1">
-                          <a:solidFill>
-                            <a:srgbClr val="1F2A44"/>
-                          </a:solidFill>
-                          <a:latin typeface="Nunito Sans"/>
-                        </a:rPr>
-                        <a:t>¿Para qué?</a:t>
-                      </a:r>
-                    </a:p>
-                  </a:txBody>
-                  <a:tcPr>
-                    <a:solidFill>
-                      <a:srgbClr val="FFFFFF"/>
-                    </a:solidFill>
-                  </a:tcPr>
-                </a:tc>
-                <a:tc>
-                  <a:txBody>
-                    <a:bodyPr/>
-                    <a:lstStyle/>
-                    <a:p>
-                      <a:r>
-                        <a:rPr sz="2000" b="0">
-                          <a:solidFill>
-                            <a:srgbClr val="1F2A44"/>
-                          </a:solidFill>
-                          <a:latin typeface="Nunito Sans"/>
-                        </a:rPr>
-                        <a:t>La </a:t>
-                      </a:r>
-                      <a:r>
-                        <a:rPr sz="2000" b="1">
-                          <a:solidFill>
-                            <a:srgbClr val="1F2A44"/>
-                          </a:solidFill>
-                          <a:latin typeface="Nunito Sans"/>
-                        </a:rPr>
-                        <a:t>finalidad</a:t>
-                      </a:r>
-                      <a:r>
-                        <a:rPr sz="2000" b="0">
-                          <a:solidFill>
-                            <a:srgbClr val="1F2A44"/>
-                          </a:solidFill>
-                          <a:latin typeface="Nunito Sans"/>
-                        </a:rPr>
-                        <a:t>: lo que se quiere conseguir</a:t>
-                      </a:r>
-                    </a:p>
-                  </a:txBody>
-                  <a:tcPr>
-                    <a:solidFill>
-                      <a:srgbClr val="FFFFFF"/>
-                    </a:solidFill>
-                  </a:tcPr>
-                </a:tc>
-                <a:tc>
-                  <a:txBody>
-                    <a:bodyPr/>
-                    <a:lstStyle/>
-                    <a:p>
-                      <a:r>
-                        <a:rPr sz="2000" b="0">
-                          <a:solidFill>
-                            <a:srgbClr val="1F2A44"/>
-                          </a:solidFill>
-                          <a:latin typeface="Nunito Sans"/>
-                        </a:rPr>
-                        <a:t>«¿Para qué entrenas?» «Para jugar el sábado»</a:t>
-                      </a:r>
-                    </a:p>
-                  </a:txBody>
-                  <a:tcPr>
-                    <a:solidFill>
-                      <a:srgbClr val="FFFFFF"/>
-                    </a:solidFill>
-                  </a:tcPr>
-                </a:tc>
-              </a:tr>
             </a:tbl>
           </a:graphicData>
         </a:graphic>
       </p:graphicFrame>
-    </p:spTree>
-  </p:cSld>
-  <p:clrMapOvr>
-    <a:masterClrMapping/>
-  </p:clrMapOvr>
-</p:sld>
-</file>
-
-<file path=ppt/slides/slide15.xml><?xml version="1.0" encoding="utf-8"?>
-<p:sld xmlns:a="http://schemas.openxmlformats.org/drawingml/2006/main" xmlns:p="http://schemas.openxmlformats.org/presentationml/2006/main" xmlns:r="http://schemas.openxmlformats.org/officeDocument/2006/relationships">
-  <p:cSld>
-    <p:bg>
-      <p:bgPr>
-        <a:solidFill>
-          <a:srgbClr val="FBF7EF"/>
-        </a:solidFill>
-        <a:effectLst/>
-      </p:bgPr>
-    </p:bg>
-    <p:spTree>
-      <p:nvGrpSpPr>
-        <p:cNvPr id="1" name=""/>
-        <p:cNvGrpSpPr/>
-        <p:nvPr/>
-      </p:nvGrpSpPr>
-      <p:grpSpPr/>
-      <p:sp>
-        <p:nvSpPr>
-          <p:cNvPr id="2" name="TextBox 1"/>
-          <p:cNvSpPr txBox="1"/>
-          <p:nvPr/>
-        </p:nvSpPr>
-        <p:spPr>
-          <a:xfrm>
-            <a:off x="640000" y="380000"/>
-            <a:ext cx="10912000" cy="420000"/>
-          </a:xfrm>
-          <a:prstGeom prst="rect">
-            <a:avLst/>
-          </a:prstGeom>
-          <a:noFill/>
-        </p:spPr>
-        <p:txBody>
-          <a:bodyPr wrap="square">
-            <a:spAutoFit/>
-          </a:bodyPr>
-          <a:lstStyle/>
-          <a:p>
-            <a:pPr>
-              <a:spcAft>
-                <a:spcPts val="630"/>
-              </a:spcAft>
-            </a:pPr>
-            <a:r>
-              <a:rPr sz="1400" b="1">
-                <a:solidFill>
-                  <a:srgbClr val="E8793A"/>
-                </a:solidFill>
-                <a:latin typeface="Nunito Sans"/>
-              </a:rPr>
-              <a:t>BLOQUE 3 · PREGUNTAR BIEN</a:t>
-            </a:r>
-          </a:p>
-        </p:txBody>
-      </p:sp>
-      <p:sp>
-        <p:nvSpPr>
-          <p:cNvPr id="3" name="TextBox 2"/>
-          <p:cNvSpPr txBox="1"/>
-          <p:nvPr/>
-        </p:nvSpPr>
-        <p:spPr>
-          <a:xfrm>
-            <a:off x="640000" y="760000"/>
-            <a:ext cx="10912000" cy="800000"/>
-          </a:xfrm>
-          <a:prstGeom prst="rect">
-            <a:avLst/>
-          </a:prstGeom>
-          <a:noFill/>
-        </p:spPr>
-        <p:txBody>
-          <a:bodyPr wrap="square">
-            <a:spAutoFit/>
-          </a:bodyPr>
-          <a:lstStyle/>
-          <a:p>
-            <a:pPr>
-              <a:spcAft>
-                <a:spcPts val="1710"/>
-              </a:spcAft>
-            </a:pPr>
-            <a:r>
-              <a:rPr sz="3800" b="1">
-                <a:solidFill>
-                  <a:srgbClr val="1F2A44"/>
-                </a:solidFill>
-                <a:latin typeface="Fredoka"/>
-              </a:rPr>
-              <a:t>Preguntar mal y preguntar bien</a:t>
-            </a:r>
-          </a:p>
-        </p:txBody>
-      </p:sp>
-      <p:sp>
-        <p:nvSpPr>
-          <p:cNvPr id="4" name="Rectangle 3"/>
-          <p:cNvSpPr/>
-          <p:nvPr/>
-        </p:nvSpPr>
-        <p:spPr>
-          <a:xfrm>
-            <a:off x="640000" y="1650000"/>
-            <a:ext cx="5306000" cy="4400000"/>
-          </a:xfrm>
-          <a:prstGeom prst="rect">
-            <a:avLst/>
-          </a:prstGeom>
-          <a:solidFill>
-            <a:srgbClr val="FBE3D2"/>
-          </a:solidFill>
-          <a:ln>
-            <a:noFill/>
-          </a:ln>
-        </p:spPr>
-        <p:style>
-          <a:lnRef idx="1">
-            <a:schemeClr val="accent1"/>
-          </a:lnRef>
-          <a:fillRef idx="3">
-            <a:schemeClr val="accent1"/>
-          </a:fillRef>
-          <a:effectRef idx="2">
-            <a:schemeClr val="accent1"/>
-          </a:effectRef>
-          <a:fontRef idx="minor">
-            <a:schemeClr val="lt1"/>
-          </a:fontRef>
-        </p:style>
-        <p:txBody>
-          <a:bodyPr rtlCol="0" anchor="ctr"/>
-          <a:lstStyle/>
-          <a:p>
-            <a:pPr algn="ctr"/>
-          </a:p>
-        </p:txBody>
-      </p:sp>
-      <p:sp>
-        <p:nvSpPr>
-          <p:cNvPr id="5" name="TextBox 4"/>
-          <p:cNvSpPr txBox="1"/>
-          <p:nvPr/>
-        </p:nvSpPr>
-        <p:spPr>
-          <a:xfrm>
-            <a:off x="840000" y="1750000"/>
-            <a:ext cx="4906000" cy="600000"/>
-          </a:xfrm>
-          <a:prstGeom prst="rect">
-            <a:avLst/>
-          </a:prstGeom>
-          <a:noFill/>
-        </p:spPr>
-        <p:txBody>
-          <a:bodyPr wrap="square">
-            <a:spAutoFit/>
-          </a:bodyPr>
-          <a:lstStyle/>
-          <a:p>
-            <a:pPr>
-              <a:spcAft>
-                <a:spcPts val="1260"/>
-              </a:spcAft>
-            </a:pPr>
-            <a:r>
-              <a:rPr sz="2800" b="1">
-                <a:solidFill>
-                  <a:srgbClr val="C2531C"/>
-                </a:solidFill>
-                <a:latin typeface="Nunito Sans"/>
-              </a:rPr>
-              <a:t>Mal</a:t>
-            </a:r>
-          </a:p>
-        </p:txBody>
-      </p:sp>
-      <p:sp>
-        <p:nvSpPr>
-          <p:cNvPr id="6" name="TextBox 5"/>
-          <p:cNvSpPr txBox="1"/>
-          <p:nvPr/>
-        </p:nvSpPr>
-        <p:spPr>
-          <a:xfrm>
-            <a:off x="840000" y="2400000"/>
-            <a:ext cx="4906000" cy="3500000"/>
-          </a:xfrm>
-          <a:prstGeom prst="rect">
-            <a:avLst/>
-          </a:prstGeom>
-          <a:noFill/>
-        </p:spPr>
-        <p:txBody>
-          <a:bodyPr wrap="square">
-            <a:spAutoFit/>
-          </a:bodyPr>
-          <a:lstStyle/>
-          <a:p>
-            <a:pPr>
-              <a:spcAft>
-                <a:spcPts val="1170"/>
-              </a:spcAft>
-            </a:pPr>
-            <a:r>
-              <a:rPr sz="2600" b="1">
-                <a:solidFill>
-                  <a:srgbClr val="E8793A"/>
-                </a:solidFill>
-                <a:latin typeface="Nunito Sans"/>
-              </a:rPr>
-              <a:t>• </a:t>
-            </a:r>
-            <a:r>
-              <a:rPr sz="2600" b="0">
-                <a:solidFill>
-                  <a:srgbClr val="1F2A44"/>
-                </a:solidFill>
-                <a:latin typeface="Nunito Sans"/>
-              </a:rPr>
-              <a:t>Preguntar para pillar al otro</a:t>
-            </a:r>
-          </a:p>
-          <a:p>
-            <a:pPr>
-              <a:spcAft>
-                <a:spcPts val="1170"/>
-              </a:spcAft>
-            </a:pPr>
-            <a:r>
-              <a:rPr sz="2600" b="1">
-                <a:solidFill>
-                  <a:srgbClr val="E8793A"/>
-                </a:solidFill>
-                <a:latin typeface="Nunito Sans"/>
-              </a:rPr>
-              <a:t>• </a:t>
-            </a:r>
-            <a:r>
-              <a:rPr sz="2600" b="0">
-                <a:solidFill>
-                  <a:srgbClr val="1F2A44"/>
-                </a:solidFill>
-                <a:latin typeface="Nunito Sans"/>
-              </a:rPr>
-              <a:t>Preguntar sin escuchar la respuesta</a:t>
-            </a:r>
-          </a:p>
-          <a:p>
-            <a:pPr>
-              <a:spcAft>
-                <a:spcPts val="1170"/>
-              </a:spcAft>
-            </a:pPr>
-            <a:r>
-              <a:rPr sz="2600" b="1">
-                <a:solidFill>
-                  <a:srgbClr val="E8793A"/>
-                </a:solidFill>
-                <a:latin typeface="Nunito Sans"/>
-              </a:rPr>
-              <a:t>• </a:t>
-            </a:r>
-            <a:r>
-              <a:rPr sz="2600" b="0">
-                <a:solidFill>
-                  <a:srgbClr val="1F2A44"/>
-                </a:solidFill>
-                <a:latin typeface="Nunito Sans"/>
-              </a:rPr>
-              <a:t>Preguntas que ya llevan la respuesta: «¿A que es verdad?»</a:t>
-            </a:r>
-          </a:p>
-        </p:txBody>
-      </p:sp>
-      <p:sp>
-        <p:nvSpPr>
-          <p:cNvPr id="7" name="Rectangle 6"/>
-          <p:cNvSpPr/>
-          <p:nvPr/>
-        </p:nvSpPr>
-        <p:spPr>
-          <a:xfrm>
-            <a:off x="6246000" y="1650000"/>
-            <a:ext cx="5306000" cy="4400000"/>
-          </a:xfrm>
-          <a:prstGeom prst="rect">
-            <a:avLst/>
-          </a:prstGeom>
-          <a:solidFill>
-            <a:srgbClr val="EAF0F7"/>
-          </a:solidFill>
-          <a:ln>
-            <a:noFill/>
-          </a:ln>
-        </p:spPr>
-        <p:style>
-          <a:lnRef idx="1">
-            <a:schemeClr val="accent1"/>
-          </a:lnRef>
-          <a:fillRef idx="3">
-            <a:schemeClr val="accent1"/>
-          </a:fillRef>
-          <a:effectRef idx="2">
-            <a:schemeClr val="accent1"/>
-          </a:effectRef>
-          <a:fontRef idx="minor">
-            <a:schemeClr val="lt1"/>
-          </a:fontRef>
-        </p:style>
-        <p:txBody>
-          <a:bodyPr rtlCol="0" anchor="ctr"/>
-          <a:lstStyle/>
-          <a:p>
-            <a:pPr algn="ctr"/>
-          </a:p>
-        </p:txBody>
-      </p:sp>
-      <p:sp>
-        <p:nvSpPr>
-          <p:cNvPr id="8" name="TextBox 7"/>
-          <p:cNvSpPr txBox="1"/>
-          <p:nvPr/>
-        </p:nvSpPr>
-        <p:spPr>
-          <a:xfrm>
-            <a:off x="6446000" y="1750000"/>
-            <a:ext cx="4906000" cy="600000"/>
-          </a:xfrm>
-          <a:prstGeom prst="rect">
-            <a:avLst/>
-          </a:prstGeom>
-          <a:noFill/>
-        </p:spPr>
-        <p:txBody>
-          <a:bodyPr wrap="square">
-            <a:spAutoFit/>
-          </a:bodyPr>
-          <a:lstStyle/>
-          <a:p>
-            <a:pPr>
-              <a:spcAft>
-                <a:spcPts val="1260"/>
-              </a:spcAft>
-            </a:pPr>
-            <a:r>
-              <a:rPr sz="2800" b="1">
-                <a:solidFill>
-                  <a:srgbClr val="2F6FB5"/>
-                </a:solidFill>
-                <a:latin typeface="Nunito Sans"/>
-              </a:rPr>
-              <a:t>Bien</a:t>
-            </a:r>
-          </a:p>
-        </p:txBody>
-      </p:sp>
-      <p:sp>
-        <p:nvSpPr>
-          <p:cNvPr id="9" name="TextBox 8"/>
-          <p:cNvSpPr txBox="1"/>
-          <p:nvPr/>
-        </p:nvSpPr>
-        <p:spPr>
-          <a:xfrm>
-            <a:off x="6446000" y="2400000"/>
-            <a:ext cx="4906000" cy="3500000"/>
-          </a:xfrm>
-          <a:prstGeom prst="rect">
-            <a:avLst/>
-          </a:prstGeom>
-          <a:noFill/>
-        </p:spPr>
-        <p:txBody>
-          <a:bodyPr wrap="square">
-            <a:spAutoFit/>
-          </a:bodyPr>
-          <a:lstStyle/>
-          <a:p>
-            <a:pPr>
-              <a:spcAft>
-                <a:spcPts val="1170"/>
-              </a:spcAft>
-            </a:pPr>
-            <a:r>
-              <a:rPr sz="2600" b="1">
-                <a:solidFill>
-                  <a:srgbClr val="E8793A"/>
-                </a:solidFill>
-                <a:latin typeface="Nunito Sans"/>
-              </a:rPr>
-              <a:t>• </a:t>
-            </a:r>
-            <a:r>
-              <a:rPr sz="2600" b="0">
-                <a:solidFill>
-                  <a:srgbClr val="1F2A44"/>
-                </a:solidFill>
-                <a:latin typeface="Nunito Sans"/>
-              </a:rPr>
-              <a:t>Preguntar para entender</a:t>
-            </a:r>
-          </a:p>
-          <a:p>
-            <a:pPr>
-              <a:spcAft>
-                <a:spcPts val="1170"/>
-              </a:spcAft>
-            </a:pPr>
-            <a:r>
-              <a:rPr sz="2600" b="1">
-                <a:solidFill>
-                  <a:srgbClr val="E8793A"/>
-                </a:solidFill>
-                <a:latin typeface="Nunito Sans"/>
-              </a:rPr>
-              <a:t>• </a:t>
-            </a:r>
-            <a:r>
-              <a:rPr sz="2600" b="0">
-                <a:solidFill>
-                  <a:srgbClr val="1F2A44"/>
-                </a:solidFill>
-                <a:latin typeface="Nunito Sans"/>
-              </a:rPr>
-              <a:t>Escuchar la respuesta</a:t>
-            </a:r>
-          </a:p>
-          <a:p>
-            <a:pPr>
-              <a:spcAft>
-                <a:spcPts val="1170"/>
-              </a:spcAft>
-            </a:pPr>
-            <a:r>
-              <a:rPr sz="2600" b="1">
-                <a:solidFill>
-                  <a:srgbClr val="E8793A"/>
-                </a:solidFill>
-                <a:latin typeface="Nunito Sans"/>
-              </a:rPr>
-              <a:t>• </a:t>
-            </a:r>
-            <a:r>
-              <a:rPr sz="2600" b="0">
-                <a:solidFill>
-                  <a:srgbClr val="1F2A44"/>
-                </a:solidFill>
-                <a:latin typeface="Nunito Sans"/>
-              </a:rPr>
-              <a:t>Preguntas limpias: «¿Cómo lo sabes?»</a:t>
-            </a:r>
-          </a:p>
-        </p:txBody>
-      </p:sp>
-    </p:spTree>
-  </p:cSld>
-  <p:clrMapOvr>
-    <a:masterClrMapping/>
-  </p:clrMapOvr>
-</p:sld>
-</file>
-
-<file path=ppt/slides/slide16.xml><?xml version="1.0" encoding="utf-8"?>
-<p:sld xmlns:a="http://schemas.openxmlformats.org/drawingml/2006/main" xmlns:p="http://schemas.openxmlformats.org/presentationml/2006/main" xmlns:r="http://schemas.openxmlformats.org/officeDocument/2006/relationships">
-  <p:cSld>
-    <p:bg>
-      <p:bgPr>
-        <a:solidFill>
-          <a:srgbClr val="FBF7EF"/>
-        </a:solidFill>
-        <a:effectLst/>
-      </p:bgPr>
-    </p:bg>
-    <p:spTree>
-      <p:nvGrpSpPr>
-        <p:cNvPr id="1" name=""/>
-        <p:cNvGrpSpPr/>
-        <p:nvPr/>
-      </p:nvGrpSpPr>
-      <p:grpSpPr/>
-      <p:sp>
-        <p:nvSpPr>
-          <p:cNvPr id="2" name="TextBox 1"/>
-          <p:cNvSpPr txBox="1"/>
-          <p:nvPr/>
-        </p:nvSpPr>
-        <p:spPr>
-          <a:xfrm>
-            <a:off x="640000" y="380000"/>
-            <a:ext cx="10912000" cy="420000"/>
-          </a:xfrm>
-          <a:prstGeom prst="rect">
-            <a:avLst/>
-          </a:prstGeom>
-          <a:noFill/>
-        </p:spPr>
-        <p:txBody>
-          <a:bodyPr wrap="square">
-            <a:spAutoFit/>
-          </a:bodyPr>
-          <a:lstStyle/>
-          <a:p>
-            <a:pPr>
-              <a:spcAft>
-                <a:spcPts val="630"/>
-              </a:spcAft>
-            </a:pPr>
-            <a:r>
-              <a:rPr sz="1400" b="1">
-                <a:solidFill>
-                  <a:srgbClr val="E8793A"/>
-                </a:solidFill>
-                <a:latin typeface="Nunito Sans"/>
-              </a:rPr>
-              <a:t>LO DE HOY EN TRES LÍNEAS</a:t>
-            </a:r>
-          </a:p>
-        </p:txBody>
-      </p:sp>
-      <p:sp>
-        <p:nvSpPr>
-          <p:cNvPr id="3" name="TextBox 2"/>
-          <p:cNvSpPr txBox="1"/>
-          <p:nvPr/>
-        </p:nvSpPr>
-        <p:spPr>
-          <a:xfrm>
-            <a:off x="640000" y="760000"/>
-            <a:ext cx="10912000" cy="800000"/>
-          </a:xfrm>
-          <a:prstGeom prst="rect">
-            <a:avLst/>
-          </a:prstGeom>
-          <a:noFill/>
-        </p:spPr>
-        <p:txBody>
-          <a:bodyPr wrap="square">
-            <a:spAutoFit/>
-          </a:bodyPr>
-          <a:lstStyle/>
-          <a:p>
-            <a:pPr>
-              <a:spcAft>
-                <a:spcPts val="1710"/>
-              </a:spcAft>
-            </a:pPr>
-            <a:r>
-              <a:rPr sz="3800" b="1">
-                <a:solidFill>
-                  <a:srgbClr val="1F2A44"/>
-                </a:solidFill>
-                <a:latin typeface="Fredoka"/>
-              </a:rPr>
-              <a:t>Escríbelo tú primero, sin mirar</a:t>
-            </a:r>
-          </a:p>
-        </p:txBody>
-      </p:sp>
-      <p:sp>
-        <p:nvSpPr>
-          <p:cNvPr id="4" name="TextBox 3"/>
-          <p:cNvSpPr txBox="1"/>
-          <p:nvPr/>
-        </p:nvSpPr>
-        <p:spPr>
-          <a:xfrm>
-            <a:off x="640000" y="1800000"/>
-            <a:ext cx="10912000" cy="1500000"/>
-          </a:xfrm>
-          <a:prstGeom prst="rect">
-            <a:avLst/>
-          </a:prstGeom>
-          <a:noFill/>
-        </p:spPr>
-        <p:txBody>
-          <a:bodyPr wrap="square">
-            <a:spAutoFit/>
-          </a:bodyPr>
-          <a:lstStyle/>
-          <a:p>
-            <a:pPr>
-              <a:spcAft>
-                <a:spcPts val="1170"/>
-              </a:spcAft>
-            </a:pPr>
-            <a:r>
-              <a:rPr sz="2600" b="0">
-                <a:solidFill>
-                  <a:srgbClr val="4A5568"/>
-                </a:solidFill>
-                <a:latin typeface="Nunito Sans"/>
-              </a:rPr>
-              <a:t>Dos minutos. Después lo comparamos.</a:t>
-            </a:r>
-          </a:p>
-        </p:txBody>
-      </p:sp>
-    </p:spTree>
-  </p:cSld>
-  <p:clrMapOvr>
-    <a:masterClrMapping/>
-  </p:clrMapOvr>
-</p:sld>
-</file>
-
-<file path=ppt/slides/slide17.xml><?xml version="1.0" encoding="utf-8"?>
-<p:sld xmlns:a="http://schemas.openxmlformats.org/drawingml/2006/main" xmlns:p="http://schemas.openxmlformats.org/presentationml/2006/main" xmlns:r="http://schemas.openxmlformats.org/officeDocument/2006/relationships">
-  <p:cSld>
-    <p:bg>
-      <p:bgPr>
-        <a:solidFill>
-          <a:srgbClr val="FBF7EF"/>
-        </a:solidFill>
-        <a:effectLst/>
-      </p:bgPr>
-    </p:bg>
-    <p:spTree>
-      <p:nvGrpSpPr>
-        <p:cNvPr id="1" name=""/>
-        <p:cNvGrpSpPr/>
-        <p:nvPr/>
-      </p:nvGrpSpPr>
-      <p:grpSpPr/>
-      <p:sp>
-        <p:nvSpPr>
-          <p:cNvPr id="2" name="TextBox 1"/>
-          <p:cNvSpPr txBox="1"/>
-          <p:nvPr/>
-        </p:nvSpPr>
-        <p:spPr>
-          <a:xfrm>
-            <a:off x="640000" y="380000"/>
-            <a:ext cx="10912000" cy="420000"/>
-          </a:xfrm>
-          <a:prstGeom prst="rect">
-            <a:avLst/>
-          </a:prstGeom>
-          <a:noFill/>
-        </p:spPr>
-        <p:txBody>
-          <a:bodyPr wrap="square">
-            <a:spAutoFit/>
-          </a:bodyPr>
-          <a:lstStyle/>
-          <a:p>
-            <a:pPr>
-              <a:spcAft>
-                <a:spcPts val="630"/>
-              </a:spcAft>
-            </a:pPr>
-            <a:r>
-              <a:rPr sz="1400" b="1">
-                <a:solidFill>
-                  <a:srgbClr val="E8793A"/>
-                </a:solidFill>
-                <a:latin typeface="Nunito Sans"/>
-              </a:rPr>
-              <a:t>LO DE HOY EN TRES LÍNEAS</a:t>
-            </a:r>
-          </a:p>
-        </p:txBody>
-      </p:sp>
-      <p:sp>
-        <p:nvSpPr>
-          <p:cNvPr id="3" name="TextBox 2"/>
-          <p:cNvSpPr txBox="1"/>
-          <p:nvPr/>
-        </p:nvSpPr>
-        <p:spPr>
-          <a:xfrm>
-            <a:off x="640000" y="1300000"/>
-            <a:ext cx="10912000" cy="4800000"/>
-          </a:xfrm>
-          <a:prstGeom prst="rect">
-            <a:avLst/>
-          </a:prstGeom>
-          <a:noFill/>
-        </p:spPr>
-        <p:txBody>
-          <a:bodyPr wrap="square">
-            <a:spAutoFit/>
-          </a:bodyPr>
-          <a:lstStyle/>
-          <a:p>
-            <a:pPr>
-              <a:spcAft>
-                <a:spcPts val="1350"/>
-              </a:spcAft>
-            </a:pPr>
-            <a:r>
-              <a:rPr sz="3000" b="1">
-                <a:solidFill>
-                  <a:srgbClr val="E8793A"/>
-                </a:solidFill>
-                <a:latin typeface="Nunito Sans"/>
-              </a:rPr>
-              <a:t>1. </a:t>
-            </a:r>
-            <a:r>
-              <a:rPr sz="3000" b="0">
-                <a:solidFill>
-                  <a:srgbClr val="1F2A44"/>
-                </a:solidFill>
-                <a:latin typeface="Nunito Sans"/>
-              </a:rPr>
-              <a:t>Una pregunta cerrada se contesta con sí, no o un dato corto.</a:t>
-            </a:r>
-          </a:p>
-          <a:p>
-            <a:pPr>
-              <a:spcAft>
-                <a:spcPts val="1350"/>
-              </a:spcAft>
-            </a:pPr>
-            <a:r>
-              <a:rPr sz="3000" b="1">
-                <a:solidFill>
-                  <a:srgbClr val="E8793A"/>
-                </a:solidFill>
-                <a:latin typeface="Nunito Sans"/>
-              </a:rPr>
-              <a:t>2. </a:t>
-            </a:r>
-            <a:r>
-              <a:rPr sz="3000" b="0">
-                <a:solidFill>
-                  <a:srgbClr val="1F2A44"/>
-                </a:solidFill>
-                <a:latin typeface="Nunito Sans"/>
-              </a:rPr>
-              <a:t>Una pregunta abierta pide explicar, contar o dar razones.</a:t>
-            </a:r>
-          </a:p>
-          <a:p>
-            <a:pPr>
-              <a:spcAft>
-                <a:spcPts val="1350"/>
-              </a:spcAft>
-            </a:pPr>
-            <a:r>
-              <a:rPr sz="3000" b="1">
-                <a:solidFill>
-                  <a:srgbClr val="E8793A"/>
-                </a:solidFill>
-                <a:latin typeface="Nunito Sans"/>
-              </a:rPr>
-              <a:t>3. </a:t>
-            </a:r>
-            <a:r>
-              <a:rPr sz="3000" b="0">
-                <a:solidFill>
-                  <a:srgbClr val="1F2A44"/>
-                </a:solidFill>
-                <a:latin typeface="Nunito Sans"/>
-              </a:rPr>
-              <a:t>«¿Cómo lo sabes?» pide la fuente y las razones. Antes de contestar, mira qué da por hecho la pregunta.</a:t>
-            </a:r>
-          </a:p>
-        </p:txBody>
-      </p:sp>
-    </p:spTree>
-  </p:cSld>
-  <p:clrMapOvr>
-    <a:masterClrMapping/>
-  </p:clrMapOvr>
-</p:sld>
-</file>
-
-<file path=ppt/slides/slide18.xml><?xml version="1.0" encoding="utf-8"?>
-<p:sld xmlns:a="http://schemas.openxmlformats.org/drawingml/2006/main" xmlns:p="http://schemas.openxmlformats.org/presentationml/2006/main" xmlns:r="http://schemas.openxmlformats.org/officeDocument/2006/relationships">
-  <p:cSld>
-    <p:bg>
-      <p:bgPr>
-        <a:solidFill>
-          <a:srgbClr val="1F2A44"/>
-        </a:solidFill>
-        <a:effectLst/>
-      </p:bgPr>
-    </p:bg>
-    <p:spTree>
-      <p:nvGrpSpPr>
-        <p:cNvPr id="1" name=""/>
-        <p:cNvGrpSpPr/>
-        <p:nvPr/>
-      </p:nvGrpSpPr>
-      <p:grpSpPr/>
-      <p:sp>
-        <p:nvSpPr>
-          <p:cNvPr id="2" name="TextBox 1"/>
-          <p:cNvSpPr txBox="1"/>
-          <p:nvPr/>
-        </p:nvSpPr>
-        <p:spPr>
-          <a:xfrm>
-            <a:off x="640000" y="380000"/>
-            <a:ext cx="10912000" cy="420000"/>
-          </a:xfrm>
-          <a:prstGeom prst="rect">
-            <a:avLst/>
-          </a:prstGeom>
-          <a:noFill/>
-        </p:spPr>
-        <p:txBody>
-          <a:bodyPr wrap="square">
-            <a:spAutoFit/>
-          </a:bodyPr>
-          <a:lstStyle/>
-          <a:p>
-            <a:pPr>
-              <a:spcAft>
-                <a:spcPts val="630"/>
-              </a:spcAft>
-            </a:pPr>
-            <a:r>
-              <a:rPr sz="1400" b="1">
-                <a:solidFill>
-                  <a:srgbClr val="F4B183"/>
-                </a:solidFill>
-                <a:latin typeface="Nunito Sans"/>
-              </a:rPr>
-              <a:t>VÍDEO</a:t>
-            </a:r>
-          </a:p>
-        </p:txBody>
-      </p:sp>
-      <p:sp>
-        <p:nvSpPr>
-          <p:cNvPr id="3" name="TextBox 2"/>
-          <p:cNvSpPr txBox="1"/>
-          <p:nvPr/>
-        </p:nvSpPr>
-        <p:spPr>
-          <a:xfrm>
-            <a:off x="640000" y="760000"/>
-            <a:ext cx="10912000" cy="800000"/>
-          </a:xfrm>
-          <a:prstGeom prst="rect">
-            <a:avLst/>
-          </a:prstGeom>
-          <a:noFill/>
-        </p:spPr>
-        <p:txBody>
-          <a:bodyPr wrap="square">
-            <a:spAutoFit/>
-          </a:bodyPr>
-          <a:lstStyle/>
-          <a:p>
-            <a:pPr>
-              <a:spcAft>
-                <a:spcPts val="1620"/>
-              </a:spcAft>
-            </a:pPr>
-            <a:r>
-              <a:rPr sz="3600" b="1">
-                <a:solidFill>
-                  <a:srgbClr val="FBF7EF"/>
-                </a:solidFill>
-                <a:latin typeface="Fredoka"/>
-              </a:rPr>
-              <a:t>Preguntas abiertas y preguntas cerradas</a:t>
-            </a:r>
-          </a:p>
-        </p:txBody>
-      </p:sp>
-      <p:sp>
-        <p:nvSpPr>
-          <p:cNvPr id="4" name="TextBox 3"/>
-          <p:cNvSpPr txBox="1"/>
-          <p:nvPr/>
-        </p:nvSpPr>
-        <p:spPr>
-          <a:xfrm>
-            <a:off x="640000" y="2200000"/>
-            <a:ext cx="10912000" cy="2000000"/>
-          </a:xfrm>
-          <a:prstGeom prst="rect">
-            <a:avLst/>
-          </a:prstGeom>
-          <a:noFill/>
-        </p:spPr>
-        <p:txBody>
-          <a:bodyPr wrap="square">
-            <a:spAutoFit/>
-          </a:bodyPr>
-          <a:lstStyle/>
-          <a:p>
-            <a:pPr>
-              <a:spcAft>
-                <a:spcPts val="1080"/>
-              </a:spcAft>
-            </a:pPr>
-            <a:r>
-              <a:rPr sz="2400" b="0">
-                <a:solidFill>
-                  <a:srgbClr val="C9D3E6"/>
-                </a:solidFill>
-                <a:latin typeface="Nunito Sans"/>
-              </a:rPr>
-              <a:t>Ver más ejemplos de cómo una pregunta abierta consigue más información que una cerrada.</a:t>
-            </a:r>
-          </a:p>
-        </p:txBody>
-      </p:sp>
-    </p:spTree>
-  </p:cSld>
-  <p:clrMapOvr>
-    <a:masterClrMapping/>
-  </p:clrMapOvr>
-</p:sld>
-</file>
-
-<file path=ppt/slides/slide19.xml><?xml version="1.0" encoding="utf-8"?>
-<p:sld xmlns:a="http://schemas.openxmlformats.org/drawingml/2006/main" xmlns:p="http://schemas.openxmlformats.org/presentationml/2006/main" xmlns:r="http://schemas.openxmlformats.org/officeDocument/2006/relationships">
-  <p:cSld>
-    <p:bg>
-      <p:bgPr>
-        <a:solidFill>
-          <a:srgbClr val="1F2A44"/>
-        </a:solidFill>
-        <a:effectLst/>
-      </p:bgPr>
-    </p:bg>
-    <p:spTree>
-      <p:nvGrpSpPr>
-        <p:cNvPr id="1" name=""/>
-        <p:cNvGrpSpPr/>
-        <p:nvPr/>
-      </p:nvGrpSpPr>
-      <p:grpSpPr/>
-      <p:sp>
-        <p:nvSpPr>
-          <p:cNvPr id="2" name="TextBox 1"/>
-          <p:cNvSpPr txBox="1"/>
-          <p:nvPr/>
-        </p:nvSpPr>
-        <p:spPr>
-          <a:xfrm>
-            <a:off x="640000" y="380000"/>
-            <a:ext cx="10912000" cy="420000"/>
-          </a:xfrm>
-          <a:prstGeom prst="rect">
-            <a:avLst/>
-          </a:prstGeom>
-          <a:noFill/>
-        </p:spPr>
-        <p:txBody>
-          <a:bodyPr wrap="square">
-            <a:spAutoFit/>
-          </a:bodyPr>
-          <a:lstStyle/>
-          <a:p>
-            <a:pPr>
-              <a:spcAft>
-                <a:spcPts val="630"/>
-              </a:spcAft>
-            </a:pPr>
-            <a:r>
-              <a:rPr sz="1400" b="1">
-                <a:solidFill>
-                  <a:srgbClr val="F4B183"/>
-                </a:solidFill>
-                <a:latin typeface="Nunito Sans"/>
-              </a:rPr>
-              <a:t>AHORA, LA HOJA DEL DÍA</a:t>
-            </a:r>
-          </a:p>
-        </p:txBody>
-      </p:sp>
-      <p:sp>
-        <p:nvSpPr>
-          <p:cNvPr id="3" name="TextBox 2"/>
-          <p:cNvSpPr txBox="1"/>
-          <p:nvPr/>
-        </p:nvSpPr>
-        <p:spPr>
-          <a:xfrm>
-            <a:off x="640000" y="760000"/>
-            <a:ext cx="10912000" cy="800000"/>
-          </a:xfrm>
-          <a:prstGeom prst="rect">
-            <a:avLst/>
-          </a:prstGeom>
-          <a:noFill/>
-        </p:spPr>
-        <p:txBody>
-          <a:bodyPr wrap="square">
-            <a:spAutoFit/>
-          </a:bodyPr>
-          <a:lstStyle/>
-          <a:p>
-            <a:pPr>
-              <a:spcAft>
-                <a:spcPts val="1710"/>
-              </a:spcAft>
-            </a:pPr>
-            <a:r>
-              <a:rPr sz="3800" b="1">
-                <a:solidFill>
-                  <a:srgbClr val="FBF7EF"/>
-                </a:solidFill>
-                <a:latin typeface="Fredoka"/>
-              </a:rPr>
-              <a:t>20 minutos · individual · en silencio</a:t>
-            </a:r>
-          </a:p>
-        </p:txBody>
-      </p:sp>
-      <p:sp>
-        <p:nvSpPr>
-          <p:cNvPr id="4" name="Rectangle 3"/>
-          <p:cNvSpPr/>
-          <p:nvPr/>
-        </p:nvSpPr>
-        <p:spPr>
-          <a:xfrm>
-            <a:off x="640000" y="2000000"/>
-            <a:ext cx="3504000" cy="1800000"/>
-          </a:xfrm>
-          <a:prstGeom prst="rect">
-            <a:avLst/>
-          </a:prstGeom>
-          <a:solidFill>
-            <a:srgbClr val="FBF7EF"/>
-          </a:solidFill>
-          <a:ln>
-            <a:noFill/>
-          </a:ln>
-        </p:spPr>
-        <p:style>
-          <a:lnRef idx="1">
-            <a:schemeClr val="accent1"/>
-          </a:lnRef>
-          <a:fillRef idx="3">
-            <a:schemeClr val="accent1"/>
-          </a:fillRef>
-          <a:effectRef idx="2">
-            <a:schemeClr val="accent1"/>
-          </a:effectRef>
-          <a:fontRef idx="minor">
-            <a:schemeClr val="lt1"/>
-          </a:fontRef>
-        </p:style>
-        <p:txBody>
-          <a:bodyPr rtlCol="0" anchor="ctr"/>
-          <a:lstStyle/>
-          <a:p>
-            <a:pPr algn="ctr"/>
-          </a:p>
-        </p:txBody>
-      </p:sp>
-      <p:sp>
-        <p:nvSpPr>
-          <p:cNvPr id="5" name="TextBox 4"/>
-          <p:cNvSpPr txBox="1"/>
-          <p:nvPr/>
-        </p:nvSpPr>
-        <p:spPr>
-          <a:xfrm>
-            <a:off x="790000" y="2100000"/>
-            <a:ext cx="3204000" cy="700000"/>
-          </a:xfrm>
-          <a:prstGeom prst="rect">
-            <a:avLst/>
-          </a:prstGeom>
-          <a:noFill/>
-        </p:spPr>
-        <p:txBody>
-          <a:bodyPr wrap="square">
-            <a:spAutoFit/>
-          </a:bodyPr>
-          <a:lstStyle/>
-          <a:p>
-            <a:pPr>
-              <a:spcAft>
-                <a:spcPts val="990"/>
-              </a:spcAft>
-            </a:pPr>
-            <a:r>
-              <a:rPr sz="2200" b="1">
-                <a:solidFill>
-                  <a:srgbClr val="E8793A"/>
-                </a:solidFill>
-                <a:latin typeface="Nunito Sans"/>
-              </a:rPr>
-              <a:t>Peldaño 1 · Todos</a:t>
-            </a:r>
-          </a:p>
-        </p:txBody>
-      </p:sp>
-      <p:sp>
-        <p:nvSpPr>
-          <p:cNvPr id="6" name="TextBox 5"/>
-          <p:cNvSpPr txBox="1"/>
-          <p:nvPr/>
-        </p:nvSpPr>
-        <p:spPr>
-          <a:xfrm>
-            <a:off x="790000" y="2900000"/>
-            <a:ext cx="3204000" cy="700000"/>
-          </a:xfrm>
-          <a:prstGeom prst="rect">
-            <a:avLst/>
-          </a:prstGeom>
-          <a:noFill/>
-        </p:spPr>
-        <p:txBody>
-          <a:bodyPr wrap="square">
-            <a:spAutoFit/>
-          </a:bodyPr>
-          <a:lstStyle/>
-          <a:p>
-            <a:pPr>
-              <a:spcAft>
-                <a:spcPts val="900"/>
-              </a:spcAft>
-            </a:pPr>
-            <a:r>
-              <a:rPr sz="2000" b="0">
-                <a:solidFill>
-                  <a:srgbClr val="4A5568"/>
-                </a:solidFill>
-                <a:latin typeface="Nunito Sans"/>
-              </a:rPr>
-              <a:t>6 puntos</a:t>
-            </a:r>
-          </a:p>
-        </p:txBody>
-      </p:sp>
-      <p:sp>
-        <p:nvSpPr>
-          <p:cNvPr id="7" name="Rectangle 6"/>
-          <p:cNvSpPr/>
-          <p:nvPr/>
-        </p:nvSpPr>
-        <p:spPr>
-          <a:xfrm>
-            <a:off x="4344000" y="2000000"/>
-            <a:ext cx="3504000" cy="1800000"/>
-          </a:xfrm>
-          <a:prstGeom prst="rect">
-            <a:avLst/>
-          </a:prstGeom>
-          <a:solidFill>
-            <a:srgbClr val="FBF7EF"/>
-          </a:solidFill>
-          <a:ln>
-            <a:noFill/>
-          </a:ln>
-        </p:spPr>
-        <p:style>
-          <a:lnRef idx="1">
-            <a:schemeClr val="accent1"/>
-          </a:lnRef>
-          <a:fillRef idx="3">
-            <a:schemeClr val="accent1"/>
-          </a:fillRef>
-          <a:effectRef idx="2">
-            <a:schemeClr val="accent1"/>
-          </a:effectRef>
-          <a:fontRef idx="minor">
-            <a:schemeClr val="lt1"/>
-          </a:fontRef>
-        </p:style>
-        <p:txBody>
-          <a:bodyPr rtlCol="0" anchor="ctr"/>
-          <a:lstStyle/>
-          <a:p>
-            <a:pPr algn="ctr"/>
-          </a:p>
-        </p:txBody>
-      </p:sp>
-      <p:sp>
-        <p:nvSpPr>
-          <p:cNvPr id="8" name="TextBox 7"/>
-          <p:cNvSpPr txBox="1"/>
-          <p:nvPr/>
-        </p:nvSpPr>
-        <p:spPr>
-          <a:xfrm>
-            <a:off x="4494000" y="2100000"/>
-            <a:ext cx="3204000" cy="700000"/>
-          </a:xfrm>
-          <a:prstGeom prst="rect">
-            <a:avLst/>
-          </a:prstGeom>
-          <a:noFill/>
-        </p:spPr>
-        <p:txBody>
-          <a:bodyPr wrap="square">
-            <a:spAutoFit/>
-          </a:bodyPr>
-          <a:lstStyle/>
-          <a:p>
-            <a:pPr>
-              <a:spcAft>
-                <a:spcPts val="990"/>
-              </a:spcAft>
-            </a:pPr>
-            <a:r>
-              <a:rPr sz="2200" b="1">
-                <a:solidFill>
-                  <a:srgbClr val="E8793A"/>
-                </a:solidFill>
-                <a:latin typeface="Nunito Sans"/>
-              </a:rPr>
-              <a:t>Peldaño 2 · Repaso</a:t>
-            </a:r>
-          </a:p>
-        </p:txBody>
-      </p:sp>
-      <p:sp>
-        <p:nvSpPr>
-          <p:cNvPr id="9" name="TextBox 8"/>
-          <p:cNvSpPr txBox="1"/>
-          <p:nvPr/>
-        </p:nvSpPr>
-        <p:spPr>
-          <a:xfrm>
-            <a:off x="4494000" y="2900000"/>
-            <a:ext cx="3204000" cy="700000"/>
-          </a:xfrm>
-          <a:prstGeom prst="rect">
-            <a:avLst/>
-          </a:prstGeom>
-          <a:noFill/>
-        </p:spPr>
-        <p:txBody>
-          <a:bodyPr wrap="square">
-            <a:spAutoFit/>
-          </a:bodyPr>
-          <a:lstStyle/>
-          <a:p>
-            <a:pPr>
-              <a:spcAft>
-                <a:spcPts val="900"/>
-              </a:spcAft>
-            </a:pPr>
-            <a:r>
-              <a:rPr sz="2000" b="0">
-                <a:solidFill>
-                  <a:srgbClr val="4A5568"/>
-                </a:solidFill>
-                <a:latin typeface="Nunito Sans"/>
-              </a:rPr>
-              <a:t>2 puntos</a:t>
-            </a:r>
-          </a:p>
-        </p:txBody>
-      </p:sp>
-      <p:sp>
-        <p:nvSpPr>
-          <p:cNvPr id="10" name="Rectangle 9"/>
-          <p:cNvSpPr/>
-          <p:nvPr/>
-        </p:nvSpPr>
-        <p:spPr>
-          <a:xfrm>
-            <a:off x="8048000" y="2000000"/>
-            <a:ext cx="3504000" cy="1800000"/>
-          </a:xfrm>
-          <a:prstGeom prst="rect">
-            <a:avLst/>
-          </a:prstGeom>
-          <a:solidFill>
-            <a:srgbClr val="FBF7EF"/>
-          </a:solidFill>
-          <a:ln>
-            <a:noFill/>
-          </a:ln>
-        </p:spPr>
-        <p:style>
-          <a:lnRef idx="1">
-            <a:schemeClr val="accent1"/>
-          </a:lnRef>
-          <a:fillRef idx="3">
-            <a:schemeClr val="accent1"/>
-          </a:fillRef>
-          <a:effectRef idx="2">
-            <a:schemeClr val="accent1"/>
-          </a:effectRef>
-          <a:fontRef idx="minor">
-            <a:schemeClr val="lt1"/>
-          </a:fontRef>
-        </p:style>
-        <p:txBody>
-          <a:bodyPr rtlCol="0" anchor="ctr"/>
-          <a:lstStyle/>
-          <a:p>
-            <a:pPr algn="ctr"/>
-          </a:p>
-        </p:txBody>
-      </p:sp>
-      <p:sp>
-        <p:nvSpPr>
-          <p:cNvPr id="11" name="TextBox 10"/>
-          <p:cNvSpPr txBox="1"/>
-          <p:nvPr/>
-        </p:nvSpPr>
-        <p:spPr>
-          <a:xfrm>
-            <a:off x="8198000" y="2100000"/>
-            <a:ext cx="3204000" cy="700000"/>
-          </a:xfrm>
-          <a:prstGeom prst="rect">
-            <a:avLst/>
-          </a:prstGeom>
-          <a:noFill/>
-        </p:spPr>
-        <p:txBody>
-          <a:bodyPr wrap="square">
-            <a:spAutoFit/>
-          </a:bodyPr>
-          <a:lstStyle/>
-          <a:p>
-            <a:pPr>
-              <a:spcAft>
-                <a:spcPts val="990"/>
-              </a:spcAft>
-            </a:pPr>
-            <a:r>
-              <a:rPr sz="2200" b="1">
-                <a:solidFill>
-                  <a:srgbClr val="E8793A"/>
-                </a:solidFill>
-                <a:latin typeface="Nunito Sans"/>
-              </a:rPr>
-              <a:t>Peldaño 3 · Reto</a:t>
-            </a:r>
-          </a:p>
-        </p:txBody>
-      </p:sp>
-      <p:sp>
-        <p:nvSpPr>
-          <p:cNvPr id="12" name="TextBox 11"/>
-          <p:cNvSpPr txBox="1"/>
-          <p:nvPr/>
-        </p:nvSpPr>
-        <p:spPr>
-          <a:xfrm>
-            <a:off x="8198000" y="2900000"/>
-            <a:ext cx="3204000" cy="700000"/>
-          </a:xfrm>
-          <a:prstGeom prst="rect">
-            <a:avLst/>
-          </a:prstGeom>
-          <a:noFill/>
-        </p:spPr>
-        <p:txBody>
-          <a:bodyPr wrap="square">
-            <a:spAutoFit/>
-          </a:bodyPr>
-          <a:lstStyle/>
-          <a:p>
-            <a:pPr>
-              <a:spcAft>
-                <a:spcPts val="900"/>
-              </a:spcAft>
-            </a:pPr>
-            <a:r>
-              <a:rPr sz="2000" b="0">
-                <a:solidFill>
-                  <a:srgbClr val="4A5568"/>
-                </a:solidFill>
-                <a:latin typeface="Nunito Sans"/>
-              </a:rPr>
-              <a:t>2 puntos</a:t>
-            </a:r>
-          </a:p>
-        </p:txBody>
-      </p:sp>
-      <p:sp>
-        <p:nvSpPr>
-          <p:cNvPr id="13" name="TextBox 12"/>
-          <p:cNvSpPr txBox="1"/>
-          <p:nvPr/>
-        </p:nvSpPr>
-        <p:spPr>
-          <a:xfrm>
-            <a:off x="640000" y="4200000"/>
-            <a:ext cx="10912000" cy="1500000"/>
-          </a:xfrm>
-          <a:prstGeom prst="rect">
-            <a:avLst/>
-          </a:prstGeom>
-          <a:noFill/>
-        </p:spPr>
-        <p:txBody>
-          <a:bodyPr wrap="square">
-            <a:spAutoFit/>
-          </a:bodyPr>
-          <a:lstStyle/>
-          <a:p>
-            <a:pPr>
-              <a:spcAft>
-                <a:spcPts val="990"/>
-              </a:spcAft>
-            </a:pPr>
-            <a:r>
-              <a:rPr sz="2200" b="0">
-                <a:solidFill>
-                  <a:srgbClr val="C9D3E6"/>
-                </a:solidFill>
-                <a:latin typeface="Nunito Sans"/>
-              </a:rPr>
-              <a:t>1.ª pasada: sin apuntes, con bolígrafo. 2.ª pasada: con los apuntes, en otro color. Marca «seguro» o «dudo» en cada respuesta.</a:t>
-            </a:r>
-          </a:p>
-        </p:txBody>
-      </p:sp>
-    </p:spTree>
-  </p:cSld>
-  <p:clrMapOvr>
-    <a:masterClrMapping/>
-  </p:clrMapOvr>
-</p:sld>
-</file>
-
-<file path=ppt/slides/slide2.xml><?xml version="1.0" encoding="utf-8"?>
-<p:sld xmlns:a="http://schemas.openxmlformats.org/drawingml/2006/main" xmlns:p="http://schemas.openxmlformats.org/presentationml/2006/main" xmlns:r="http://schemas.openxmlformats.org/officeDocument/2006/relationships">
-  <p:cSld>
-    <p:bg>
-      <p:bgPr>
-        <a:solidFill>
-          <a:srgbClr val="FBF7EF"/>
-        </a:solidFill>
-        <a:effectLst/>
-      </p:bgPr>
-    </p:bg>
-    <p:spTree>
-      <p:nvGrpSpPr>
-        <p:cNvPr id="1" name=""/>
-        <p:cNvGrpSpPr/>
-        <p:nvPr/>
-      </p:nvGrpSpPr>
-      <p:grpSpPr/>
-      <p:sp>
-        <p:nvSpPr>
-          <p:cNvPr id="2" name="TextBox 1"/>
-          <p:cNvSpPr txBox="1"/>
-          <p:nvPr/>
-        </p:nvSpPr>
-        <p:spPr>
-          <a:xfrm>
-            <a:off x="640000" y="380000"/>
-            <a:ext cx="10912000" cy="420000"/>
-          </a:xfrm>
-          <a:prstGeom prst="rect">
-            <a:avLst/>
-          </a:prstGeom>
-          <a:noFill/>
-        </p:spPr>
-        <p:txBody>
-          <a:bodyPr wrap="square">
-            <a:spAutoFit/>
-          </a:bodyPr>
-          <a:lstStyle/>
-          <a:p>
-            <a:pPr>
-              <a:spcAft>
-                <a:spcPts val="630"/>
-              </a:spcAft>
-            </a:pPr>
-            <a:r>
-              <a:rPr sz="1400" b="1">
-                <a:solidFill>
-                  <a:srgbClr val="E8793A"/>
-                </a:solidFill>
-                <a:latin typeface="Nunito Sans"/>
-              </a:rPr>
-              <a:t>ANTES DE EMPEZAR · SIN MIRAR</a:t>
-            </a:r>
-          </a:p>
-        </p:txBody>
-      </p:sp>
-      <p:sp>
-        <p:nvSpPr>
-          <p:cNvPr id="3" name="TextBox 2"/>
-          <p:cNvSpPr txBox="1"/>
-          <p:nvPr/>
-        </p:nvSpPr>
-        <p:spPr>
-          <a:xfrm>
-            <a:off x="640000" y="760000"/>
-            <a:ext cx="10912000" cy="800000"/>
-          </a:xfrm>
-          <a:prstGeom prst="rect">
-            <a:avLst/>
-          </a:prstGeom>
-          <a:noFill/>
-        </p:spPr>
-        <p:txBody>
-          <a:bodyPr wrap="square">
-            <a:spAutoFit/>
-          </a:bodyPr>
-          <a:lstStyle/>
-          <a:p>
-            <a:pPr>
-              <a:spcAft>
-                <a:spcPts val="1440"/>
-              </a:spcAft>
-            </a:pPr>
-            <a:r>
-              <a:rPr sz="3200" b="1">
-                <a:solidFill>
-                  <a:srgbClr val="1F2A44"/>
-                </a:solidFill>
-                <a:latin typeface="Fredoka"/>
-              </a:rPr>
-              <a:t>Escribe en tu hoja las palabras que faltan</a:t>
-            </a:r>
-          </a:p>
-        </p:txBody>
-      </p:sp>
-      <p:sp>
-        <p:nvSpPr>
-          <p:cNvPr id="4" name="TextBox 3"/>
-          <p:cNvSpPr txBox="1"/>
-          <p:nvPr/>
-        </p:nvSpPr>
-        <p:spPr>
-          <a:xfrm>
-            <a:off x="640000" y="1800000"/>
-            <a:ext cx="10912000" cy="4300000"/>
-          </a:xfrm>
-          <a:prstGeom prst="rect">
-            <a:avLst/>
-          </a:prstGeom>
-          <a:noFill/>
-        </p:spPr>
-        <p:txBody>
-          <a:bodyPr wrap="square">
-            <a:spAutoFit/>
-          </a:bodyPr>
-          <a:lstStyle/>
-          <a:p>
-            <a:pPr>
-              <a:spcAft>
-                <a:spcPts val="1170"/>
-              </a:spcAft>
-            </a:pPr>
-            <a:r>
-              <a:rPr sz="2600" b="1">
-                <a:solidFill>
-                  <a:srgbClr val="E8793A"/>
-                </a:solidFill>
-                <a:latin typeface="Nunito Sans"/>
-              </a:rPr>
-              <a:t>1. </a:t>
-            </a:r>
-            <a:r>
-              <a:rPr sz="2600" b="0">
-                <a:solidFill>
-                  <a:srgbClr val="1F2A44"/>
-                </a:solidFill>
-                <a:latin typeface="Nunito Sans"/>
-              </a:rPr>
-              <a:t>Me puedo sentir seguro y estar ______.  (sesión 3)</a:t>
-            </a:r>
-          </a:p>
-          <a:p>
-            <a:pPr>
-              <a:spcAft>
-                <a:spcPts val="1170"/>
-              </a:spcAft>
-            </a:pPr>
-            <a:r>
-              <a:rPr sz="2600" b="1">
-                <a:solidFill>
-                  <a:srgbClr val="E8793A"/>
-                </a:solidFill>
-                <a:latin typeface="Nunito Sans"/>
-              </a:rPr>
-              <a:t>2. </a:t>
-            </a:r>
-            <a:r>
-              <a:rPr sz="2600" b="0">
-                <a:solidFill>
-                  <a:srgbClr val="1F2A44"/>
-                </a:solidFill>
-                <a:latin typeface="Nunito Sans"/>
-              </a:rPr>
-              <a:t>Saber es creer algo que es verdad y tener buenas ______.  (sesión 3)</a:t>
-            </a:r>
-          </a:p>
-          <a:p>
-            <a:pPr>
-              <a:spcAft>
-                <a:spcPts val="1170"/>
-              </a:spcAft>
-            </a:pPr>
-            <a:r>
-              <a:rPr sz="2600" b="1">
-                <a:solidFill>
-                  <a:srgbClr val="E8793A"/>
-                </a:solidFill>
-                <a:latin typeface="Nunito Sans"/>
-              </a:rPr>
-              <a:t>3. </a:t>
-            </a:r>
-            <a:r>
-              <a:rPr sz="2600" b="0">
-                <a:solidFill>
-                  <a:srgbClr val="1F2A44"/>
-                </a:solidFill>
-                <a:latin typeface="Nunito Sans"/>
-              </a:rPr>
-              <a:t>Los gustos no se discuten; las ______, sí.  (sesión 2)</a:t>
-            </a:r>
-          </a:p>
-        </p:txBody>
-      </p:sp>
-    </p:spTree>
-  </p:cSld>
-  <p:clrMapOvr>
-    <a:masterClrMapping/>
-  </p:clrMapOvr>
-</p:sld>
-</file>
-
-<file path=ppt/slides/slide3.xml><?xml version="1.0" encoding="utf-8"?>
-<p:sld xmlns:a="http://schemas.openxmlformats.org/drawingml/2006/main" xmlns:p="http://schemas.openxmlformats.org/presentationml/2006/main" xmlns:r="http://schemas.openxmlformats.org/officeDocument/2006/relationships">
-  <p:cSld>
-    <p:bg>
-      <p:bgPr>
-        <a:solidFill>
-          <a:srgbClr val="FBF7EF"/>
-        </a:solidFill>
-        <a:effectLst/>
-      </p:bgPr>
-    </p:bg>
-    <p:spTree>
-      <p:nvGrpSpPr>
-        <p:cNvPr id="1" name=""/>
-        <p:cNvGrpSpPr/>
-        <p:nvPr/>
-      </p:nvGrpSpPr>
-      <p:grpSpPr/>
-      <p:sp>
-        <p:nvSpPr>
-          <p:cNvPr id="2" name="TextBox 1"/>
-          <p:cNvSpPr txBox="1"/>
-          <p:nvPr/>
-        </p:nvSpPr>
-        <p:spPr>
-          <a:xfrm>
-            <a:off x="640000" y="380000"/>
-            <a:ext cx="10912000" cy="420000"/>
-          </a:xfrm>
-          <a:prstGeom prst="rect">
-            <a:avLst/>
-          </a:prstGeom>
-          <a:noFill/>
-        </p:spPr>
-        <p:txBody>
-          <a:bodyPr wrap="square">
-            <a:spAutoFit/>
-          </a:bodyPr>
-          <a:lstStyle/>
-          <a:p>
-            <a:pPr>
-              <a:spcAft>
-                <a:spcPts val="630"/>
-              </a:spcAft>
-            </a:pPr>
-            <a:r>
-              <a:rPr sz="1400" b="1">
-                <a:solidFill>
-                  <a:srgbClr val="E8793A"/>
-                </a:solidFill>
-                <a:latin typeface="Nunito Sans"/>
-              </a:rPr>
-              <a:t>ANTES DE EMPEZAR · SIN MIRAR</a:t>
-            </a:r>
-          </a:p>
-        </p:txBody>
-      </p:sp>
-      <p:sp>
-        <p:nvSpPr>
-          <p:cNvPr id="3" name="TextBox 2"/>
-          <p:cNvSpPr txBox="1"/>
-          <p:nvPr/>
-        </p:nvSpPr>
-        <p:spPr>
-          <a:xfrm>
-            <a:off x="640000" y="760000"/>
-            <a:ext cx="10912000" cy="800000"/>
-          </a:xfrm>
-          <a:prstGeom prst="rect">
-            <a:avLst/>
-          </a:prstGeom>
-          <a:noFill/>
-        </p:spPr>
-        <p:txBody>
-          <a:bodyPr wrap="square">
-            <a:spAutoFit/>
-          </a:bodyPr>
-          <a:lstStyle/>
-          <a:p>
-            <a:pPr>
-              <a:spcAft>
-                <a:spcPts val="1440"/>
-              </a:spcAft>
-            </a:pPr>
-            <a:r>
-              <a:rPr sz="3200" b="1">
-                <a:solidFill>
-                  <a:srgbClr val="1F2A44"/>
-                </a:solidFill>
-                <a:latin typeface="Fredoka"/>
-              </a:rPr>
-              <a:t>Corrige con otro color</a:t>
-            </a:r>
-          </a:p>
-        </p:txBody>
-      </p:sp>
-      <p:sp>
-        <p:nvSpPr>
-          <p:cNvPr id="4" name="TextBox 3"/>
-          <p:cNvSpPr txBox="1"/>
-          <p:nvPr/>
-        </p:nvSpPr>
-        <p:spPr>
-          <a:xfrm>
-            <a:off x="640000" y="1800000"/>
-            <a:ext cx="10912000" cy="4300000"/>
-          </a:xfrm>
-          <a:prstGeom prst="rect">
-            <a:avLst/>
-          </a:prstGeom>
-          <a:noFill/>
-        </p:spPr>
-        <p:txBody>
-          <a:bodyPr wrap="square">
-            <a:spAutoFit/>
-          </a:bodyPr>
-          <a:lstStyle/>
-          <a:p>
-            <a:pPr>
-              <a:spcAft>
-                <a:spcPts val="1170"/>
-              </a:spcAft>
-            </a:pPr>
-            <a:r>
-              <a:rPr sz="2600" b="1">
-                <a:solidFill>
-                  <a:srgbClr val="E8793A"/>
-                </a:solidFill>
-                <a:latin typeface="Nunito Sans"/>
-              </a:rPr>
-              <a:t>1. </a:t>
-            </a:r>
-            <a:r>
-              <a:rPr sz="2600" b="0">
-                <a:solidFill>
-                  <a:srgbClr val="1F2A44"/>
-                </a:solidFill>
-                <a:latin typeface="Nunito Sans"/>
-              </a:rPr>
-              <a:t>Me puedo sentir seguro y estar </a:t>
-            </a:r>
-            <a:r>
-              <a:rPr sz="2600" b="1">
-                <a:solidFill>
-                  <a:srgbClr val="1F2A44"/>
-                </a:solidFill>
-                <a:latin typeface="Nunito Sans"/>
-              </a:rPr>
-              <a:t>equivocado</a:t>
-            </a:r>
-            <a:r>
-              <a:rPr sz="2600" b="0">
-                <a:solidFill>
-                  <a:srgbClr val="1F2A44"/>
-                </a:solidFill>
-                <a:latin typeface="Nunito Sans"/>
-              </a:rPr>
-              <a:t>.  (sesión 3)</a:t>
-            </a:r>
-          </a:p>
-          <a:p>
-            <a:pPr>
-              <a:spcAft>
-                <a:spcPts val="1170"/>
-              </a:spcAft>
-            </a:pPr>
-            <a:r>
-              <a:rPr sz="2600" b="1">
-                <a:solidFill>
-                  <a:srgbClr val="E8793A"/>
-                </a:solidFill>
-                <a:latin typeface="Nunito Sans"/>
-              </a:rPr>
-              <a:t>2. </a:t>
-            </a:r>
-            <a:r>
-              <a:rPr sz="2600" b="0">
-                <a:solidFill>
-                  <a:srgbClr val="1F2A44"/>
-                </a:solidFill>
-                <a:latin typeface="Nunito Sans"/>
-              </a:rPr>
-              <a:t>Saber es creer algo que es verdad y tener buenas </a:t>
-            </a:r>
-            <a:r>
-              <a:rPr sz="2600" b="1">
-                <a:solidFill>
-                  <a:srgbClr val="1F2A44"/>
-                </a:solidFill>
-                <a:latin typeface="Nunito Sans"/>
-              </a:rPr>
-              <a:t>razones</a:t>
-            </a:r>
-            <a:r>
-              <a:rPr sz="2600" b="0">
-                <a:solidFill>
-                  <a:srgbClr val="1F2A44"/>
-                </a:solidFill>
-                <a:latin typeface="Nunito Sans"/>
-              </a:rPr>
-              <a:t>.  (sesión 3)</a:t>
-            </a:r>
-          </a:p>
-          <a:p>
-            <a:pPr>
-              <a:spcAft>
-                <a:spcPts val="1170"/>
-              </a:spcAft>
-            </a:pPr>
-            <a:r>
-              <a:rPr sz="2600" b="1">
-                <a:solidFill>
-                  <a:srgbClr val="E8793A"/>
-                </a:solidFill>
-                <a:latin typeface="Nunito Sans"/>
-              </a:rPr>
-              <a:t>3. </a:t>
-            </a:r>
-            <a:r>
-              <a:rPr sz="2600" b="0">
-                <a:solidFill>
-                  <a:srgbClr val="1F2A44"/>
-                </a:solidFill>
-                <a:latin typeface="Nunito Sans"/>
-              </a:rPr>
-              <a:t>Los gustos no se discuten; las </a:t>
-            </a:r>
-            <a:r>
-              <a:rPr sz="2600" b="1">
-                <a:solidFill>
-                  <a:srgbClr val="1F2A44"/>
-                </a:solidFill>
-                <a:latin typeface="Nunito Sans"/>
-              </a:rPr>
-              <a:t>opiniones</a:t>
-            </a:r>
-            <a:r>
-              <a:rPr sz="2600" b="0">
-                <a:solidFill>
-                  <a:srgbClr val="1F2A44"/>
-                </a:solidFill>
-                <a:latin typeface="Nunito Sans"/>
-              </a:rPr>
-              <a:t>, sí.  (sesión 2)</a:t>
-            </a:r>
-          </a:p>
-        </p:txBody>
-      </p:sp>
-    </p:spTree>
-  </p:cSld>
-  <p:clrMapOvr>
-    <a:masterClrMapping/>
-  </p:clrMapOvr>
-</p:sld>
-</file>
-
-<file path=ppt/slides/slide4.xml><?xml version="1.0" encoding="utf-8"?>
-<p:sld xmlns:a="http://schemas.openxmlformats.org/drawingml/2006/main" xmlns:p="http://schemas.openxmlformats.org/presentationml/2006/main" xmlns:r="http://schemas.openxmlformats.org/officeDocument/2006/relationships">
-  <p:cSld>
-    <p:bg>
-      <p:bgPr>
-        <a:solidFill>
-          <a:srgbClr val="FBF7EF"/>
-        </a:solidFill>
-        <a:effectLst/>
-      </p:bgPr>
-    </p:bg>
-    <p:spTree>
-      <p:nvGrpSpPr>
-        <p:cNvPr id="1" name=""/>
-        <p:cNvGrpSpPr/>
-        <p:nvPr/>
-      </p:nvGrpSpPr>
-      <p:grpSpPr/>
-      <p:sp>
-        <p:nvSpPr>
-          <p:cNvPr id="2" name="TextBox 1"/>
-          <p:cNvSpPr txBox="1"/>
-          <p:nvPr/>
-        </p:nvSpPr>
-        <p:spPr>
-          <a:xfrm>
-            <a:off x="640000" y="380000"/>
-            <a:ext cx="10912000" cy="420000"/>
-          </a:xfrm>
-          <a:prstGeom prst="rect">
-            <a:avLst/>
-          </a:prstGeom>
-          <a:noFill/>
-        </p:spPr>
-        <p:txBody>
-          <a:bodyPr wrap="square">
-            <a:spAutoFit/>
-          </a:bodyPr>
-          <a:lstStyle/>
-          <a:p>
-            <a:pPr>
-              <a:spcAft>
-                <a:spcPts val="630"/>
-              </a:spcAft>
-            </a:pPr>
-            <a:r>
-              <a:rPr sz="1400" b="1">
-                <a:solidFill>
-                  <a:srgbClr val="E8793A"/>
-                </a:solidFill>
-                <a:latin typeface="Nunito Sans"/>
-              </a:rPr>
-              <a:t>PARA EMPEZAR</a:t>
-            </a:r>
-          </a:p>
-        </p:txBody>
-      </p:sp>
-      <p:sp>
-        <p:nvSpPr>
-          <p:cNvPr id="3" name="Rectangle 2"/>
-          <p:cNvSpPr/>
-          <p:nvPr/>
-        </p:nvSpPr>
-        <p:spPr>
-          <a:xfrm>
-            <a:off x="640000" y="1300000"/>
-            <a:ext cx="90000" cy="2400000"/>
-          </a:xfrm>
-          <a:prstGeom prst="rect">
-            <a:avLst/>
-          </a:prstGeom>
-          <a:solidFill>
-            <a:srgbClr val="E8793A"/>
-          </a:solidFill>
-          <a:ln>
-            <a:noFill/>
-          </a:ln>
-        </p:spPr>
-        <p:style>
-          <a:lnRef idx="1">
-            <a:schemeClr val="accent1"/>
-          </a:lnRef>
-          <a:fillRef idx="3">
-            <a:schemeClr val="accent1"/>
-          </a:fillRef>
-          <a:effectRef idx="2">
-            <a:schemeClr val="accent1"/>
-          </a:effectRef>
-          <a:fontRef idx="minor">
-            <a:schemeClr val="lt1"/>
-          </a:fontRef>
-        </p:style>
-        <p:txBody>
-          <a:bodyPr rtlCol="0" anchor="ctr"/>
-          <a:lstStyle/>
-          <a:p>
-            <a:pPr algn="ctr"/>
-          </a:p>
-        </p:txBody>
-      </p:sp>
-      <p:sp>
-        <p:nvSpPr>
-          <p:cNvPr id="4" name="TextBox 3"/>
-          <p:cNvSpPr txBox="1"/>
-          <p:nvPr/>
-        </p:nvSpPr>
-        <p:spPr>
-          <a:xfrm>
-            <a:off x="940000" y="1300000"/>
-            <a:ext cx="10612000" cy="2600000"/>
-          </a:xfrm>
-          <a:prstGeom prst="rect">
-            <a:avLst/>
-          </a:prstGeom>
-          <a:noFill/>
-        </p:spPr>
-        <p:txBody>
-          <a:bodyPr wrap="square" anchor="ctr">
-            <a:spAutoFit/>
-          </a:bodyPr>
-          <a:lstStyle/>
-          <a:p>
-            <a:pPr>
-              <a:spcAft>
-                <a:spcPts val="1530"/>
-              </a:spcAft>
-            </a:pPr>
-            <a:r>
-              <a:rPr sz="3400" b="1">
-                <a:solidFill>
-                  <a:srgbClr val="1F2A44"/>
-                </a:solidFill>
-                <a:latin typeface="Nunito Sans"/>
-              </a:rPr>
-              <a:t>Una chica vuelve de la excursión. Su madre le pregunta: «¿Bien?». La chica: «Sí». Su padre le pregunta: «¿Qué es lo que más te ha gustado?».</a:t>
-            </a:r>
-          </a:p>
-        </p:txBody>
-      </p:sp>
-      <p:sp>
-        <p:nvSpPr>
-          <p:cNvPr id="5" name="TextBox 4"/>
-          <p:cNvSpPr txBox="1"/>
-          <p:nvPr/>
-        </p:nvSpPr>
-        <p:spPr>
-          <a:xfrm>
-            <a:off x="640000" y="4300000"/>
-            <a:ext cx="10912000" cy="1200000"/>
-          </a:xfrm>
-          <a:prstGeom prst="rect">
-            <a:avLst/>
-          </a:prstGeom>
-          <a:noFill/>
-        </p:spPr>
-        <p:txBody>
-          <a:bodyPr wrap="square">
-            <a:spAutoFit/>
-          </a:bodyPr>
-          <a:lstStyle/>
-          <a:p>
-            <a:pPr>
-              <a:spcAft>
-                <a:spcPts val="1170"/>
-              </a:spcAft>
-            </a:pPr>
-            <a:r>
-              <a:rPr sz="2600" b="0">
-                <a:solidFill>
-                  <a:srgbClr val="4A5568"/>
-                </a:solidFill>
-                <a:latin typeface="Nunito Sans"/>
-              </a:rPr>
-              <a:t>¿Con qué pregunta se entera de más cosas?</a:t>
-            </a:r>
-          </a:p>
-        </p:txBody>
-      </p:sp>
-    </p:spTree>
-  </p:cSld>
-  <p:clrMapOvr>
-    <a:masterClrMapping/>
-  </p:clrMapOvr>
-</p:sld>
-</file>
-
-<file path=ppt/slides/slide5.xml><?xml version="1.0" encoding="utf-8"?>
-<p:sld xmlns:a="http://schemas.openxmlformats.org/drawingml/2006/main" xmlns:p="http://schemas.openxmlformats.org/presentationml/2006/main" xmlns:r="http://schemas.openxmlformats.org/officeDocument/2006/relationships">
-  <p:cSld>
-    <p:bg>
-      <p:bgPr>
-        <a:solidFill>
-          <a:srgbClr val="1F2A44"/>
-        </a:solidFill>
-        <a:effectLst/>
-      </p:bgPr>
-    </p:bg>
-    <p:spTree>
-      <p:nvGrpSpPr>
-        <p:cNvPr id="1" name=""/>
-        <p:cNvGrpSpPr/>
-        <p:nvPr/>
-      </p:nvGrpSpPr>
-      <p:grpSpPr/>
-      <p:sp>
-        <p:nvSpPr>
-          <p:cNvPr id="2" name="TextBox 1"/>
-          <p:cNvSpPr txBox="1"/>
-          <p:nvPr/>
-        </p:nvSpPr>
-        <p:spPr>
-          <a:xfrm>
-            <a:off x="640000" y="2300000"/>
-            <a:ext cx="10912000" cy="500000"/>
-          </a:xfrm>
-          <a:prstGeom prst="rect">
-            <a:avLst/>
-          </a:prstGeom>
-          <a:noFill/>
-        </p:spPr>
-        <p:txBody>
-          <a:bodyPr wrap="square">
-            <a:spAutoFit/>
-          </a:bodyPr>
-          <a:lstStyle/>
-          <a:p>
-            <a:pPr>
-              <a:spcAft>
-                <a:spcPts val="810"/>
-              </a:spcAft>
-            </a:pPr>
-            <a:r>
-              <a:rPr sz="1800" b="1">
-                <a:solidFill>
-                  <a:srgbClr val="F4B183"/>
-                </a:solidFill>
-                <a:latin typeface="Nunito Sans"/>
-              </a:rPr>
-              <a:t>BLOQUE 1</a:t>
-            </a:r>
-          </a:p>
-        </p:txBody>
-      </p:sp>
-      <p:sp>
-        <p:nvSpPr>
-          <p:cNvPr id="3" name="TextBox 2"/>
-          <p:cNvSpPr txBox="1"/>
-          <p:nvPr/>
-        </p:nvSpPr>
-        <p:spPr>
-          <a:xfrm>
-            <a:off x="640000" y="2800000"/>
-            <a:ext cx="10912000" cy="800000"/>
-          </a:xfrm>
-          <a:prstGeom prst="rect">
-            <a:avLst/>
-          </a:prstGeom>
-          <a:noFill/>
-        </p:spPr>
-        <p:txBody>
-          <a:bodyPr wrap="square">
-            <a:spAutoFit/>
-          </a:bodyPr>
-          <a:lstStyle/>
-          <a:p>
-            <a:pPr>
-              <a:spcAft>
-                <a:spcPts val="2160"/>
-              </a:spcAft>
-            </a:pPr>
-            <a:r>
-              <a:rPr sz="4800" b="1">
-                <a:solidFill>
-                  <a:srgbClr val="FBF7EF"/>
-                </a:solidFill>
-                <a:latin typeface="Fredoka"/>
-              </a:rPr>
-              <a:t>Tipos de preguntas</a:t>
-            </a:r>
-          </a:p>
-        </p:txBody>
-      </p:sp>
-    </p:spTree>
-  </p:cSld>
-  <p:clrMapOvr>
-    <a:masterClrMapping/>
-  </p:clrMapOvr>
-</p:sld>
-</file>
-
-<file path=ppt/slides/slide6.xml><?xml version="1.0" encoding="utf-8"?>
-<p:sld xmlns:a="http://schemas.openxmlformats.org/drawingml/2006/main" xmlns:p="http://schemas.openxmlformats.org/presentationml/2006/main" xmlns:r="http://schemas.openxmlformats.org/officeDocument/2006/relationships">
-  <p:cSld>
-    <p:bg>
-      <p:bgPr>
-        <a:solidFill>
-          <a:srgbClr val="FBF7EF"/>
-        </a:solidFill>
-        <a:effectLst/>
-      </p:bgPr>
-    </p:bg>
-    <p:spTree>
-      <p:nvGrpSpPr>
-        <p:cNvPr id="1" name=""/>
-        <p:cNvGrpSpPr/>
-        <p:nvPr/>
-      </p:nvGrpSpPr>
-      <p:grpSpPr/>
-      <p:sp>
-        <p:nvSpPr>
-          <p:cNvPr id="2" name="TextBox 1"/>
-          <p:cNvSpPr txBox="1"/>
-          <p:nvPr/>
-        </p:nvSpPr>
-        <p:spPr>
-          <a:xfrm>
-            <a:off x="640000" y="380000"/>
-            <a:ext cx="10912000" cy="420000"/>
-          </a:xfrm>
-          <a:prstGeom prst="rect">
-            <a:avLst/>
-          </a:prstGeom>
-          <a:noFill/>
-        </p:spPr>
-        <p:txBody>
-          <a:bodyPr wrap="square">
-            <a:spAutoFit/>
-          </a:bodyPr>
-          <a:lstStyle/>
-          <a:p>
-            <a:pPr>
-              <a:spcAft>
-                <a:spcPts val="630"/>
-              </a:spcAft>
-            </a:pPr>
-            <a:r>
-              <a:rPr sz="1400" b="1">
-                <a:solidFill>
-                  <a:srgbClr val="E8793A"/>
-                </a:solidFill>
-                <a:latin typeface="Nunito Sans"/>
-              </a:rPr>
-              <a:t>BLOQUE 1 · TIPOS DE PREGUNTAS</a:t>
-            </a:r>
-          </a:p>
-        </p:txBody>
-      </p:sp>
-      <p:sp>
-        <p:nvSpPr>
-          <p:cNvPr id="3" name="TextBox 2"/>
-          <p:cNvSpPr txBox="1"/>
-          <p:nvPr/>
-        </p:nvSpPr>
-        <p:spPr>
-          <a:xfrm>
-            <a:off x="640000" y="760000"/>
-            <a:ext cx="10912000" cy="800000"/>
-          </a:xfrm>
-          <a:prstGeom prst="rect">
-            <a:avLst/>
-          </a:prstGeom>
-          <a:noFill/>
-        </p:spPr>
-        <p:txBody>
-          <a:bodyPr wrap="square">
-            <a:spAutoFit/>
-          </a:bodyPr>
-          <a:lstStyle/>
-          <a:p>
-            <a:pPr>
-              <a:spcAft>
-                <a:spcPts val="1710"/>
-              </a:spcAft>
-            </a:pPr>
-            <a:r>
-              <a:rPr sz="3800" b="1">
-                <a:solidFill>
-                  <a:srgbClr val="1F2A44"/>
-                </a:solidFill>
-                <a:latin typeface="Fredoka"/>
-              </a:rPr>
-              <a:t>Pregunta cerrada</a:t>
-            </a:r>
-          </a:p>
-        </p:txBody>
-      </p:sp>
-      <p:sp>
-        <p:nvSpPr>
-          <p:cNvPr id="4" name="Rectangle 3"/>
-          <p:cNvSpPr/>
-          <p:nvPr/>
-        </p:nvSpPr>
-        <p:spPr>
-          <a:xfrm>
-            <a:off x="640000" y="1650000"/>
-            <a:ext cx="10912000" cy="1150000"/>
-          </a:xfrm>
-          <a:prstGeom prst="rect">
-            <a:avLst/>
-          </a:prstGeom>
-          <a:solidFill>
-            <a:srgbClr val="EAF0F7"/>
-          </a:solidFill>
-          <a:ln>
-            <a:noFill/>
-          </a:ln>
-        </p:spPr>
-        <p:style>
-          <a:lnRef idx="1">
-            <a:schemeClr val="accent1"/>
-          </a:lnRef>
-          <a:fillRef idx="3">
-            <a:schemeClr val="accent1"/>
-          </a:fillRef>
-          <a:effectRef idx="2">
-            <a:schemeClr val="accent1"/>
-          </a:effectRef>
-          <a:fontRef idx="minor">
-            <a:schemeClr val="lt1"/>
-          </a:fontRef>
-        </p:style>
-        <p:txBody>
-          <a:bodyPr rtlCol="0" anchor="ctr"/>
-          <a:lstStyle/>
-          <a:p>
-            <a:pPr algn="ctr"/>
-          </a:p>
-        </p:txBody>
-      </p:sp>
-      <p:sp>
-        <p:nvSpPr>
-          <p:cNvPr id="5" name="TextBox 4"/>
-          <p:cNvSpPr txBox="1"/>
-          <p:nvPr/>
-        </p:nvSpPr>
-        <p:spPr>
-          <a:xfrm>
-            <a:off x="840000" y="1730000"/>
-            <a:ext cx="10512000" cy="1000000"/>
-          </a:xfrm>
-          <a:prstGeom prst="rect">
-            <a:avLst/>
-          </a:prstGeom>
-          <a:noFill/>
-        </p:spPr>
-        <p:txBody>
-          <a:bodyPr wrap="square" anchor="ctr">
-            <a:spAutoFit/>
-          </a:bodyPr>
-          <a:lstStyle/>
-          <a:p>
-            <a:pPr>
-              <a:spcAft>
-                <a:spcPts val="1260"/>
-              </a:spcAft>
-            </a:pPr>
-            <a:r>
-              <a:rPr sz="2800" b="1">
-                <a:solidFill>
-                  <a:srgbClr val="1F2A44"/>
-                </a:solidFill>
-                <a:latin typeface="Nunito Sans"/>
-              </a:rPr>
-              <a:t>Se contesta con </a:t>
-            </a:r>
-            <a:r>
-              <a:rPr sz="2800" b="1">
-                <a:solidFill>
-                  <a:srgbClr val="1F2A44"/>
-                </a:solidFill>
-                <a:latin typeface="Nunito Sans"/>
-              </a:rPr>
-              <a:t>sí</a:t>
-            </a:r>
-            <a:r>
-              <a:rPr sz="2800" b="1">
-                <a:solidFill>
-                  <a:srgbClr val="1F2A44"/>
-                </a:solidFill>
-                <a:latin typeface="Nunito Sans"/>
-              </a:rPr>
-              <a:t>, </a:t>
-            </a:r>
-            <a:r>
-              <a:rPr sz="2800" b="1">
-                <a:solidFill>
-                  <a:srgbClr val="1F2A44"/>
-                </a:solidFill>
-                <a:latin typeface="Nunito Sans"/>
-              </a:rPr>
-              <a:t>no</a:t>
-            </a:r>
-            <a:r>
-              <a:rPr sz="2800" b="1">
-                <a:solidFill>
-                  <a:srgbClr val="1F2A44"/>
-                </a:solidFill>
-                <a:latin typeface="Nunito Sans"/>
-              </a:rPr>
-              <a:t> o un dato corto.</a:t>
-            </a:r>
-          </a:p>
-        </p:txBody>
-      </p:sp>
-      <p:sp>
-        <p:nvSpPr>
-          <p:cNvPr id="6" name="TextBox 5"/>
-          <p:cNvSpPr txBox="1"/>
-          <p:nvPr/>
-        </p:nvSpPr>
-        <p:spPr>
-          <a:xfrm>
-            <a:off x="640000" y="3000000"/>
-            <a:ext cx="10912000" cy="3458000"/>
-          </a:xfrm>
-          <a:prstGeom prst="rect">
-            <a:avLst/>
-          </a:prstGeom>
-          <a:noFill/>
-        </p:spPr>
-        <p:txBody>
-          <a:bodyPr wrap="square">
-            <a:spAutoFit/>
-          </a:bodyPr>
-          <a:lstStyle/>
-          <a:p>
-            <a:pPr>
-              <a:spcAft>
-                <a:spcPts val="1260"/>
-              </a:spcAft>
-            </a:pPr>
-            <a:r>
-              <a:rPr sz="2800" b="1">
-                <a:solidFill>
-                  <a:srgbClr val="E8793A"/>
-                </a:solidFill>
-                <a:latin typeface="Nunito Sans"/>
-              </a:rPr>
-              <a:t>• </a:t>
-            </a:r>
-            <a:r>
-              <a:rPr sz="2800" b="0">
-                <a:solidFill>
-                  <a:srgbClr val="1F2A44"/>
-                </a:solidFill>
-                <a:latin typeface="Nunito Sans"/>
-              </a:rPr>
-              <a:t>«¿Has cenado?»</a:t>
-            </a:r>
-          </a:p>
-          <a:p>
-            <a:pPr>
-              <a:spcAft>
-                <a:spcPts val="1260"/>
-              </a:spcAft>
-            </a:pPr>
-            <a:r>
-              <a:rPr sz="2800" b="1">
-                <a:solidFill>
-                  <a:srgbClr val="E8793A"/>
-                </a:solidFill>
-                <a:latin typeface="Nunito Sans"/>
-              </a:rPr>
-              <a:t>• </a:t>
-            </a:r>
-            <a:r>
-              <a:rPr sz="2800" b="0">
-                <a:solidFill>
-                  <a:srgbClr val="1F2A44"/>
-                </a:solidFill>
-                <a:latin typeface="Nunito Sans"/>
-              </a:rPr>
-              <a:t>«¿A qué hora empieza el partido?»</a:t>
-            </a:r>
-          </a:p>
-          <a:p>
-            <a:pPr>
-              <a:spcAft>
-                <a:spcPts val="1260"/>
-              </a:spcAft>
-            </a:pPr>
-            <a:r>
-              <a:rPr sz="2800" b="1">
-                <a:solidFill>
-                  <a:srgbClr val="E8793A"/>
-                </a:solidFill>
-                <a:latin typeface="Nunito Sans"/>
-              </a:rPr>
-              <a:t>• </a:t>
-            </a:r>
-            <a:r>
-              <a:rPr sz="2800" b="0">
-                <a:solidFill>
-                  <a:srgbClr val="1F2A44"/>
-                </a:solidFill>
-                <a:latin typeface="Nunito Sans"/>
-              </a:rPr>
-              <a:t>Sirve para comprobar un dato concreto</a:t>
-            </a:r>
-          </a:p>
-        </p:txBody>
-      </p:sp>
-    </p:spTree>
-  </p:cSld>
-  <p:clrMapOvr>
-    <a:masterClrMapping/>
-  </p:clrMapOvr>
-</p:sld>
-</file>
-
-<file path=ppt/slides/slide7.xml><?xml version="1.0" encoding="utf-8"?>
-<p:sld xmlns:a="http://schemas.openxmlformats.org/drawingml/2006/main" xmlns:p="http://schemas.openxmlformats.org/presentationml/2006/main" xmlns:r="http://schemas.openxmlformats.org/officeDocument/2006/relationships">
-  <p:cSld>
-    <p:bg>
-      <p:bgPr>
-        <a:solidFill>
-          <a:srgbClr val="FBF7EF"/>
-        </a:solidFill>
-        <a:effectLst/>
-      </p:bgPr>
-    </p:bg>
-    <p:spTree>
-      <p:nvGrpSpPr>
-        <p:cNvPr id="1" name=""/>
-        <p:cNvGrpSpPr/>
-        <p:nvPr/>
-      </p:nvGrpSpPr>
-      <p:grpSpPr/>
-      <p:sp>
-        <p:nvSpPr>
-          <p:cNvPr id="2" name="TextBox 1"/>
-          <p:cNvSpPr txBox="1"/>
-          <p:nvPr/>
-        </p:nvSpPr>
-        <p:spPr>
-          <a:xfrm>
-            <a:off x="640000" y="380000"/>
-            <a:ext cx="10912000" cy="420000"/>
-          </a:xfrm>
-          <a:prstGeom prst="rect">
-            <a:avLst/>
-          </a:prstGeom>
-          <a:noFill/>
-        </p:spPr>
-        <p:txBody>
-          <a:bodyPr wrap="square">
-            <a:spAutoFit/>
-          </a:bodyPr>
-          <a:lstStyle/>
-          <a:p>
-            <a:pPr>
-              <a:spcAft>
-                <a:spcPts val="630"/>
-              </a:spcAft>
-            </a:pPr>
-            <a:r>
-              <a:rPr sz="1400" b="1">
-                <a:solidFill>
-                  <a:srgbClr val="E8793A"/>
-                </a:solidFill>
-                <a:latin typeface="Nunito Sans"/>
-              </a:rPr>
-              <a:t>BLOQUE 1 · TIPOS DE PREGUNTAS</a:t>
-            </a:r>
-          </a:p>
-        </p:txBody>
-      </p:sp>
-      <p:sp>
-        <p:nvSpPr>
-          <p:cNvPr id="3" name="TextBox 2"/>
-          <p:cNvSpPr txBox="1"/>
-          <p:nvPr/>
-        </p:nvSpPr>
-        <p:spPr>
-          <a:xfrm>
-            <a:off x="640000" y="760000"/>
-            <a:ext cx="10912000" cy="800000"/>
-          </a:xfrm>
-          <a:prstGeom prst="rect">
-            <a:avLst/>
-          </a:prstGeom>
-          <a:noFill/>
-        </p:spPr>
-        <p:txBody>
-          <a:bodyPr wrap="square">
-            <a:spAutoFit/>
-          </a:bodyPr>
-          <a:lstStyle/>
-          <a:p>
-            <a:pPr>
-              <a:spcAft>
-                <a:spcPts val="1710"/>
-              </a:spcAft>
-            </a:pPr>
-            <a:r>
-              <a:rPr sz="3800" b="1">
-                <a:solidFill>
-                  <a:srgbClr val="1F2A44"/>
-                </a:solidFill>
-                <a:latin typeface="Fredoka"/>
-              </a:rPr>
-              <a:t>Pregunta abierta</a:t>
-            </a:r>
-          </a:p>
-        </p:txBody>
-      </p:sp>
-      <p:sp>
-        <p:nvSpPr>
-          <p:cNvPr id="4" name="Rectangle 3"/>
-          <p:cNvSpPr/>
-          <p:nvPr/>
-        </p:nvSpPr>
-        <p:spPr>
-          <a:xfrm>
-            <a:off x="640000" y="1650000"/>
-            <a:ext cx="10912000" cy="1150000"/>
-          </a:xfrm>
-          <a:prstGeom prst="rect">
-            <a:avLst/>
-          </a:prstGeom>
-          <a:solidFill>
-            <a:srgbClr val="EAF0F7"/>
-          </a:solidFill>
-          <a:ln>
-            <a:noFill/>
-          </a:ln>
-        </p:spPr>
-        <p:style>
-          <a:lnRef idx="1">
-            <a:schemeClr val="accent1"/>
-          </a:lnRef>
-          <a:fillRef idx="3">
-            <a:schemeClr val="accent1"/>
-          </a:fillRef>
-          <a:effectRef idx="2">
-            <a:schemeClr val="accent1"/>
-          </a:effectRef>
-          <a:fontRef idx="minor">
-            <a:schemeClr val="lt1"/>
-          </a:fontRef>
-        </p:style>
-        <p:txBody>
-          <a:bodyPr rtlCol="0" anchor="ctr"/>
-          <a:lstStyle/>
-          <a:p>
-            <a:pPr algn="ctr"/>
-          </a:p>
-        </p:txBody>
-      </p:sp>
-      <p:sp>
-        <p:nvSpPr>
-          <p:cNvPr id="5" name="TextBox 4"/>
-          <p:cNvSpPr txBox="1"/>
-          <p:nvPr/>
-        </p:nvSpPr>
-        <p:spPr>
-          <a:xfrm>
-            <a:off x="840000" y="1730000"/>
-            <a:ext cx="10512000" cy="1000000"/>
-          </a:xfrm>
-          <a:prstGeom prst="rect">
-            <a:avLst/>
-          </a:prstGeom>
-          <a:noFill/>
-        </p:spPr>
-        <p:txBody>
-          <a:bodyPr wrap="square" anchor="ctr">
-            <a:spAutoFit/>
-          </a:bodyPr>
-          <a:lstStyle/>
-          <a:p>
-            <a:pPr>
-              <a:spcAft>
-                <a:spcPts val="1260"/>
-              </a:spcAft>
-            </a:pPr>
-            <a:r>
-              <a:rPr sz="2800" b="1">
-                <a:solidFill>
-                  <a:srgbClr val="1F2A44"/>
-                </a:solidFill>
-                <a:latin typeface="Nunito Sans"/>
-              </a:rPr>
-              <a:t>Pide explicar, contar o dar razones. No se contesta con una palabra.</a:t>
-            </a:r>
-          </a:p>
-        </p:txBody>
-      </p:sp>
-      <p:sp>
-        <p:nvSpPr>
-          <p:cNvPr id="6" name="TextBox 5"/>
-          <p:cNvSpPr txBox="1"/>
-          <p:nvPr/>
-        </p:nvSpPr>
-        <p:spPr>
-          <a:xfrm>
-            <a:off x="640000" y="3000000"/>
-            <a:ext cx="10912000" cy="3458000"/>
-          </a:xfrm>
-          <a:prstGeom prst="rect">
-            <a:avLst/>
-          </a:prstGeom>
-          <a:noFill/>
-        </p:spPr>
-        <p:txBody>
-          <a:bodyPr wrap="square">
-            <a:spAutoFit/>
-          </a:bodyPr>
-          <a:lstStyle/>
-          <a:p>
-            <a:pPr>
-              <a:spcAft>
-                <a:spcPts val="1260"/>
-              </a:spcAft>
-            </a:pPr>
-            <a:r>
-              <a:rPr sz="2800" b="1">
-                <a:solidFill>
-                  <a:srgbClr val="E8793A"/>
-                </a:solidFill>
-                <a:latin typeface="Nunito Sans"/>
-              </a:rPr>
-              <a:t>• </a:t>
-            </a:r>
-            <a:r>
-              <a:rPr sz="2800" b="0">
-                <a:solidFill>
-                  <a:srgbClr val="1F2A44"/>
-                </a:solidFill>
-                <a:latin typeface="Nunito Sans"/>
-              </a:rPr>
-              <a:t>«¿Qué te ha parecido la película?»</a:t>
-            </a:r>
-          </a:p>
-          <a:p>
-            <a:pPr>
-              <a:spcAft>
-                <a:spcPts val="1260"/>
-              </a:spcAft>
-            </a:pPr>
-            <a:r>
-              <a:rPr sz="2800" b="1">
-                <a:solidFill>
-                  <a:srgbClr val="E8793A"/>
-                </a:solidFill>
-                <a:latin typeface="Nunito Sans"/>
-              </a:rPr>
-              <a:t>• </a:t>
-            </a:r>
-            <a:r>
-              <a:rPr sz="2800" b="0">
-                <a:solidFill>
-                  <a:srgbClr val="1F2A44"/>
-                </a:solidFill>
-                <a:latin typeface="Nunito Sans"/>
-              </a:rPr>
-              <a:t>«¿Por qué piensas eso?»</a:t>
-            </a:r>
-          </a:p>
-          <a:p>
-            <a:pPr>
-              <a:spcAft>
-                <a:spcPts val="1260"/>
-              </a:spcAft>
-            </a:pPr>
-            <a:r>
-              <a:rPr sz="2800" b="1">
-                <a:solidFill>
-                  <a:srgbClr val="E8793A"/>
-                </a:solidFill>
-                <a:latin typeface="Nunito Sans"/>
-              </a:rPr>
-              <a:t>• </a:t>
-            </a:r>
-            <a:r>
-              <a:rPr sz="2800" b="0">
-                <a:solidFill>
-                  <a:srgbClr val="1F2A44"/>
-                </a:solidFill>
-                <a:latin typeface="Nunito Sans"/>
-              </a:rPr>
-              <a:t>Sirve para entender a alguien o algo</a:t>
-            </a:r>
-          </a:p>
-        </p:txBody>
-      </p:sp>
-    </p:spTree>
-  </p:cSld>
-  <p:clrMapOvr>
-    <a:masterClrMapping/>
-  </p:clrMapOvr>
-</p:sld>
-</file>
-
-<file path=ppt/slides/slide8.xml><?xml version="1.0" encoding="utf-8"?>
-<p:sld xmlns:a="http://schemas.openxmlformats.org/drawingml/2006/main" xmlns:p="http://schemas.openxmlformats.org/presentationml/2006/main" xmlns:r="http://schemas.openxmlformats.org/officeDocument/2006/relationships">
-  <p:cSld>
-    <p:bg>
-      <p:bgPr>
-        <a:solidFill>
-          <a:srgbClr val="FBF7EF"/>
-        </a:solidFill>
-        <a:effectLst/>
-      </p:bgPr>
-    </p:bg>
-    <p:spTree>
-      <p:nvGrpSpPr>
-        <p:cNvPr id="1" name=""/>
-        <p:cNvGrpSpPr/>
-        <p:nvPr/>
-      </p:nvGrpSpPr>
-      <p:grpSpPr/>
-      <p:sp>
-        <p:nvSpPr>
-          <p:cNvPr id="2" name="TextBox 1"/>
-          <p:cNvSpPr txBox="1"/>
-          <p:nvPr/>
-        </p:nvSpPr>
-        <p:spPr>
-          <a:xfrm>
-            <a:off x="640000" y="380000"/>
-            <a:ext cx="10912000" cy="420000"/>
-          </a:xfrm>
-          <a:prstGeom prst="rect">
-            <a:avLst/>
-          </a:prstGeom>
-          <a:noFill/>
-        </p:spPr>
-        <p:txBody>
-          <a:bodyPr wrap="square">
-            <a:spAutoFit/>
-          </a:bodyPr>
-          <a:lstStyle/>
-          <a:p>
-            <a:pPr>
-              <a:spcAft>
-                <a:spcPts val="630"/>
-              </a:spcAft>
-            </a:pPr>
-            <a:r>
-              <a:rPr sz="1400" b="1">
-                <a:solidFill>
-                  <a:srgbClr val="E8793A"/>
-                </a:solidFill>
-                <a:latin typeface="Nunito Sans"/>
-              </a:rPr>
-              <a:t>BLOQUE 1 · TIPOS DE PREGUNTAS</a:t>
-            </a:r>
-          </a:p>
-        </p:txBody>
-      </p:sp>
-      <p:sp>
-        <p:nvSpPr>
-          <p:cNvPr id="3" name="TextBox 2"/>
-          <p:cNvSpPr txBox="1"/>
-          <p:nvPr/>
-        </p:nvSpPr>
-        <p:spPr>
-          <a:xfrm>
-            <a:off x="640000" y="760000"/>
-            <a:ext cx="10912000" cy="800000"/>
-          </a:xfrm>
-          <a:prstGeom prst="rect">
-            <a:avLst/>
-          </a:prstGeom>
-          <a:noFill/>
-        </p:spPr>
-        <p:txBody>
-          <a:bodyPr wrap="square">
-            <a:spAutoFit/>
-          </a:bodyPr>
-          <a:lstStyle/>
-          <a:p>
-            <a:pPr>
-              <a:spcAft>
-                <a:spcPts val="1710"/>
-              </a:spcAft>
-            </a:pPr>
-            <a:r>
-              <a:rPr sz="3800" b="1">
-                <a:solidFill>
-                  <a:srgbClr val="1F2A44"/>
-                </a:solidFill>
-                <a:latin typeface="Fredoka"/>
-              </a:rPr>
-              <a:t>La pregunta del pensador crítico</a:t>
-            </a:r>
-          </a:p>
-        </p:txBody>
-      </p:sp>
-      <p:sp>
-        <p:nvSpPr>
-          <p:cNvPr id="4" name="TextBox 3"/>
-          <p:cNvSpPr txBox="1"/>
-          <p:nvPr/>
-        </p:nvSpPr>
-        <p:spPr>
-          <a:xfrm>
-            <a:off x="840000" y="1730000"/>
-            <a:ext cx="10512000" cy="1000000"/>
-          </a:xfrm>
-          <a:prstGeom prst="rect">
-            <a:avLst/>
-          </a:prstGeom>
-          <a:noFill/>
-        </p:spPr>
-        <p:txBody>
-          <a:bodyPr wrap="square" anchor="ctr">
-            <a:spAutoFit/>
-          </a:bodyPr>
-          <a:lstStyle/>
-          <a:p>
-            <a:pPr>
-              <a:spcAft>
-                <a:spcPts val="1080"/>
-              </a:spcAft>
-            </a:pPr>
-            <a:r>
-              <a:rPr sz="2400" b="0">
-                <a:solidFill>
-                  <a:srgbClr val="1F2A44"/>
-                </a:solidFill>
-                <a:latin typeface="Nunito Sans"/>
-              </a:rPr>
-              <a:t>«¿Cómo lo sabes?» pide la </a:t>
-            </a:r>
-            <a:r>
-              <a:rPr sz="2400" b="1">
-                <a:solidFill>
-                  <a:srgbClr val="1F2A44"/>
-                </a:solidFill>
-                <a:latin typeface="Nunito Sans"/>
-              </a:rPr>
-              <a:t>fuente</a:t>
-            </a:r>
-            <a:r>
-              <a:rPr sz="2400" b="0">
-                <a:solidFill>
-                  <a:srgbClr val="1F2A44"/>
-                </a:solidFill>
-                <a:latin typeface="Nunito Sans"/>
-              </a:rPr>
-              <a:t> y las </a:t>
-            </a:r>
-            <a:r>
-              <a:rPr sz="2400" b="1">
-                <a:solidFill>
-                  <a:srgbClr val="1F2A44"/>
-                </a:solidFill>
-                <a:latin typeface="Nunito Sans"/>
-              </a:rPr>
-              <a:t>razones</a:t>
-            </a:r>
-            <a:r>
-              <a:rPr sz="2400" b="0">
-                <a:solidFill>
-                  <a:srgbClr val="1F2A44"/>
-                </a:solidFill>
-                <a:latin typeface="Nunito Sans"/>
-              </a:rPr>
-              <a:t>.</a:t>
-            </a:r>
-          </a:p>
-        </p:txBody>
-      </p:sp>
-      <p:sp>
-        <p:nvSpPr>
-          <p:cNvPr id="5" name="TextBox 4"/>
-          <p:cNvSpPr txBox="1"/>
-          <p:nvPr/>
-        </p:nvSpPr>
-        <p:spPr>
-          <a:xfrm>
-            <a:off x="640000" y="3000000"/>
-            <a:ext cx="10912000" cy="3458000"/>
-          </a:xfrm>
-          <a:prstGeom prst="rect">
-            <a:avLst/>
-          </a:prstGeom>
-          <a:noFill/>
-        </p:spPr>
-        <p:txBody>
-          <a:bodyPr wrap="square">
-            <a:spAutoFit/>
-          </a:bodyPr>
-          <a:lstStyle/>
-          <a:p>
-            <a:pPr>
-              <a:spcAft>
-                <a:spcPts val="1260"/>
-              </a:spcAft>
-            </a:pPr>
-            <a:r>
-              <a:rPr sz="2800" b="1">
-                <a:solidFill>
-                  <a:srgbClr val="E8793A"/>
-                </a:solidFill>
-                <a:latin typeface="Nunito Sans"/>
-              </a:rPr>
-              <a:t>• </a:t>
-            </a:r>
-            <a:r>
-              <a:rPr sz="2800" b="1">
-                <a:solidFill>
-                  <a:srgbClr val="1F2A44"/>
-                </a:solidFill>
-                <a:latin typeface="Nunito Sans"/>
-              </a:rPr>
-              <a:t>Fuente:</a:t>
-            </a:r>
-            <a:r>
-              <a:rPr sz="2800" b="0">
-                <a:solidFill>
-                  <a:srgbClr val="1F2A44"/>
-                </a:solidFill>
-                <a:latin typeface="Nunito Sans"/>
-              </a:rPr>
-              <a:t> de dónde sale una información</a:t>
-            </a:r>
-          </a:p>
-          <a:p>
-            <a:pPr>
-              <a:spcAft>
-                <a:spcPts val="1260"/>
-              </a:spcAft>
-            </a:pPr>
-            <a:r>
-              <a:rPr sz="2800" b="1">
-                <a:solidFill>
-                  <a:srgbClr val="E8793A"/>
-                </a:solidFill>
-                <a:latin typeface="Nunito Sans"/>
-              </a:rPr>
-              <a:t>• </a:t>
-            </a:r>
-            <a:r>
-              <a:rPr sz="2800" b="0">
-                <a:solidFill>
-                  <a:srgbClr val="1F2A44"/>
-                </a:solidFill>
-                <a:latin typeface="Nunito Sans"/>
-              </a:rPr>
-              <a:t>«¿Quién lo dijo primero?»</a:t>
-            </a:r>
-          </a:p>
-          <a:p>
-            <a:pPr>
-              <a:spcAft>
-                <a:spcPts val="1260"/>
-              </a:spcAft>
-            </a:pPr>
-            <a:r>
-              <a:rPr sz="2800" b="1">
-                <a:solidFill>
-                  <a:srgbClr val="E8793A"/>
-                </a:solidFill>
-                <a:latin typeface="Nunito Sans"/>
-              </a:rPr>
-              <a:t>• </a:t>
-            </a:r>
-            <a:r>
-              <a:rPr sz="2800" b="0">
-                <a:solidFill>
-                  <a:srgbClr val="1F2A44"/>
-                </a:solidFill>
-                <a:latin typeface="Nunito Sans"/>
-              </a:rPr>
-              <a:t>«¿Dónde lo has visto o leído?»</a:t>
-            </a:r>
-          </a:p>
-          <a:p>
-            <a:pPr>
-              <a:spcAft>
-                <a:spcPts val="1260"/>
-              </a:spcAft>
-            </a:pPr>
-            <a:r>
-              <a:rPr sz="2800" b="1">
-                <a:solidFill>
-                  <a:srgbClr val="E8793A"/>
-                </a:solidFill>
-                <a:latin typeface="Nunito Sans"/>
-              </a:rPr>
-              <a:t>• </a:t>
-            </a:r>
-            <a:r>
-              <a:rPr sz="2800" b="0">
-                <a:solidFill>
-                  <a:srgbClr val="1F2A44"/>
-                </a:solidFill>
-                <a:latin typeface="Nunito Sans"/>
-              </a:rPr>
-              <a:t>«¿Qué pruebas hay? ¿Lo has comprobado?»</a:t>
-            </a:r>
-          </a:p>
-        </p:txBody>
-      </p:sp>
     </p:spTree>
   </p:cSld>
   <p:clrMapOvr>
